--- a/docs/lectures/02_03_lecture/wrangling_summary_stats_stats.pptx
+++ b/docs/lectures/02_03_lecture/wrangling_summary_stats_stats.pptx
@@ -3369,7 +3369,7 @@
             </a:pPr>
             <a:r>
               <a:rPr/>
-              <a:t>2026-07-02</a:t>
+              <a:t>2026-07-03</a:t>
             </a:r>
           </a:p>
         </p:txBody>

--- a/docs/lectures/02_03_lecture/wrangling_summary_stats_stats.pptx
+++ b/docs/lectures/02_03_lecture/wrangling_summary_stats_stats.pptx
@@ -35,6 +35,17 @@
     <p:sldId id="283" r:id="rId29"/>
     <p:sldId id="284" r:id="rId30"/>
     <p:sldId id="285" r:id="rId31"/>
+    <p:sldId id="286" r:id="rId32"/>
+    <p:sldId id="287" r:id="rId33"/>
+    <p:sldId id="288" r:id="rId34"/>
+    <p:sldId id="289" r:id="rId35"/>
+    <p:sldId id="290" r:id="rId36"/>
+    <p:sldId id="291" r:id="rId37"/>
+    <p:sldId id="292" r:id="rId38"/>
+    <p:sldId id="293" r:id="rId39"/>
+    <p:sldId id="294" r:id="rId40"/>
+    <p:sldId id="295" r:id="rId41"/>
+    <p:sldId id="296" r:id="rId42"/>
   </p:sldIdLst>
   <p:sldSz cx="9144000" cy="5143500" type="screen16x9"/>
   <p:notesSz cx="6858000" cy="9144000"/>
@@ -3369,7 +3380,7 @@
             </a:pPr>
             <a:r>
               <a:rPr/>
-              <a:t>2026-07-03</a:t>
+              <a:t>2026-07-04</a:t>
             </a:r>
           </a:p>
         </p:txBody>
@@ -3380,6 +3391,941 @@
 </file>
 
 <file path=ppt/slides/slide10.xml><?xml version="1.0" encoding="utf-8"?>
+<p:sld xmlns:a="http://schemas.openxmlformats.org/drawingml/2006/main" xmlns:r="http://schemas.openxmlformats.org/officeDocument/2006/relationships" xmlns:p="http://schemas.openxmlformats.org/presentationml/2006/main">
+  <p:cSld>
+    <p:spTree>
+      <p:nvGrpSpPr>
+        <p:cNvPr id="1" name=""/>
+        <p:cNvGrpSpPr/>
+        <p:nvPr/>
+      </p:nvGrpSpPr>
+      <p:grpSpPr>
+        <a:xfrm>
+          <a:off x="0" y="0"/>
+          <a:ext cx="0" cy="0"/>
+          <a:chOff x="0" y="0"/>
+          <a:chExt cx="0" cy="0"/>
+        </a:xfrm>
+      </p:grpSpPr>
+      <p:sp>
+        <p:nvSpPr>
+          <p:cNvPr id="3" name="Text Placeholder 2"/>
+          <p:cNvSpPr>
+            <a:spLocks noGrp="1"/>
+          </p:cNvSpPr>
+          <p:nvPr>
+            <p:ph idx="1" type="body"/>
+          </p:nvPr>
+        </p:nvSpPr>
+        <p:spPr/>
+        <p:txBody>
+          <a:bodyPr/>
+          <a:lstStyle/>
+          <a:p>
+            <a:pPr lvl="0" indent="0">
+              <a:buNone/>
+            </a:pPr>
+            <a:r>
+              <a:rPr>
+                <a:solidFill>
+                  <a:srgbClr val="5E5E5E"/>
+                </a:solidFill>
+                <a:latin typeface="Courier"/>
+              </a:rPr>
+              <a:t># filter() keeps rows where the condition is TRUE -------</a:t>
+            </a:r>
+            <a:br/>
+            <a:br/>
+            <a:r>
+              <a:rPr>
+                <a:solidFill>
+                  <a:srgbClr val="5E5E5E"/>
+                </a:solidFill>
+                <a:latin typeface="Courier"/>
+              </a:rPr>
+              <a:t># Keep only sunny leaves</a:t>
+            </a:r>
+            <a:br/>
+            <a:r>
+              <a:rPr>
+                <a:solidFill>
+                  <a:srgbClr val="003B4F"/>
+                </a:solidFill>
+                <a:latin typeface="Courier"/>
+              </a:rPr>
+              <a:t>tree_df </a:t>
+            </a:r>
+            <a:r>
+              <a:rPr>
+                <a:solidFill>
+                  <a:srgbClr val="5E5E5E"/>
+                </a:solidFill>
+                <a:latin typeface="Courier"/>
+              </a:rPr>
+              <a:t>%&gt;%</a:t>
+            </a:r>
+            <a:r>
+              <a:rPr>
+                <a:solidFill>
+                  <a:srgbClr val="003B4F"/>
+                </a:solidFill>
+                <a:latin typeface="Courier"/>
+              </a:rPr>
+              <a:t> </a:t>
+            </a:r>
+            <a:r>
+              <a:rPr>
+                <a:solidFill>
+                  <a:srgbClr val="4758AB"/>
+                </a:solidFill>
+                <a:latin typeface="Courier"/>
+              </a:rPr>
+              <a:t>filter</a:t>
+            </a:r>
+            <a:r>
+              <a:rPr>
+                <a:solidFill>
+                  <a:srgbClr val="003B4F"/>
+                </a:solidFill>
+                <a:latin typeface="Courier"/>
+              </a:rPr>
+              <a:t>(side </a:t>
+            </a:r>
+            <a:r>
+              <a:rPr>
+                <a:solidFill>
+                  <a:srgbClr val="5E5E5E"/>
+                </a:solidFill>
+                <a:latin typeface="Courier"/>
+              </a:rPr>
+              <a:t>==</a:t>
+            </a:r>
+            <a:r>
+              <a:rPr>
+                <a:solidFill>
+                  <a:srgbClr val="003B4F"/>
+                </a:solidFill>
+                <a:latin typeface="Courier"/>
+              </a:rPr>
+              <a:t> </a:t>
+            </a:r>
+            <a:r>
+              <a:rPr>
+                <a:solidFill>
+                  <a:srgbClr val="20794D"/>
+                </a:solidFill>
+                <a:latin typeface="Courier"/>
+              </a:rPr>
+              <a:t>"sunny"</a:t>
+            </a:r>
+            <a:r>
+              <a:rPr>
+                <a:solidFill>
+                  <a:srgbClr val="003B4F"/>
+                </a:solidFill>
+                <a:latin typeface="Courier"/>
+              </a:rPr>
+              <a:t>) </a:t>
+            </a:r>
+            <a:r>
+              <a:rPr>
+                <a:solidFill>
+                  <a:srgbClr val="5E5E5E"/>
+                </a:solidFill>
+                <a:latin typeface="Courier"/>
+              </a:rPr>
+              <a:t>%&gt;%</a:t>
+            </a:r>
+            <a:r>
+              <a:rPr>
+                <a:solidFill>
+                  <a:srgbClr val="003B4F"/>
+                </a:solidFill>
+                <a:latin typeface="Courier"/>
+              </a:rPr>
+              <a:t> </a:t>
+            </a:r>
+            <a:r>
+              <a:rPr>
+                <a:solidFill>
+                  <a:srgbClr val="4758AB"/>
+                </a:solidFill>
+                <a:latin typeface="Courier"/>
+              </a:rPr>
+              <a:t>head</a:t>
+            </a:r>
+            <a:r>
+              <a:rPr>
+                <a:solidFill>
+                  <a:srgbClr val="003B4F"/>
+                </a:solidFill>
+                <a:latin typeface="Courier"/>
+              </a:rPr>
+              <a:t>()</a:t>
+            </a:r>
+          </a:p>
+          <a:p>
+            <a:pPr lvl="0" indent="0">
+              <a:buNone/>
+            </a:pPr>
+            <a:r>
+              <a:rPr>
+                <a:latin typeface="Courier"/>
+              </a:rPr>
+              <a:t># A tibble: 6 × 5
+  index side  weight_g width_cm height_cm
+  &lt;dbl&gt; &lt;chr&gt;    &lt;dbl&gt;    &lt;dbl&gt;     &lt;dbl&gt;
+1     1 sunny        4       12        21
+2     2 sunny        3       14        22
+3     3 sunny        5       12        21
+4     4 sunny        3       13        23
+5     5 sunny        4       15        22
+6     6 sunny        3       13        23</a:t>
+            </a:r>
+          </a:p>
+          <a:p>
+            <a:pPr lvl="0" indent="0">
+              <a:buNone/>
+            </a:pPr>
+            <a:r>
+              <a:rPr>
+                <a:solidFill>
+                  <a:srgbClr val="5E5E5E"/>
+                </a:solidFill>
+                <a:latin typeface="Courier"/>
+              </a:rPr>
+              <a:t># Keep only leaves heavier than 5 g</a:t>
+            </a:r>
+            <a:br/>
+            <a:r>
+              <a:rPr>
+                <a:solidFill>
+                  <a:srgbClr val="003B4F"/>
+                </a:solidFill>
+                <a:latin typeface="Courier"/>
+              </a:rPr>
+              <a:t>tree_df </a:t>
+            </a:r>
+            <a:r>
+              <a:rPr>
+                <a:solidFill>
+                  <a:srgbClr val="5E5E5E"/>
+                </a:solidFill>
+                <a:latin typeface="Courier"/>
+              </a:rPr>
+              <a:t>%&gt;%</a:t>
+            </a:r>
+            <a:r>
+              <a:rPr>
+                <a:solidFill>
+                  <a:srgbClr val="003B4F"/>
+                </a:solidFill>
+                <a:latin typeface="Courier"/>
+              </a:rPr>
+              <a:t> </a:t>
+            </a:r>
+            <a:r>
+              <a:rPr>
+                <a:solidFill>
+                  <a:srgbClr val="4758AB"/>
+                </a:solidFill>
+                <a:latin typeface="Courier"/>
+              </a:rPr>
+              <a:t>filter</a:t>
+            </a:r>
+            <a:r>
+              <a:rPr>
+                <a:solidFill>
+                  <a:srgbClr val="003B4F"/>
+                </a:solidFill>
+                <a:latin typeface="Courier"/>
+              </a:rPr>
+              <a:t>(weight_g </a:t>
+            </a:r>
+            <a:r>
+              <a:rPr>
+                <a:solidFill>
+                  <a:srgbClr val="5E5E5E"/>
+                </a:solidFill>
+                <a:latin typeface="Courier"/>
+              </a:rPr>
+              <a:t>&gt;</a:t>
+            </a:r>
+            <a:r>
+              <a:rPr>
+                <a:solidFill>
+                  <a:srgbClr val="003B4F"/>
+                </a:solidFill>
+                <a:latin typeface="Courier"/>
+              </a:rPr>
+              <a:t> </a:t>
+            </a:r>
+            <a:r>
+              <a:rPr>
+                <a:solidFill>
+                  <a:srgbClr val="AD0000"/>
+                </a:solidFill>
+                <a:latin typeface="Courier"/>
+              </a:rPr>
+              <a:t>5</a:t>
+            </a:r>
+            <a:r>
+              <a:rPr>
+                <a:solidFill>
+                  <a:srgbClr val="003B4F"/>
+                </a:solidFill>
+                <a:latin typeface="Courier"/>
+              </a:rPr>
+              <a:t>) </a:t>
+            </a:r>
+            <a:r>
+              <a:rPr>
+                <a:solidFill>
+                  <a:srgbClr val="5E5E5E"/>
+                </a:solidFill>
+                <a:latin typeface="Courier"/>
+              </a:rPr>
+              <a:t>%&gt;%</a:t>
+            </a:r>
+            <a:r>
+              <a:rPr>
+                <a:solidFill>
+                  <a:srgbClr val="003B4F"/>
+                </a:solidFill>
+                <a:latin typeface="Courier"/>
+              </a:rPr>
+              <a:t> </a:t>
+            </a:r>
+            <a:r>
+              <a:rPr>
+                <a:solidFill>
+                  <a:srgbClr val="4758AB"/>
+                </a:solidFill>
+                <a:latin typeface="Courier"/>
+              </a:rPr>
+              <a:t>head</a:t>
+            </a:r>
+            <a:r>
+              <a:rPr>
+                <a:solidFill>
+                  <a:srgbClr val="003B4F"/>
+                </a:solidFill>
+                <a:latin typeface="Courier"/>
+              </a:rPr>
+              <a:t>()</a:t>
+            </a:r>
+          </a:p>
+          <a:p>
+            <a:pPr lvl="0" indent="0">
+              <a:buNone/>
+            </a:pPr>
+            <a:r>
+              <a:rPr>
+                <a:latin typeface="Courier"/>
+              </a:rPr>
+              <a:t># A tibble: 6 × 5
+  index side  weight_g width_cm height_cm
+  &lt;dbl&gt; &lt;chr&gt;    &lt;dbl&gt;    &lt;dbl&gt;     &lt;dbl&gt;
+1    11 shady        7        9        28
+2    12 shady        8       18        29
+3    13 shady        6       17        27
+4    14 shady        9       18        28
+5    15 shady        8       19        27
+6    16 shady        7       19        28</a:t>
+            </a:r>
+          </a:p>
+          <a:p>
+            <a:pPr lvl="0" indent="0">
+              <a:buNone/>
+            </a:pPr>
+            <a:r>
+              <a:rPr>
+                <a:solidFill>
+                  <a:srgbClr val="5E5E5E"/>
+                </a:solidFill>
+                <a:latin typeface="Courier"/>
+              </a:rPr>
+              <a:t># Combine two conditions with &amp; (AND)</a:t>
+            </a:r>
+            <a:br/>
+            <a:r>
+              <a:rPr>
+                <a:solidFill>
+                  <a:srgbClr val="003B4F"/>
+                </a:solidFill>
+                <a:latin typeface="Courier"/>
+              </a:rPr>
+              <a:t>tree_df </a:t>
+            </a:r>
+            <a:r>
+              <a:rPr>
+                <a:solidFill>
+                  <a:srgbClr val="5E5E5E"/>
+                </a:solidFill>
+                <a:latin typeface="Courier"/>
+              </a:rPr>
+              <a:t>%&gt;%</a:t>
+            </a:r>
+            <a:r>
+              <a:rPr>
+                <a:solidFill>
+                  <a:srgbClr val="003B4F"/>
+                </a:solidFill>
+                <a:latin typeface="Courier"/>
+              </a:rPr>
+              <a:t> </a:t>
+            </a:r>
+            <a:r>
+              <a:rPr>
+                <a:solidFill>
+                  <a:srgbClr val="4758AB"/>
+                </a:solidFill>
+                <a:latin typeface="Courier"/>
+              </a:rPr>
+              <a:t>filter</a:t>
+            </a:r>
+            <a:r>
+              <a:rPr>
+                <a:solidFill>
+                  <a:srgbClr val="003B4F"/>
+                </a:solidFill>
+                <a:latin typeface="Courier"/>
+              </a:rPr>
+              <a:t>(side </a:t>
+            </a:r>
+            <a:r>
+              <a:rPr>
+                <a:solidFill>
+                  <a:srgbClr val="5E5E5E"/>
+                </a:solidFill>
+                <a:latin typeface="Courier"/>
+              </a:rPr>
+              <a:t>==</a:t>
+            </a:r>
+            <a:r>
+              <a:rPr>
+                <a:solidFill>
+                  <a:srgbClr val="003B4F"/>
+                </a:solidFill>
+                <a:latin typeface="Courier"/>
+              </a:rPr>
+              <a:t> </a:t>
+            </a:r>
+            <a:r>
+              <a:rPr>
+                <a:solidFill>
+                  <a:srgbClr val="20794D"/>
+                </a:solidFill>
+                <a:latin typeface="Courier"/>
+              </a:rPr>
+              <a:t>"shady"</a:t>
+            </a:r>
+            <a:r>
+              <a:rPr>
+                <a:solidFill>
+                  <a:srgbClr val="003B4F"/>
+                </a:solidFill>
+                <a:latin typeface="Courier"/>
+              </a:rPr>
+              <a:t>, weight_g </a:t>
+            </a:r>
+            <a:r>
+              <a:rPr>
+                <a:solidFill>
+                  <a:srgbClr val="5E5E5E"/>
+                </a:solidFill>
+                <a:latin typeface="Courier"/>
+              </a:rPr>
+              <a:t>&gt;</a:t>
+            </a:r>
+            <a:r>
+              <a:rPr>
+                <a:solidFill>
+                  <a:srgbClr val="003B4F"/>
+                </a:solidFill>
+                <a:latin typeface="Courier"/>
+              </a:rPr>
+              <a:t> </a:t>
+            </a:r>
+            <a:r>
+              <a:rPr>
+                <a:solidFill>
+                  <a:srgbClr val="AD0000"/>
+                </a:solidFill>
+                <a:latin typeface="Courier"/>
+              </a:rPr>
+              <a:t>7</a:t>
+            </a:r>
+            <a:r>
+              <a:rPr>
+                <a:solidFill>
+                  <a:srgbClr val="003B4F"/>
+                </a:solidFill>
+                <a:latin typeface="Courier"/>
+              </a:rPr>
+              <a:t>) </a:t>
+            </a:r>
+            <a:r>
+              <a:rPr>
+                <a:solidFill>
+                  <a:srgbClr val="5E5E5E"/>
+                </a:solidFill>
+                <a:latin typeface="Courier"/>
+              </a:rPr>
+              <a:t>%&gt;%</a:t>
+            </a:r>
+            <a:r>
+              <a:rPr>
+                <a:solidFill>
+                  <a:srgbClr val="003B4F"/>
+                </a:solidFill>
+                <a:latin typeface="Courier"/>
+              </a:rPr>
+              <a:t> </a:t>
+            </a:r>
+            <a:r>
+              <a:rPr>
+                <a:solidFill>
+                  <a:srgbClr val="4758AB"/>
+                </a:solidFill>
+                <a:latin typeface="Courier"/>
+              </a:rPr>
+              <a:t>head</a:t>
+            </a:r>
+            <a:r>
+              <a:rPr>
+                <a:solidFill>
+                  <a:srgbClr val="003B4F"/>
+                </a:solidFill>
+                <a:latin typeface="Courier"/>
+              </a:rPr>
+              <a:t>()</a:t>
+            </a:r>
+          </a:p>
+          <a:p>
+            <a:pPr lvl="0" indent="0">
+              <a:buNone/>
+            </a:pPr>
+            <a:r>
+              <a:rPr>
+                <a:latin typeface="Courier"/>
+              </a:rPr>
+              <a:t># A tibble: 6 × 5
+  index side  weight_g width_cm height_cm
+  &lt;dbl&gt; &lt;chr&gt;    &lt;dbl&gt;    &lt;dbl&gt;     &lt;dbl&gt;
+1    12 shady        8       18        29
+2    14 shady        9       18        28
+3    15 shady        8       19        27
+4    17 shady        8       18        29
+5    18 shady        9       17        27
+6    19 shady        9       19        27</a:t>
+            </a:r>
+          </a:p>
+        </p:txBody>
+      </p:sp>
+      <p:sp>
+        <p:nvSpPr>
+          <p:cNvPr id="5" name="Text Placeholder 4"/>
+          <p:cNvSpPr>
+            <a:spLocks noGrp="1"/>
+          </p:cNvSpPr>
+          <p:nvPr>
+            <p:ph idx="3" sz="quarter" type="body"/>
+          </p:nvPr>
+        </p:nvSpPr>
+        <p:spPr/>
+        <p:txBody>
+          <a:bodyPr/>
+          <a:lstStyle/>
+          <a:p>
+            <a:pPr lvl="0" indent="0" marL="0">
+              <a:buNone/>
+            </a:pPr>
+            <a:r>
+              <a:rPr b="1"/>
+              <a:t>Common comparison operators:</a:t>
+            </a:r>
+          </a:p>
+        </p:txBody>
+      </p:sp>
+      <p:graphicFrame>
+        <p:nvGraphicFramePr>
+          <p:cNvPr id="6" name="Content Placeholder 5"/>
+          <p:cNvGraphicFramePr>
+            <a:graphicFrameLocks noGrp="1"/>
+          </p:cNvGraphicFramePr>
+          <p:nvPr>
+            <p:ph idx="1"/>
+          </p:nvPr>
+        </p:nvGraphicFramePr>
+        <p:xfrm>
+          <a:off x="4749800" y="1295400"/>
+          <a:ext cx="4038600" cy="3276600"/>
+        </p:xfrm>
+        <a:graphic>
+          <a:graphicData uri="http://schemas.openxmlformats.org/drawingml/2006/table">
+            <a:tbl>
+              <a:tblPr firstRow="1" bandRow="1">
+                <a:tableStyleId>{5C22544A-7EE6-4342-B048-85BDC9FD1C3A}</a:tableStyleId>
+              </a:tblPr>
+              <a:tblGrid>
+                <a:gridCol w="2019300"/>
+                <a:gridCol w="2019300"/>
+              </a:tblGrid>
+              <a:tr h="0">
+                <a:tc>
+                  <a:txBody>
+                    <a:bodyPr/>
+                    <a:lstStyle/>
+                    <a:p>
+                      <a:pPr lvl="0" indent="0" marL="0">
+                        <a:buNone/>
+                      </a:pPr>
+                      <a:r>
+                        <a:rPr/>
+                        <a:t>Symbol</a:t>
+                      </a:r>
+                    </a:p>
+                  </a:txBody>
+                  <a:tcPr/>
+                </a:tc>
+                <a:tc>
+                  <a:txBody>
+                    <a:bodyPr/>
+                    <a:lstStyle/>
+                    <a:p>
+                      <a:pPr lvl="0" indent="0" marL="0">
+                        <a:buNone/>
+                      </a:pPr>
+                      <a:r>
+                        <a:rPr/>
+                        <a:t>Meaning</a:t>
+                      </a:r>
+                    </a:p>
+                  </a:txBody>
+                  <a:tcPr/>
+                </a:tc>
+              </a:tr>
+              <a:tr h="0">
+                <a:tc>
+                  <a:txBody>
+                    <a:bodyPr/>
+                    <a:lstStyle/>
+                    <a:p>
+                      <a:pPr lvl="0" indent="0" marL="0">
+                        <a:buNone/>
+                      </a:pPr>
+                      <a:r>
+                        <a:rPr>
+                          <a:latin typeface="Courier"/>
+                        </a:rPr>
+                        <a:t>==</a:t>
+                      </a:r>
+                    </a:p>
+                  </a:txBody>
+                </a:tc>
+                <a:tc>
+                  <a:txBody>
+                    <a:bodyPr/>
+                    <a:lstStyle/>
+                    <a:p>
+                      <a:pPr lvl="0" indent="0" marL="0">
+                        <a:buNone/>
+                      </a:pPr>
+                      <a:r>
+                        <a:rPr/>
+                        <a:t>exactly equal</a:t>
+                      </a:r>
+                    </a:p>
+                  </a:txBody>
+                </a:tc>
+              </a:tr>
+              <a:tr h="0">
+                <a:tc>
+                  <a:txBody>
+                    <a:bodyPr/>
+                    <a:lstStyle/>
+                    <a:p>
+                      <a:pPr lvl="0" indent="0" marL="0">
+                        <a:buNone/>
+                      </a:pPr>
+                      <a:r>
+                        <a:rPr>
+                          <a:latin typeface="Courier"/>
+                        </a:rPr>
+                        <a:t>!=</a:t>
+                      </a:r>
+                    </a:p>
+                  </a:txBody>
+                </a:tc>
+                <a:tc>
+                  <a:txBody>
+                    <a:bodyPr/>
+                    <a:lstStyle/>
+                    <a:p>
+                      <a:pPr lvl="0" indent="0" marL="0">
+                        <a:buNone/>
+                      </a:pPr>
+                      <a:r>
+                        <a:rPr/>
+                        <a:t>not equal</a:t>
+                      </a:r>
+                    </a:p>
+                  </a:txBody>
+                </a:tc>
+              </a:tr>
+              <a:tr h="0">
+                <a:tc>
+                  <a:txBody>
+                    <a:bodyPr/>
+                    <a:lstStyle/>
+                    <a:p>
+                      <a:pPr lvl="0" indent="0" marL="0">
+                        <a:buNone/>
+                      </a:pPr>
+                      <a:r>
+                        <a:rPr>
+                          <a:latin typeface="Courier"/>
+                        </a:rPr>
+                        <a:t>&gt;</a:t>
+                      </a:r>
+                      <a:r>
+                        <a:rPr/>
+                        <a:t> </a:t>
+                      </a:r>
+                      <a:r>
+                        <a:rPr>
+                          <a:latin typeface="Courier"/>
+                        </a:rPr>
+                        <a:t>&lt;</a:t>
+                      </a:r>
+                    </a:p>
+                  </a:txBody>
+                </a:tc>
+                <a:tc>
+                  <a:txBody>
+                    <a:bodyPr/>
+                    <a:lstStyle/>
+                    <a:p>
+                      <a:pPr lvl="0" indent="0" marL="0">
+                        <a:buNone/>
+                      </a:pPr>
+                      <a:r>
+                        <a:rPr/>
+                        <a:t>greater / less than</a:t>
+                      </a:r>
+                    </a:p>
+                  </a:txBody>
+                </a:tc>
+              </a:tr>
+              <a:tr h="0">
+                <a:tc>
+                  <a:txBody>
+                    <a:bodyPr/>
+                    <a:lstStyle/>
+                    <a:p>
+                      <a:pPr lvl="0" indent="0" marL="0">
+                        <a:buNone/>
+                      </a:pPr>
+                      <a:r>
+                        <a:rPr>
+                          <a:latin typeface="Courier"/>
+                        </a:rPr>
+                        <a:t>&gt;=</a:t>
+                      </a:r>
+                      <a:r>
+                        <a:rPr/>
+                        <a:t> </a:t>
+                      </a:r>
+                      <a:r>
+                        <a:rPr>
+                          <a:latin typeface="Courier"/>
+                        </a:rPr>
+                        <a:t>&lt;=</a:t>
+                      </a:r>
+                    </a:p>
+                  </a:txBody>
+                </a:tc>
+                <a:tc>
+                  <a:txBody>
+                    <a:bodyPr/>
+                    <a:lstStyle/>
+                    <a:p>
+                      <a:pPr lvl="0" indent="0" marL="0">
+                        <a:buNone/>
+                      </a:pPr>
+                      <a:r>
+                        <a:rPr/>
+                        <a:t>greater / less than or equal</a:t>
+                      </a:r>
+                    </a:p>
+                  </a:txBody>
+                </a:tc>
+              </a:tr>
+              <a:tr h="0">
+                <a:tc>
+                  <a:txBody>
+                    <a:bodyPr/>
+                    <a:lstStyle/>
+                    <a:p>
+                      <a:pPr lvl="0" indent="0" marL="0">
+                        <a:buNone/>
+                      </a:pPr>
+                      <a:r>
+                        <a:rPr/>
+                        <a:t>is.na</a:t>
+                      </a:r>
+                    </a:p>
+                  </a:txBody>
+                </a:tc>
+                <a:tc>
+                  <a:txBody>
+                    <a:bodyPr/>
+                    <a:lstStyle/>
+                    <a:p>
+                      <a:pPr lvl="0" indent="0" marL="0">
+                        <a:buNone/>
+                      </a:pPr>
+                      <a:r>
+                        <a:rPr/>
+                        <a:t>return all NA rows</a:t>
+                      </a:r>
+                    </a:p>
+                  </a:txBody>
+                </a:tc>
+              </a:tr>
+              <a:tr h="0">
+                <a:tc>
+                  <a:txBody>
+                    <a:bodyPr/>
+                    <a:lstStyle/>
+                    <a:p>
+                      <a:pPr lvl="0" indent="0" marL="0">
+                        <a:buNone/>
+                      </a:pPr>
+                      <a:r>
+                        <a:rPr/>
+                        <a:t>!is.na</a:t>
+                      </a:r>
+                    </a:p>
+                  </a:txBody>
+                </a:tc>
+                <a:tc>
+                  <a:txBody>
+                    <a:bodyPr/>
+                    <a:lstStyle/>
+                    <a:p>
+                      <a:pPr lvl="0" indent="0" marL="0">
+                        <a:buNone/>
+                      </a:pPr>
+                      <a:r>
+                        <a:rPr/>
+                        <a:t>return all rows that are </a:t>
+                      </a:r>
+                      <a:r>
+                        <a:rPr b="1"/>
+                        <a:t>NOT NA</a:t>
+                      </a:r>
+                    </a:p>
+                  </a:txBody>
+                </a:tc>
+              </a:tr>
+            </a:tbl>
+          </a:graphicData>
+        </a:graphic>
+      </p:graphicFrame>
+      <p:sp>
+        <p:nvSpPr>
+          <p:cNvPr id="6" name="Content Placeholder 5"/>
+          <p:cNvSpPr>
+            <a:spLocks noGrp="1"/>
+          </p:cNvSpPr>
+          <p:nvPr>
+            <p:ph idx="4" sz="quarter"/>
+          </p:nvPr>
+        </p:nvSpPr>
+        <p:spPr/>
+        <p:txBody>
+          <a:bodyPr/>
+          <a:lstStyle/>
+          <a:p>
+            <a:pPr lvl="0" indent="0" marL="1270000">
+              <a:buNone/>
+            </a:pPr>
+            <a:r>
+              <a:rPr sz="2000" b="1"/>
+              <a:t>Warning</a:t>
+            </a:r>
+          </a:p>
+          <a:p>
+            <a:pPr lvl="0" indent="0" marL="1270000">
+              <a:buNone/>
+            </a:pPr>
+            <a:r>
+              <a:rPr sz="2000" b="1"/>
+              <a:t>⚠️ Watch out!</a:t>
+            </a:r>
+          </a:p>
+          <a:p>
+            <a:pPr lvl="0"/>
+            <a:r>
+              <a:rPr sz="2000">
+                <a:latin typeface="Courier"/>
+              </a:rPr>
+              <a:t>=</a:t>
+            </a:r>
+            <a:r>
+              <a:rPr sz="2000"/>
+              <a:t> assigns a value.</a:t>
+            </a:r>
+          </a:p>
+          <a:p>
+            <a:pPr lvl="0"/>
+            <a:r>
+              <a:rPr sz="2000">
+                <a:latin typeface="Courier"/>
+              </a:rPr>
+              <a:t>==</a:t>
+            </a:r>
+            <a:r>
+              <a:rPr sz="2000"/>
+              <a:t> tests equality.</a:t>
+            </a:r>
+          </a:p>
+          <a:p>
+            <a:pPr lvl="0"/>
+            <a:r>
+              <a:rPr sz="2000">
+                <a:latin typeface="Courier"/>
+              </a:rPr>
+              <a:t>filter(side = "sunny")</a:t>
+            </a:r>
+            <a:r>
+              <a:rPr sz="2000"/>
+              <a:t> → error.</a:t>
+            </a:r>
+          </a:p>
+          <a:p>
+            <a:pPr lvl="0"/>
+            <a:r>
+              <a:rPr sz="2000">
+                <a:latin typeface="Courier"/>
+              </a:rPr>
+              <a:t>filter(side == "sunny")</a:t>
+            </a:r>
+            <a:r>
+              <a:rPr sz="2000"/>
+              <a:t> → correct.</a:t>
+            </a:r>
+          </a:p>
+        </p:txBody>
+      </p:sp>
+    </p:spTree>
+  </p:cSld>
+</p:sld>
+</file>
+
+<file path=ppt/slides/slide11.xml><?xml version="1.0" encoding="utf-8"?>
 <p:sld xmlns:a="http://schemas.openxmlformats.org/drawingml/2006/main" xmlns:r="http://schemas.openxmlformats.org/officeDocument/2006/relationships" xmlns:p="http://schemas.openxmlformats.org/presentationml/2006/main">
   <p:cSld>
     <p:spTree>
@@ -3423,6 +4369,1935 @@
               <a:buNone/>
             </a:pPr>
             <a:r>
+              <a:rPr/>
+              <a:t>Live Demo — Watch It Break (on purpose)</a:t>
+            </a:r>
+          </a:p>
+        </p:txBody>
+      </p:sp>
+      <p:sp>
+        <p:nvSpPr>
+          <p:cNvPr id="3" name="Content Placeholder 2"/>
+          <p:cNvSpPr>
+            <a:spLocks noGrp="1"/>
+          </p:cNvSpPr>
+          <p:nvPr>
+            <p:ph idx="1" sz="half"/>
+          </p:nvPr>
+        </p:nvSpPr>
+        <p:spPr/>
+        <p:txBody>
+          <a:bodyPr/>
+          <a:lstStyle/>
+          <a:p>
+            <a:pPr lvl="0" indent="0" marL="0">
+              <a:buNone/>
+            </a:pPr>
+            <a:r>
+              <a:rPr/>
+              <a:t>I will type this </a:t>
+            </a:r>
+            <a:r>
+              <a:rPr b="1"/>
+              <a:t>wrong</a:t>
+            </a:r>
+            <a:r>
+              <a:rPr/>
+              <a:t> on purpose:</a:t>
+            </a:r>
+          </a:p>
+          <a:p>
+            <a:pPr lvl="0" indent="0">
+              <a:buNone/>
+            </a:pPr>
+            <a:r>
+              <a:rPr>
+                <a:solidFill>
+                  <a:srgbClr val="5E5E5E"/>
+                </a:solidFill>
+                <a:latin typeface="Courier"/>
+              </a:rPr>
+              <a:t># One equals sign — a very common mistake</a:t>
+            </a:r>
+            <a:br/>
+            <a:r>
+              <a:rPr>
+                <a:solidFill>
+                  <a:srgbClr val="003B4F"/>
+                </a:solidFill>
+                <a:latin typeface="Courier"/>
+              </a:rPr>
+              <a:t>tree_df </a:t>
+            </a:r>
+            <a:r>
+              <a:rPr>
+                <a:solidFill>
+                  <a:srgbClr val="5E5E5E"/>
+                </a:solidFill>
+                <a:latin typeface="Courier"/>
+              </a:rPr>
+              <a:t>%&gt;%</a:t>
+            </a:r>
+            <a:r>
+              <a:rPr>
+                <a:solidFill>
+                  <a:srgbClr val="003B4F"/>
+                </a:solidFill>
+                <a:latin typeface="Courier"/>
+              </a:rPr>
+              <a:t> </a:t>
+            </a:r>
+            <a:r>
+              <a:rPr>
+                <a:solidFill>
+                  <a:srgbClr val="4758AB"/>
+                </a:solidFill>
+                <a:latin typeface="Courier"/>
+              </a:rPr>
+              <a:t>filter</a:t>
+            </a:r>
+            <a:r>
+              <a:rPr>
+                <a:solidFill>
+                  <a:srgbClr val="003B4F"/>
+                </a:solidFill>
+                <a:latin typeface="Courier"/>
+              </a:rPr>
+              <a:t>(</a:t>
+            </a:r>
+            <a:r>
+              <a:rPr>
+                <a:solidFill>
+                  <a:srgbClr val="657422"/>
+                </a:solidFill>
+                <a:latin typeface="Courier"/>
+              </a:rPr>
+              <a:t>side =</a:t>
+            </a:r>
+            <a:r>
+              <a:rPr>
+                <a:solidFill>
+                  <a:srgbClr val="003B4F"/>
+                </a:solidFill>
+                <a:latin typeface="Courier"/>
+              </a:rPr>
+              <a:t> </a:t>
+            </a:r>
+            <a:r>
+              <a:rPr>
+                <a:solidFill>
+                  <a:srgbClr val="20794D"/>
+                </a:solidFill>
+                <a:latin typeface="Courier"/>
+              </a:rPr>
+              <a:t>"sunny"</a:t>
+            </a:r>
+            <a:r>
+              <a:rPr>
+                <a:solidFill>
+                  <a:srgbClr val="003B4F"/>
+                </a:solidFill>
+                <a:latin typeface="Courier"/>
+              </a:rPr>
+              <a:t>)</a:t>
+            </a:r>
+          </a:p>
+          <a:p>
+            <a:pPr lvl="0" indent="0" marL="0">
+              <a:buNone/>
+            </a:pPr>
+            <a:r>
+              <a:rPr/>
+              <a:t>R stops and tells us:</a:t>
+            </a:r>
+          </a:p>
+          <a:p>
+            <a:pPr lvl="0" indent="0">
+              <a:buNone/>
+            </a:pPr>
+            <a:r>
+              <a:rPr>
+                <a:latin typeface="Courier"/>
+              </a:rPr>
+              <a:t>Error in `filter()`:
+! We detected a named input.
+i This usually means that you've used `=` instead of `==`.</a:t>
+            </a:r>
+          </a:p>
+          <a:p>
+            <a:pPr lvl="0" indent="0" marL="0">
+              <a:buNone/>
+            </a:pPr>
+            <a:r>
+              <a:rPr/>
+              <a:t>Now the fix — two equals signs:</a:t>
+            </a:r>
+          </a:p>
+          <a:p>
+            <a:pPr lvl="0" indent="0">
+              <a:buNone/>
+            </a:pPr>
+            <a:r>
+              <a:rPr>
+                <a:solidFill>
+                  <a:srgbClr val="003B4F"/>
+                </a:solidFill>
+                <a:latin typeface="Courier"/>
+              </a:rPr>
+              <a:t>tree_df </a:t>
+            </a:r>
+            <a:r>
+              <a:rPr>
+                <a:solidFill>
+                  <a:srgbClr val="5E5E5E"/>
+                </a:solidFill>
+                <a:latin typeface="Courier"/>
+              </a:rPr>
+              <a:t>%&gt;%</a:t>
+            </a:r>
+            <a:r>
+              <a:rPr>
+                <a:solidFill>
+                  <a:srgbClr val="003B4F"/>
+                </a:solidFill>
+                <a:latin typeface="Courier"/>
+              </a:rPr>
+              <a:t> </a:t>
+            </a:r>
+            <a:r>
+              <a:rPr>
+                <a:solidFill>
+                  <a:srgbClr val="4758AB"/>
+                </a:solidFill>
+                <a:latin typeface="Courier"/>
+              </a:rPr>
+              <a:t>filter</a:t>
+            </a:r>
+            <a:r>
+              <a:rPr>
+                <a:solidFill>
+                  <a:srgbClr val="003B4F"/>
+                </a:solidFill>
+                <a:latin typeface="Courier"/>
+              </a:rPr>
+              <a:t>(side </a:t>
+            </a:r>
+            <a:r>
+              <a:rPr>
+                <a:solidFill>
+                  <a:srgbClr val="5E5E5E"/>
+                </a:solidFill>
+                <a:latin typeface="Courier"/>
+              </a:rPr>
+              <a:t>==</a:t>
+            </a:r>
+            <a:r>
+              <a:rPr>
+                <a:solidFill>
+                  <a:srgbClr val="003B4F"/>
+                </a:solidFill>
+                <a:latin typeface="Courier"/>
+              </a:rPr>
+              <a:t> </a:t>
+            </a:r>
+            <a:r>
+              <a:rPr>
+                <a:solidFill>
+                  <a:srgbClr val="20794D"/>
+                </a:solidFill>
+                <a:latin typeface="Courier"/>
+              </a:rPr>
+              <a:t>"sunny"</a:t>
+            </a:r>
+            <a:r>
+              <a:rPr>
+                <a:solidFill>
+                  <a:srgbClr val="003B4F"/>
+                </a:solidFill>
+                <a:latin typeface="Courier"/>
+              </a:rPr>
+              <a:t>)</a:t>
+            </a:r>
+          </a:p>
+        </p:txBody>
+      </p:sp>
+      <p:sp>
+        <p:nvSpPr>
+          <p:cNvPr id="4" name="Content Placeholder 3"/>
+          <p:cNvSpPr>
+            <a:spLocks noGrp="1"/>
+          </p:cNvSpPr>
+          <p:nvPr>
+            <p:ph idx="2" sz="half"/>
+          </p:nvPr>
+        </p:nvSpPr>
+        <p:spPr/>
+        <p:txBody>
+          <a:bodyPr/>
+          <a:lstStyle/>
+          <a:p>
+            <a:pPr lvl="0" indent="0" marL="1270000">
+              <a:buNone/>
+            </a:pPr>
+            <a:r>
+              <a:rPr sz="2000" b="1"/>
+              <a:t>Tip</a:t>
+            </a:r>
+          </a:p>
+          <a:p>
+            <a:pPr lvl="0" indent="0" marL="1270000">
+              <a:buNone/>
+            </a:pPr>
+            <a:r>
+              <a:rPr sz="2000" b="1"/>
+              <a:t>✅ Why show a broken run?</a:t>
+            </a:r>
+          </a:p>
+          <a:p>
+            <a:pPr lvl="0" indent="0" marL="1270000">
+              <a:buNone/>
+            </a:pPr>
+            <a:r>
+              <a:rPr sz="2000"/>
+              <a:t>Real coding </a:t>
+            </a:r>
+            <a:r>
+              <a:rPr sz="2000" i="1"/>
+              <a:t>is</a:t>
+            </a:r>
+            <a:r>
+              <a:rPr sz="2000"/>
+              <a:t> fixing errors. Watching me read the message, spot the </a:t>
+            </a:r>
+            <a:r>
+              <a:rPr sz="2000">
+                <a:latin typeface="Courier"/>
+              </a:rPr>
+              <a:t>=</a:t>
+            </a:r>
+            <a:r>
+              <a:rPr sz="2000"/>
+              <a:t>, and repair it teaches the debugging process that finished code samples always hide.</a:t>
+            </a:r>
+          </a:p>
+          <a:p>
+            <a:pPr lvl="0" indent="0" marL="1270000">
+              <a:buNone/>
+            </a:pPr>
+            <a:r>
+              <a:rPr sz="2000"/>
+              <a:t>When you hit this exact error yourself, you will recognise it.</a:t>
+            </a:r>
+          </a:p>
+        </p:txBody>
+      </p:sp>
+    </p:spTree>
+  </p:cSld>
+</p:sld>
+</file>
+
+<file path=ppt/slides/slide12.xml><?xml version="1.0" encoding="utf-8"?>
+<p:sld xmlns:a="http://schemas.openxmlformats.org/drawingml/2006/main" xmlns:r="http://schemas.openxmlformats.org/officeDocument/2006/relationships" xmlns:p="http://schemas.openxmlformats.org/presentationml/2006/main">
+  <p:cSld>
+    <p:spTree>
+      <p:nvGrpSpPr>
+        <p:cNvPr id="1" name=""/>
+        <p:cNvGrpSpPr/>
+        <p:nvPr/>
+      </p:nvGrpSpPr>
+      <p:grpSpPr>
+        <a:xfrm>
+          <a:off x="0" y="0"/>
+          <a:ext cx="0" cy="0"/>
+          <a:chOff x="0" y="0"/>
+          <a:chExt cx="0" cy="0"/>
+        </a:xfrm>
+      </p:grpSpPr>
+      <p:sp>
+        <p:nvSpPr>
+          <p:cNvPr id="2" name="Title 1"/>
+          <p:cNvSpPr>
+            <a:spLocks noGrp="1"/>
+          </p:cNvSpPr>
+          <p:nvPr>
+            <p:ph type="title"/>
+          </p:nvPr>
+        </p:nvSpPr>
+        <p:spPr>
+          <a:xfrm>
+            <a:off x="0" y="0"/>
+            <a:ext cx="9144000" cy="602780"/>
+          </a:xfrm>
+          <a:solidFill>
+            <a:srgbClr val="1A1A2E"/>
+          </a:solidFill>
+        </p:spPr>
+        <p:txBody>
+          <a:bodyPr/>
+          <a:lstStyle/>
+          <a:p>
+            <a:pPr lvl="0" indent="0" marL="0">
+              <a:buNone/>
+            </a:pPr>
+            <a:r>
+              <a:rPr>
+                <a:latin typeface="Courier"/>
+              </a:rPr>
+              <a:t>select()</a:t>
+            </a:r>
+            <a:r>
+              <a:rPr/>
+              <a:t> — Picking Columns</a:t>
+            </a:r>
+          </a:p>
+        </p:txBody>
+      </p:sp>
+      <p:sp>
+        <p:nvSpPr>
+          <p:cNvPr id="3" name="Content Placeholder 2"/>
+          <p:cNvSpPr>
+            <a:spLocks noGrp="1"/>
+          </p:cNvSpPr>
+          <p:nvPr>
+            <p:ph idx="1" sz="half"/>
+          </p:nvPr>
+        </p:nvSpPr>
+        <p:spPr/>
+        <p:txBody>
+          <a:bodyPr/>
+          <a:lstStyle/>
+          <a:p>
+            <a:pPr lvl="0" indent="0">
+              <a:buNone/>
+            </a:pPr>
+            <a:r>
+              <a:rPr>
+                <a:solidFill>
+                  <a:srgbClr val="5E5E5E"/>
+                </a:solidFill>
+                <a:latin typeface="Courier"/>
+              </a:rPr>
+              <a:t># select() keeps the columns you name ------------------</a:t>
+            </a:r>
+            <a:br/>
+            <a:br/>
+            <a:r>
+              <a:rPr>
+                <a:solidFill>
+                  <a:srgbClr val="5E5E5E"/>
+                </a:solidFill>
+                <a:latin typeface="Courier"/>
+              </a:rPr>
+              <a:t># Keep only side and weight</a:t>
+            </a:r>
+            <a:br/>
+            <a:r>
+              <a:rPr>
+                <a:solidFill>
+                  <a:srgbClr val="003B4F"/>
+                </a:solidFill>
+                <a:latin typeface="Courier"/>
+              </a:rPr>
+              <a:t>tree_df </a:t>
+            </a:r>
+            <a:r>
+              <a:rPr>
+                <a:solidFill>
+                  <a:srgbClr val="5E5E5E"/>
+                </a:solidFill>
+                <a:latin typeface="Courier"/>
+              </a:rPr>
+              <a:t>%&gt;%</a:t>
+            </a:r>
+            <a:r>
+              <a:rPr>
+                <a:solidFill>
+                  <a:srgbClr val="003B4F"/>
+                </a:solidFill>
+                <a:latin typeface="Courier"/>
+              </a:rPr>
+              <a:t> </a:t>
+            </a:r>
+            <a:r>
+              <a:rPr>
+                <a:solidFill>
+                  <a:srgbClr val="4758AB"/>
+                </a:solidFill>
+                <a:latin typeface="Courier"/>
+              </a:rPr>
+              <a:t>select</a:t>
+            </a:r>
+            <a:r>
+              <a:rPr>
+                <a:solidFill>
+                  <a:srgbClr val="003B4F"/>
+                </a:solidFill>
+                <a:latin typeface="Courier"/>
+              </a:rPr>
+              <a:t>(side, weight_g) </a:t>
+            </a:r>
+            <a:r>
+              <a:rPr>
+                <a:solidFill>
+                  <a:srgbClr val="5E5E5E"/>
+                </a:solidFill>
+                <a:latin typeface="Courier"/>
+              </a:rPr>
+              <a:t>%&gt;%</a:t>
+            </a:r>
+            <a:r>
+              <a:rPr>
+                <a:solidFill>
+                  <a:srgbClr val="003B4F"/>
+                </a:solidFill>
+                <a:latin typeface="Courier"/>
+              </a:rPr>
+              <a:t> </a:t>
+            </a:r>
+            <a:r>
+              <a:rPr>
+                <a:solidFill>
+                  <a:srgbClr val="4758AB"/>
+                </a:solidFill>
+                <a:latin typeface="Courier"/>
+              </a:rPr>
+              <a:t>head</a:t>
+            </a:r>
+            <a:r>
+              <a:rPr>
+                <a:solidFill>
+                  <a:srgbClr val="003B4F"/>
+                </a:solidFill>
+                <a:latin typeface="Courier"/>
+              </a:rPr>
+              <a:t>()</a:t>
+            </a:r>
+          </a:p>
+          <a:p>
+            <a:pPr lvl="0" indent="0">
+              <a:buNone/>
+            </a:pPr>
+            <a:r>
+              <a:rPr>
+                <a:latin typeface="Courier"/>
+              </a:rPr>
+              <a:t># A tibble: 6 × 2
+  side  weight_g
+  &lt;chr&gt;    &lt;dbl&gt;
+1 sunny        4
+2 sunny        3
+3 sunny        5
+4 sunny        3
+5 sunny        4
+6 sunny        3</a:t>
+            </a:r>
+          </a:p>
+          <a:p>
+            <a:pPr lvl="0" indent="0">
+              <a:buNone/>
+            </a:pPr>
+            <a:r>
+              <a:rPr>
+                <a:solidFill>
+                  <a:srgbClr val="5E5E5E"/>
+                </a:solidFill>
+                <a:latin typeface="Courier"/>
+              </a:rPr>
+              <a:t># Drop the index column (use minus sign)</a:t>
+            </a:r>
+            <a:br/>
+            <a:r>
+              <a:rPr>
+                <a:solidFill>
+                  <a:srgbClr val="003B4F"/>
+                </a:solidFill>
+                <a:latin typeface="Courier"/>
+              </a:rPr>
+              <a:t>tree_df </a:t>
+            </a:r>
+            <a:r>
+              <a:rPr>
+                <a:solidFill>
+                  <a:srgbClr val="5E5E5E"/>
+                </a:solidFill>
+                <a:latin typeface="Courier"/>
+              </a:rPr>
+              <a:t>%&gt;%</a:t>
+            </a:r>
+            <a:r>
+              <a:rPr>
+                <a:solidFill>
+                  <a:srgbClr val="003B4F"/>
+                </a:solidFill>
+                <a:latin typeface="Courier"/>
+              </a:rPr>
+              <a:t> </a:t>
+            </a:r>
+            <a:r>
+              <a:rPr>
+                <a:solidFill>
+                  <a:srgbClr val="4758AB"/>
+                </a:solidFill>
+                <a:latin typeface="Courier"/>
+              </a:rPr>
+              <a:t>select</a:t>
+            </a:r>
+            <a:r>
+              <a:rPr>
+                <a:solidFill>
+                  <a:srgbClr val="003B4F"/>
+                </a:solidFill>
+                <a:latin typeface="Courier"/>
+              </a:rPr>
+              <a:t>(</a:t>
+            </a:r>
+            <a:r>
+              <a:rPr>
+                <a:solidFill>
+                  <a:srgbClr val="5E5E5E"/>
+                </a:solidFill>
+                <a:latin typeface="Courier"/>
+              </a:rPr>
+              <a:t>-</a:t>
+            </a:r>
+            <a:r>
+              <a:rPr>
+                <a:solidFill>
+                  <a:srgbClr val="003B4F"/>
+                </a:solidFill>
+                <a:latin typeface="Courier"/>
+              </a:rPr>
+              <a:t>index) </a:t>
+            </a:r>
+            <a:r>
+              <a:rPr>
+                <a:solidFill>
+                  <a:srgbClr val="5E5E5E"/>
+                </a:solidFill>
+                <a:latin typeface="Courier"/>
+              </a:rPr>
+              <a:t>%&gt;%</a:t>
+            </a:r>
+            <a:r>
+              <a:rPr>
+                <a:solidFill>
+                  <a:srgbClr val="003B4F"/>
+                </a:solidFill>
+                <a:latin typeface="Courier"/>
+              </a:rPr>
+              <a:t> </a:t>
+            </a:r>
+            <a:r>
+              <a:rPr>
+                <a:solidFill>
+                  <a:srgbClr val="4758AB"/>
+                </a:solidFill>
+                <a:latin typeface="Courier"/>
+              </a:rPr>
+              <a:t>head</a:t>
+            </a:r>
+            <a:r>
+              <a:rPr>
+                <a:solidFill>
+                  <a:srgbClr val="003B4F"/>
+                </a:solidFill>
+                <a:latin typeface="Courier"/>
+              </a:rPr>
+              <a:t>()</a:t>
+            </a:r>
+          </a:p>
+          <a:p>
+            <a:pPr lvl="0" indent="0">
+              <a:buNone/>
+            </a:pPr>
+            <a:r>
+              <a:rPr>
+                <a:latin typeface="Courier"/>
+              </a:rPr>
+              <a:t># A tibble: 6 × 4
+  side  weight_g width_cm height_cm
+  &lt;chr&gt;    &lt;dbl&gt;    &lt;dbl&gt;     &lt;dbl&gt;
+1 sunny        4       12        21
+2 sunny        3       14        22
+3 sunny        5       12        21
+4 sunny        3       13        23
+5 sunny        4       15        22
+6 sunny        3       13        23</a:t>
+            </a:r>
+          </a:p>
+          <a:p>
+            <a:pPr lvl="0" indent="0">
+              <a:buNone/>
+            </a:pPr>
+            <a:r>
+              <a:rPr>
+                <a:solidFill>
+                  <a:srgbClr val="5E5E5E"/>
+                </a:solidFill>
+                <a:latin typeface="Courier"/>
+              </a:rPr>
+              <a:t># Keep columns that start with a word</a:t>
+            </a:r>
+            <a:br/>
+            <a:r>
+              <a:rPr>
+                <a:solidFill>
+                  <a:srgbClr val="003B4F"/>
+                </a:solidFill>
+                <a:latin typeface="Courier"/>
+              </a:rPr>
+              <a:t>tree_df </a:t>
+            </a:r>
+            <a:r>
+              <a:rPr>
+                <a:solidFill>
+                  <a:srgbClr val="5E5E5E"/>
+                </a:solidFill>
+                <a:latin typeface="Courier"/>
+              </a:rPr>
+              <a:t>%&gt;%</a:t>
+            </a:r>
+            <a:r>
+              <a:rPr>
+                <a:solidFill>
+                  <a:srgbClr val="003B4F"/>
+                </a:solidFill>
+                <a:latin typeface="Courier"/>
+              </a:rPr>
+              <a:t> </a:t>
+            </a:r>
+            <a:r>
+              <a:rPr>
+                <a:solidFill>
+                  <a:srgbClr val="4758AB"/>
+                </a:solidFill>
+                <a:latin typeface="Courier"/>
+              </a:rPr>
+              <a:t>select</a:t>
+            </a:r>
+            <a:r>
+              <a:rPr>
+                <a:solidFill>
+                  <a:srgbClr val="003B4F"/>
+                </a:solidFill>
+                <a:latin typeface="Courier"/>
+              </a:rPr>
+              <a:t>(</a:t>
+            </a:r>
+            <a:r>
+              <a:rPr>
+                <a:solidFill>
+                  <a:srgbClr val="4758AB"/>
+                </a:solidFill>
+                <a:latin typeface="Courier"/>
+              </a:rPr>
+              <a:t>starts_with</a:t>
+            </a:r>
+            <a:r>
+              <a:rPr>
+                <a:solidFill>
+                  <a:srgbClr val="003B4F"/>
+                </a:solidFill>
+                <a:latin typeface="Courier"/>
+              </a:rPr>
+              <a:t>(</a:t>
+            </a:r>
+            <a:r>
+              <a:rPr>
+                <a:solidFill>
+                  <a:srgbClr val="20794D"/>
+                </a:solidFill>
+                <a:latin typeface="Courier"/>
+              </a:rPr>
+              <a:t>"weight"</a:t>
+            </a:r>
+            <a:r>
+              <a:rPr>
+                <a:solidFill>
+                  <a:srgbClr val="003B4F"/>
+                </a:solidFill>
+                <a:latin typeface="Courier"/>
+              </a:rPr>
+              <a:t>)) </a:t>
+            </a:r>
+            <a:r>
+              <a:rPr>
+                <a:solidFill>
+                  <a:srgbClr val="5E5E5E"/>
+                </a:solidFill>
+                <a:latin typeface="Courier"/>
+              </a:rPr>
+              <a:t>%&gt;%</a:t>
+            </a:r>
+            <a:r>
+              <a:rPr>
+                <a:solidFill>
+                  <a:srgbClr val="003B4F"/>
+                </a:solidFill>
+                <a:latin typeface="Courier"/>
+              </a:rPr>
+              <a:t> </a:t>
+            </a:r>
+            <a:r>
+              <a:rPr>
+                <a:solidFill>
+                  <a:srgbClr val="4758AB"/>
+                </a:solidFill>
+                <a:latin typeface="Courier"/>
+              </a:rPr>
+              <a:t>head</a:t>
+            </a:r>
+            <a:r>
+              <a:rPr>
+                <a:solidFill>
+                  <a:srgbClr val="003B4F"/>
+                </a:solidFill>
+                <a:latin typeface="Courier"/>
+              </a:rPr>
+              <a:t>()</a:t>
+            </a:r>
+          </a:p>
+          <a:p>
+            <a:pPr lvl="0" indent="0">
+              <a:buNone/>
+            </a:pPr>
+            <a:r>
+              <a:rPr>
+                <a:latin typeface="Courier"/>
+              </a:rPr>
+              <a:t># A tibble: 6 × 1
+  weight_g
+     &lt;dbl&gt;
+1        4
+2        3
+3        5
+4        3
+5        4
+6        3</a:t>
+            </a:r>
+          </a:p>
+        </p:txBody>
+      </p:sp>
+      <p:sp>
+        <p:nvSpPr>
+          <p:cNvPr id="4" name="Content Placeholder 3"/>
+          <p:cNvSpPr>
+            <a:spLocks noGrp="1"/>
+          </p:cNvSpPr>
+          <p:nvPr>
+            <p:ph idx="2" sz="half"/>
+          </p:nvPr>
+        </p:nvSpPr>
+        <p:spPr/>
+        <p:txBody>
+          <a:bodyPr/>
+          <a:lstStyle/>
+          <a:p>
+            <a:pPr lvl="0"/>
+            <a:r>
+              <a:rPr b="1"/>
+              <a:t>Why </a:t>
+            </a:r>
+            <a:r>
+              <a:rPr b="1">
+                <a:latin typeface="Courier"/>
+              </a:rPr>
+              <a:t>select()</a:t>
+            </a:r>
+            <a:r>
+              <a:rPr b="1"/>
+              <a:t> matters:</a:t>
+            </a:r>
+          </a:p>
+          <a:p>
+            <a:pPr lvl="1"/>
+            <a:r>
+              <a:rPr/>
+              <a:t>Real datasets often have 50–100+ columns</a:t>
+            </a:r>
+          </a:p>
+          <a:p>
+            <a:pPr lvl="1"/>
+            <a:r>
+              <a:rPr/>
+              <a:t>You rarely need all of them</a:t>
+            </a:r>
+          </a:p>
+          <a:p>
+            <a:pPr lvl="1"/>
+            <a:r>
+              <a:rPr>
+                <a:latin typeface="Courier"/>
+              </a:rPr>
+              <a:t>select()</a:t>
+            </a:r>
+            <a:r>
+              <a:rPr/>
+              <a:t> keeps your workspace clean</a:t>
+            </a:r>
+          </a:p>
+          <a:p>
+            <a:pPr lvl="0"/>
+            <a:r>
+              <a:rPr b="1"/>
+              <a:t>Useful helpers:</a:t>
+            </a:r>
+          </a:p>
+          <a:p>
+            <a:pPr lvl="1"/>
+            <a:r>
+              <a:rPr>
+                <a:latin typeface="Courier"/>
+              </a:rPr>
+              <a:t>starts_with("x")</a:t>
+            </a:r>
+            <a:r>
+              <a:rPr/>
+              <a:t> — columns starting with “x”</a:t>
+            </a:r>
+          </a:p>
+          <a:p>
+            <a:pPr lvl="1"/>
+            <a:r>
+              <a:rPr>
+                <a:latin typeface="Courier"/>
+              </a:rPr>
+              <a:t>ends_with("_g")</a:t>
+            </a:r>
+            <a:r>
+              <a:rPr/>
+              <a:t> — columns ending with “_g”</a:t>
+            </a:r>
+          </a:p>
+          <a:p>
+            <a:pPr lvl="1"/>
+            <a:r>
+              <a:rPr>
+                <a:latin typeface="Courier"/>
+              </a:rPr>
+              <a:t>contains("cm")</a:t>
+            </a:r>
+            <a:r>
+              <a:rPr/>
+              <a:t> — columns containing “cm”</a:t>
+            </a:r>
+          </a:p>
+          <a:p>
+            <a:pPr lvl="0" indent="0" marL="0">
+              <a:buNone/>
+            </a:pPr>
+            <a:r>
+              <a:rPr/>
+              <a:t>📖 </a:t>
+            </a:r>
+            <a:r>
+              <a:rPr>
+                <a:hlinkClick r:id="rId2"/>
+              </a:rPr>
+              <a:t>R4DS §3.3</a:t>
+            </a:r>
+          </a:p>
+        </p:txBody>
+      </p:sp>
+    </p:spTree>
+  </p:cSld>
+</p:sld>
+</file>
+
+<file path=ppt/slides/slide13.xml><?xml version="1.0" encoding="utf-8"?>
+<p:sld xmlns:a="http://schemas.openxmlformats.org/drawingml/2006/main" xmlns:r="http://schemas.openxmlformats.org/officeDocument/2006/relationships" xmlns:p="http://schemas.openxmlformats.org/presentationml/2006/main">
+  <p:cSld>
+    <p:spTree>
+      <p:nvGrpSpPr>
+        <p:cNvPr id="1" name=""/>
+        <p:cNvGrpSpPr/>
+        <p:nvPr/>
+      </p:nvGrpSpPr>
+      <p:grpSpPr>
+        <a:xfrm>
+          <a:off x="0" y="0"/>
+          <a:ext cx="0" cy="0"/>
+          <a:chOff x="0" y="0"/>
+          <a:chExt cx="0" cy="0"/>
+        </a:xfrm>
+      </p:grpSpPr>
+      <p:sp>
+        <p:nvSpPr>
+          <p:cNvPr id="2" name="Title 1"/>
+          <p:cNvSpPr>
+            <a:spLocks noGrp="1"/>
+          </p:cNvSpPr>
+          <p:nvPr>
+            <p:ph type="title"/>
+          </p:nvPr>
+        </p:nvSpPr>
+        <p:spPr>
+          <a:xfrm>
+            <a:off x="0" y="0"/>
+            <a:ext cx="9144000" cy="582780"/>
+          </a:xfrm>
+        </p:spPr>
+        <p:txBody>
+          <a:bodyPr/>
+          <a:lstStyle/>
+          <a:p>
+            <a:pPr lvl="0" indent="0" marL="0">
+              <a:buNone/>
+            </a:pPr>
+            <a:r>
+              <a:rPr>
+                <a:latin typeface="Courier"/>
+              </a:rPr>
+              <a:t>mutate()</a:t>
+            </a:r>
+            <a:r>
+              <a:rPr/>
+              <a:t> — Creating New Columns</a:t>
+            </a:r>
+          </a:p>
+        </p:txBody>
+      </p:sp>
+      <p:sp>
+        <p:nvSpPr>
+          <p:cNvPr id="3" name="Content Placeholder 2"/>
+          <p:cNvSpPr>
+            <a:spLocks noGrp="1"/>
+          </p:cNvSpPr>
+          <p:nvPr>
+            <p:ph idx="1"/>
+          </p:nvPr>
+        </p:nvSpPr>
+        <p:spPr/>
+        <p:txBody>
+          <a:bodyPr/>
+          <a:lstStyle/>
+          <a:p>
+            <a:pPr lvl="0" indent="0" marL="1270000">
+              <a:buNone/>
+            </a:pPr>
+            <a:r>
+              <a:rPr sz="2000" b="1"/>
+              <a:t>Note</a:t>
+            </a:r>
+          </a:p>
+          <a:p>
+            <a:pPr lvl="0" indent="0" marL="1270000">
+              <a:buNone/>
+            </a:pPr>
+            <a:r>
+              <a:rPr sz="2000" b="1"/>
+              <a:t>🔮 Predict first:</a:t>
+            </a:r>
+            <a:r>
+              <a:rPr sz="2000"/>
+              <a:t> </a:t>
+            </a:r>
+            <a:r>
+              <a:rPr sz="2000">
+                <a:latin typeface="Courier"/>
+              </a:rPr>
+              <a:t>weight_g * 1000</a:t>
+            </a:r>
+            <a:r>
+              <a:rPr sz="2000"/>
+              <a:t> converts grams to milligrams. Before running: will </a:t>
+            </a:r>
+            <a:r>
+              <a:rPr sz="2000">
+                <a:latin typeface="Courier"/>
+              </a:rPr>
+              <a:t>mutate()</a:t>
+            </a:r>
+            <a:r>
+              <a:rPr sz="2000"/>
+              <a:t> </a:t>
+            </a:r>
+            <a:r>
+              <a:rPr sz="2000" b="1"/>
+              <a:t>replace</a:t>
+            </a:r>
+            <a:r>
+              <a:rPr sz="2000"/>
+              <a:t> </a:t>
+            </a:r>
+            <a:r>
+              <a:rPr sz="2000">
+                <a:latin typeface="Courier"/>
+              </a:rPr>
+              <a:t>weight_g</a:t>
+            </a:r>
+            <a:r>
+              <a:rPr sz="2000"/>
+              <a:t> or </a:t>
+            </a:r>
+            <a:r>
+              <a:rPr sz="2000" b="1"/>
+              <a:t>add</a:t>
+            </a:r>
+            <a:r>
+              <a:rPr sz="2000"/>
+              <a:t> a new column? How many columns will the result have?</a:t>
+            </a:r>
+          </a:p>
+        </p:txBody>
+      </p:sp>
+    </p:spTree>
+  </p:cSld>
+</p:sld>
+</file>
+
+<file path=ppt/slides/slide14.xml><?xml version="1.0" encoding="utf-8"?>
+<p:sld xmlns:a="http://schemas.openxmlformats.org/drawingml/2006/main" xmlns:r="http://schemas.openxmlformats.org/officeDocument/2006/relationships" xmlns:p="http://schemas.openxmlformats.org/presentationml/2006/main">
+  <p:cSld>
+    <p:spTree>
+      <p:nvGrpSpPr>
+        <p:cNvPr id="1" name=""/>
+        <p:cNvGrpSpPr/>
+        <p:nvPr/>
+      </p:nvGrpSpPr>
+      <p:grpSpPr>
+        <a:xfrm>
+          <a:off x="0" y="0"/>
+          <a:ext cx="0" cy="0"/>
+          <a:chOff x="0" y="0"/>
+          <a:chExt cx="0" cy="0"/>
+        </a:xfrm>
+      </p:grpSpPr>
+      <p:sp>
+        <p:nvSpPr>
+          <p:cNvPr id="3" name="Content Placeholder 2"/>
+          <p:cNvSpPr>
+            <a:spLocks noGrp="1"/>
+          </p:cNvSpPr>
+          <p:nvPr>
+            <p:ph idx="1" sz="half"/>
+          </p:nvPr>
+        </p:nvSpPr>
+        <p:spPr/>
+        <p:txBody>
+          <a:bodyPr/>
+          <a:lstStyle/>
+          <a:p>
+            <a:pPr lvl="0" indent="0">
+              <a:buNone/>
+            </a:pPr>
+            <a:r>
+              <a:rPr>
+                <a:solidFill>
+                  <a:srgbClr val="5E5E5E"/>
+                </a:solidFill>
+                <a:latin typeface="Courier"/>
+              </a:rPr>
+              <a:t># mutate() adds a new column to the data frame ---------</a:t>
+            </a:r>
+            <a:br/>
+            <a:br/>
+            <a:r>
+              <a:rPr>
+                <a:solidFill>
+                  <a:srgbClr val="5E5E5E"/>
+                </a:solidFill>
+                <a:latin typeface="Courier"/>
+              </a:rPr>
+              <a:t># Convert grams to milligrams</a:t>
+            </a:r>
+            <a:br/>
+            <a:r>
+              <a:rPr>
+                <a:solidFill>
+                  <a:srgbClr val="003B4F"/>
+                </a:solidFill>
+                <a:latin typeface="Courier"/>
+              </a:rPr>
+              <a:t>tree_df </a:t>
+            </a:r>
+            <a:r>
+              <a:rPr>
+                <a:solidFill>
+                  <a:srgbClr val="5E5E5E"/>
+                </a:solidFill>
+                <a:latin typeface="Courier"/>
+              </a:rPr>
+              <a:t>%&gt;%</a:t>
+            </a:r>
+            <a:br/>
+            <a:r>
+              <a:rPr>
+                <a:solidFill>
+                  <a:srgbClr val="003B4F"/>
+                </a:solidFill>
+                <a:latin typeface="Courier"/>
+              </a:rPr>
+              <a:t>  </a:t>
+            </a:r>
+            <a:r>
+              <a:rPr>
+                <a:solidFill>
+                  <a:srgbClr val="4758AB"/>
+                </a:solidFill>
+                <a:latin typeface="Courier"/>
+              </a:rPr>
+              <a:t>mutate</a:t>
+            </a:r>
+            <a:r>
+              <a:rPr>
+                <a:solidFill>
+                  <a:srgbClr val="003B4F"/>
+                </a:solidFill>
+                <a:latin typeface="Courier"/>
+              </a:rPr>
+              <a:t>(</a:t>
+            </a:r>
+            <a:r>
+              <a:rPr>
+                <a:solidFill>
+                  <a:srgbClr val="657422"/>
+                </a:solidFill>
+                <a:latin typeface="Courier"/>
+              </a:rPr>
+              <a:t>weight_mg =</a:t>
+            </a:r>
+            <a:r>
+              <a:rPr>
+                <a:solidFill>
+                  <a:srgbClr val="003B4F"/>
+                </a:solidFill>
+                <a:latin typeface="Courier"/>
+              </a:rPr>
+              <a:t> weight_g </a:t>
+            </a:r>
+            <a:r>
+              <a:rPr>
+                <a:solidFill>
+                  <a:srgbClr val="5E5E5E"/>
+                </a:solidFill>
+                <a:latin typeface="Courier"/>
+              </a:rPr>
+              <a:t>*</a:t>
+            </a:r>
+            <a:r>
+              <a:rPr>
+                <a:solidFill>
+                  <a:srgbClr val="003B4F"/>
+                </a:solidFill>
+                <a:latin typeface="Courier"/>
+              </a:rPr>
+              <a:t> </a:t>
+            </a:r>
+            <a:r>
+              <a:rPr>
+                <a:solidFill>
+                  <a:srgbClr val="AD0000"/>
+                </a:solidFill>
+                <a:latin typeface="Courier"/>
+              </a:rPr>
+              <a:t>1000</a:t>
+            </a:r>
+            <a:r>
+              <a:rPr>
+                <a:solidFill>
+                  <a:srgbClr val="003B4F"/>
+                </a:solidFill>
+                <a:latin typeface="Courier"/>
+              </a:rPr>
+              <a:t>) </a:t>
+            </a:r>
+            <a:r>
+              <a:rPr>
+                <a:solidFill>
+                  <a:srgbClr val="5E5E5E"/>
+                </a:solidFill>
+                <a:latin typeface="Courier"/>
+              </a:rPr>
+              <a:t>%&gt;%</a:t>
+            </a:r>
+            <a:br/>
+            <a:r>
+              <a:rPr>
+                <a:solidFill>
+                  <a:srgbClr val="003B4F"/>
+                </a:solidFill>
+                <a:latin typeface="Courier"/>
+              </a:rPr>
+              <a:t>  </a:t>
+            </a:r>
+            <a:r>
+              <a:rPr>
+                <a:solidFill>
+                  <a:srgbClr val="4758AB"/>
+                </a:solidFill>
+                <a:latin typeface="Courier"/>
+              </a:rPr>
+              <a:t>head</a:t>
+            </a:r>
+            <a:r>
+              <a:rPr>
+                <a:solidFill>
+                  <a:srgbClr val="003B4F"/>
+                </a:solidFill>
+                <a:latin typeface="Courier"/>
+              </a:rPr>
+              <a:t>()</a:t>
+            </a:r>
+          </a:p>
+          <a:p>
+            <a:pPr lvl="0" indent="0">
+              <a:buNone/>
+            </a:pPr>
+            <a:r>
+              <a:rPr>
+                <a:latin typeface="Courier"/>
+              </a:rPr>
+              <a:t># A tibble: 6 × 6
+  index side  weight_g width_cm height_cm weight_mg
+  &lt;dbl&gt; &lt;chr&gt;    &lt;dbl&gt;    &lt;dbl&gt;     &lt;dbl&gt;     &lt;dbl&gt;
+1     1 sunny        4       12        21      4000
+2     2 sunny        3       14        22      3000
+3     3 sunny        5       12        21      5000
+4     4 sunny        3       13        23      3000
+5     5 sunny        4       15        22      4000
+6     6 sunny        3       13        23      3000</a:t>
+            </a:r>
+          </a:p>
+          <a:p>
+            <a:pPr lvl="0" indent="0">
+              <a:buNone/>
+            </a:pPr>
+            <a:r>
+              <a:rPr>
+                <a:solidFill>
+                  <a:srgbClr val="5E5E5E"/>
+                </a:solidFill>
+                <a:latin typeface="Courier"/>
+              </a:rPr>
+              <a:t># Add a size category based on weight</a:t>
+            </a:r>
+            <a:br/>
+            <a:r>
+              <a:rPr>
+                <a:solidFill>
+                  <a:srgbClr val="003B4F"/>
+                </a:solidFill>
+                <a:latin typeface="Courier"/>
+              </a:rPr>
+              <a:t>tree_df </a:t>
+            </a:r>
+            <a:r>
+              <a:rPr>
+                <a:solidFill>
+                  <a:srgbClr val="5E5E5E"/>
+                </a:solidFill>
+                <a:latin typeface="Courier"/>
+              </a:rPr>
+              <a:t>%&gt;%</a:t>
+            </a:r>
+            <a:br/>
+            <a:r>
+              <a:rPr>
+                <a:solidFill>
+                  <a:srgbClr val="003B4F"/>
+                </a:solidFill>
+                <a:latin typeface="Courier"/>
+              </a:rPr>
+              <a:t>  </a:t>
+            </a:r>
+            <a:r>
+              <a:rPr>
+                <a:solidFill>
+                  <a:srgbClr val="4758AB"/>
+                </a:solidFill>
+                <a:latin typeface="Courier"/>
+              </a:rPr>
+              <a:t>mutate</a:t>
+            </a:r>
+            <a:r>
+              <a:rPr>
+                <a:solidFill>
+                  <a:srgbClr val="003B4F"/>
+                </a:solidFill>
+                <a:latin typeface="Courier"/>
+              </a:rPr>
+              <a:t>(</a:t>
+            </a:r>
+            <a:r>
+              <a:rPr>
+                <a:solidFill>
+                  <a:srgbClr val="657422"/>
+                </a:solidFill>
+                <a:latin typeface="Courier"/>
+              </a:rPr>
+              <a:t>size_class =</a:t>
+            </a:r>
+            <a:r>
+              <a:rPr>
+                <a:solidFill>
+                  <a:srgbClr val="003B4F"/>
+                </a:solidFill>
+                <a:latin typeface="Courier"/>
+              </a:rPr>
+              <a:t> </a:t>
+            </a:r>
+            <a:r>
+              <a:rPr>
+                <a:solidFill>
+                  <a:srgbClr val="4758AB"/>
+                </a:solidFill>
+                <a:latin typeface="Courier"/>
+              </a:rPr>
+              <a:t>if_else</a:t>
+            </a:r>
+            <a:r>
+              <a:rPr>
+                <a:solidFill>
+                  <a:srgbClr val="003B4F"/>
+                </a:solidFill>
+                <a:latin typeface="Courier"/>
+              </a:rPr>
+              <a:t>(weight_g </a:t>
+            </a:r>
+            <a:r>
+              <a:rPr>
+                <a:solidFill>
+                  <a:srgbClr val="5E5E5E"/>
+                </a:solidFill>
+                <a:latin typeface="Courier"/>
+              </a:rPr>
+              <a:t>&gt;</a:t>
+            </a:r>
+            <a:r>
+              <a:rPr>
+                <a:solidFill>
+                  <a:srgbClr val="003B4F"/>
+                </a:solidFill>
+                <a:latin typeface="Courier"/>
+              </a:rPr>
+              <a:t> </a:t>
+            </a:r>
+            <a:r>
+              <a:rPr>
+                <a:solidFill>
+                  <a:srgbClr val="AD0000"/>
+                </a:solidFill>
+                <a:latin typeface="Courier"/>
+              </a:rPr>
+              <a:t>5</a:t>
+            </a:r>
+            <a:r>
+              <a:rPr>
+                <a:solidFill>
+                  <a:srgbClr val="003B4F"/>
+                </a:solidFill>
+                <a:latin typeface="Courier"/>
+              </a:rPr>
+              <a:t>, </a:t>
+            </a:r>
+            <a:r>
+              <a:rPr>
+                <a:solidFill>
+                  <a:srgbClr val="20794D"/>
+                </a:solidFill>
+                <a:latin typeface="Courier"/>
+              </a:rPr>
+              <a:t>"large"</a:t>
+            </a:r>
+            <a:r>
+              <a:rPr>
+                <a:solidFill>
+                  <a:srgbClr val="003B4F"/>
+                </a:solidFill>
+                <a:latin typeface="Courier"/>
+              </a:rPr>
+              <a:t>, </a:t>
+            </a:r>
+            <a:r>
+              <a:rPr>
+                <a:solidFill>
+                  <a:srgbClr val="20794D"/>
+                </a:solidFill>
+                <a:latin typeface="Courier"/>
+              </a:rPr>
+              <a:t>"small"</a:t>
+            </a:r>
+            <a:r>
+              <a:rPr>
+                <a:solidFill>
+                  <a:srgbClr val="003B4F"/>
+                </a:solidFill>
+                <a:latin typeface="Courier"/>
+              </a:rPr>
+              <a:t>)) </a:t>
+            </a:r>
+            <a:r>
+              <a:rPr>
+                <a:solidFill>
+                  <a:srgbClr val="5E5E5E"/>
+                </a:solidFill>
+                <a:latin typeface="Courier"/>
+              </a:rPr>
+              <a:t>%&gt;%</a:t>
+            </a:r>
+            <a:br/>
+            <a:r>
+              <a:rPr>
+                <a:solidFill>
+                  <a:srgbClr val="003B4F"/>
+                </a:solidFill>
+                <a:latin typeface="Courier"/>
+              </a:rPr>
+              <a:t>  </a:t>
+            </a:r>
+            <a:r>
+              <a:rPr>
+                <a:solidFill>
+                  <a:srgbClr val="4758AB"/>
+                </a:solidFill>
+                <a:latin typeface="Courier"/>
+              </a:rPr>
+              <a:t>head</a:t>
+            </a:r>
+            <a:r>
+              <a:rPr>
+                <a:solidFill>
+                  <a:srgbClr val="003B4F"/>
+                </a:solidFill>
+                <a:latin typeface="Courier"/>
+              </a:rPr>
+              <a:t>()</a:t>
+            </a:r>
+          </a:p>
+          <a:p>
+            <a:pPr lvl="0" indent="0">
+              <a:buNone/>
+            </a:pPr>
+            <a:r>
+              <a:rPr>
+                <a:latin typeface="Courier"/>
+              </a:rPr>
+              <a:t># A tibble: 6 × 6
+  index side  weight_g width_cm height_cm size_class
+  &lt;dbl&gt; &lt;chr&gt;    &lt;dbl&gt;    &lt;dbl&gt;     &lt;dbl&gt; &lt;chr&gt;     
+1     1 sunny        4       12        21 small     
+2     2 sunny        3       14        22 small     
+3     3 sunny        5       12        21 small     
+4     4 sunny        3       13        23 small     
+5     5 sunny        4       15        22 small     
+6     6 sunny        3       13        23 small     </a:t>
+            </a:r>
+          </a:p>
+          <a:p>
+            <a:pPr lvl="0" indent="0">
+              <a:buNone/>
+            </a:pPr>
+            <a:r>
+              <a:rPr>
+                <a:solidFill>
+                  <a:srgbClr val="5E5E5E"/>
+                </a:solidFill>
+                <a:latin typeface="Courier"/>
+              </a:rPr>
+              <a:t># mutate() can reference multiple existing columns</a:t>
+            </a:r>
+            <a:br/>
+            <a:r>
+              <a:rPr>
+                <a:solidFill>
+                  <a:srgbClr val="003B4F"/>
+                </a:solidFill>
+                <a:latin typeface="Courier"/>
+              </a:rPr>
+              <a:t>tree_df </a:t>
+            </a:r>
+            <a:r>
+              <a:rPr>
+                <a:solidFill>
+                  <a:srgbClr val="5E5E5E"/>
+                </a:solidFill>
+                <a:latin typeface="Courier"/>
+              </a:rPr>
+              <a:t>%&gt;%</a:t>
+            </a:r>
+            <a:br/>
+            <a:r>
+              <a:rPr>
+                <a:solidFill>
+                  <a:srgbClr val="003B4F"/>
+                </a:solidFill>
+                <a:latin typeface="Courier"/>
+              </a:rPr>
+              <a:t>  </a:t>
+            </a:r>
+            <a:r>
+              <a:rPr>
+                <a:solidFill>
+                  <a:srgbClr val="4758AB"/>
+                </a:solidFill>
+                <a:latin typeface="Courier"/>
+              </a:rPr>
+              <a:t>mutate</a:t>
+            </a:r>
+            <a:r>
+              <a:rPr>
+                <a:solidFill>
+                  <a:srgbClr val="003B4F"/>
+                </a:solidFill>
+                <a:latin typeface="Courier"/>
+              </a:rPr>
+              <a:t>(</a:t>
+            </a:r>
+            <a:br/>
+            <a:r>
+              <a:rPr>
+                <a:solidFill>
+                  <a:srgbClr val="003B4F"/>
+                </a:solidFill>
+                <a:latin typeface="Courier"/>
+              </a:rPr>
+              <a:t>    </a:t>
+            </a:r>
+            <a:r>
+              <a:rPr>
+                <a:solidFill>
+                  <a:srgbClr val="657422"/>
+                </a:solidFill>
+                <a:latin typeface="Courier"/>
+              </a:rPr>
+              <a:t>weight_mg =</a:t>
+            </a:r>
+            <a:r>
+              <a:rPr>
+                <a:solidFill>
+                  <a:srgbClr val="003B4F"/>
+                </a:solidFill>
+                <a:latin typeface="Courier"/>
+              </a:rPr>
+              <a:t> weight_g </a:t>
+            </a:r>
+            <a:r>
+              <a:rPr>
+                <a:solidFill>
+                  <a:srgbClr val="5E5E5E"/>
+                </a:solidFill>
+                <a:latin typeface="Courier"/>
+              </a:rPr>
+              <a:t>*</a:t>
+            </a:r>
+            <a:r>
+              <a:rPr>
+                <a:solidFill>
+                  <a:srgbClr val="003B4F"/>
+                </a:solidFill>
+                <a:latin typeface="Courier"/>
+              </a:rPr>
+              <a:t> </a:t>
+            </a:r>
+            <a:r>
+              <a:rPr>
+                <a:solidFill>
+                  <a:srgbClr val="AD0000"/>
+                </a:solidFill>
+                <a:latin typeface="Courier"/>
+              </a:rPr>
+              <a:t>1000</a:t>
+            </a:r>
+            <a:r>
+              <a:rPr>
+                <a:solidFill>
+                  <a:srgbClr val="003B4F"/>
+                </a:solidFill>
+                <a:latin typeface="Courier"/>
+              </a:rPr>
+              <a:t>,</a:t>
+            </a:r>
+            <a:br/>
+            <a:r>
+              <a:rPr>
+                <a:solidFill>
+                  <a:srgbClr val="003B4F"/>
+                </a:solidFill>
+                <a:latin typeface="Courier"/>
+              </a:rPr>
+              <a:t>    </a:t>
+            </a:r>
+            <a:r>
+              <a:rPr>
+                <a:solidFill>
+                  <a:srgbClr val="657422"/>
+                </a:solidFill>
+                <a:latin typeface="Courier"/>
+              </a:rPr>
+              <a:t>area_approx =</a:t>
+            </a:r>
+            <a:r>
+              <a:rPr>
+                <a:solidFill>
+                  <a:srgbClr val="003B4F"/>
+                </a:solidFill>
+                <a:latin typeface="Courier"/>
+              </a:rPr>
+              <a:t> width_cm </a:t>
+            </a:r>
+            <a:r>
+              <a:rPr>
+                <a:solidFill>
+                  <a:srgbClr val="5E5E5E"/>
+                </a:solidFill>
+                <a:latin typeface="Courier"/>
+              </a:rPr>
+              <a:t>*</a:t>
+            </a:r>
+            <a:r>
+              <a:rPr>
+                <a:solidFill>
+                  <a:srgbClr val="003B4F"/>
+                </a:solidFill>
+                <a:latin typeface="Courier"/>
+              </a:rPr>
+              <a:t> height_cm </a:t>
+            </a:r>
+            <a:r>
+              <a:rPr>
+                <a:solidFill>
+                  <a:srgbClr val="5E5E5E"/>
+                </a:solidFill>
+                <a:latin typeface="Courier"/>
+              </a:rPr>
+              <a:t># rough area estimate</a:t>
+            </a:r>
+            <a:br/>
+            <a:r>
+              <a:rPr>
+                <a:solidFill>
+                  <a:srgbClr val="003B4F"/>
+                </a:solidFill>
+                <a:latin typeface="Courier"/>
+              </a:rPr>
+              <a:t>  ) </a:t>
+            </a:r>
+            <a:r>
+              <a:rPr>
+                <a:solidFill>
+                  <a:srgbClr val="5E5E5E"/>
+                </a:solidFill>
+                <a:latin typeface="Courier"/>
+              </a:rPr>
+              <a:t>%&gt;%</a:t>
+            </a:r>
+            <a:br/>
+            <a:r>
+              <a:rPr>
+                <a:solidFill>
+                  <a:srgbClr val="003B4F"/>
+                </a:solidFill>
+                <a:latin typeface="Courier"/>
+              </a:rPr>
+              <a:t>  </a:t>
+            </a:r>
+            <a:r>
+              <a:rPr>
+                <a:solidFill>
+                  <a:srgbClr val="4758AB"/>
+                </a:solidFill>
+                <a:latin typeface="Courier"/>
+              </a:rPr>
+              <a:t>head</a:t>
+            </a:r>
+            <a:r>
+              <a:rPr>
+                <a:solidFill>
+                  <a:srgbClr val="003B4F"/>
+                </a:solidFill>
+                <a:latin typeface="Courier"/>
+              </a:rPr>
+              <a:t>()</a:t>
+            </a:r>
+          </a:p>
+          <a:p>
+            <a:pPr lvl="0" indent="0">
+              <a:buNone/>
+            </a:pPr>
+            <a:r>
+              <a:rPr>
+                <a:latin typeface="Courier"/>
+              </a:rPr>
+              <a:t># A tibble: 6 × 7
+  index side  weight_g width_cm height_cm weight_mg area_approx
+  &lt;dbl&gt; &lt;chr&gt;    &lt;dbl&gt;    &lt;dbl&gt;     &lt;dbl&gt;     &lt;dbl&gt;       &lt;dbl&gt;
+1     1 sunny        4       12        21      4000         252
+2     2 sunny        3       14        22      3000         308
+3     3 sunny        5       12        21      5000         252
+4     4 sunny        3       13        23      3000         299
+5     5 sunny        4       15        22      4000         330
+6     6 sunny        3       13        23      3000         299</a:t>
+            </a:r>
+          </a:p>
+        </p:txBody>
+      </p:sp>
+      <p:sp>
+        <p:nvSpPr>
+          <p:cNvPr id="4" name="Content Placeholder 3"/>
+          <p:cNvSpPr>
+            <a:spLocks noGrp="1"/>
+          </p:cNvSpPr>
+          <p:nvPr>
+            <p:ph idx="2" sz="half"/>
+          </p:nvPr>
+        </p:nvSpPr>
+        <p:spPr/>
+        <p:txBody>
+          <a:bodyPr/>
+          <a:lstStyle/>
+          <a:p>
+            <a:pPr lvl="0"/>
+            <a:r>
+              <a:rPr>
+                <a:latin typeface="Courier"/>
+              </a:rPr>
+              <a:t>mutate()</a:t>
+            </a:r>
+            <a:r>
+              <a:rPr/>
+              <a:t> keeps </a:t>
+            </a:r>
+            <a:r>
+              <a:rPr b="1"/>
+              <a:t>all existing columns</a:t>
+            </a:r>
+            <a:r>
+              <a:rPr/>
+              <a:t> and adds new ones</a:t>
+            </a:r>
+          </a:p>
+          <a:p>
+            <a:pPr lvl="0"/>
+            <a:r>
+              <a:rPr b="1"/>
+              <a:t>Use </a:t>
+            </a:r>
+            <a:r>
+              <a:rPr b="1">
+                <a:latin typeface="Courier"/>
+              </a:rPr>
+              <a:t>if_else(condition, value_if_true, value_if_false)</a:t>
+            </a:r>
+            <a:r>
+              <a:rPr b="1"/>
+              <a:t> to create categories</a:t>
+            </a:r>
+          </a:p>
+          <a:p>
+            <a:pPr lvl="0" indent="0" marL="1270000">
+              <a:buNone/>
+            </a:pPr>
+            <a:r>
+              <a:rPr sz="2000" b="1"/>
+              <a:t>Note</a:t>
+            </a:r>
+          </a:p>
+          <a:p>
+            <a:pPr lvl="0" indent="0" marL="1270000">
+              <a:buNone/>
+            </a:pPr>
+            <a:r>
+              <a:rPr sz="2000" b="1"/>
+              <a:t>✅ Key idea</a:t>
+            </a:r>
+          </a:p>
+          <a:p>
+            <a:pPr lvl="0" indent="0" marL="1270000">
+              <a:buNone/>
+            </a:pPr>
+            <a:r>
+              <a:rPr sz="2000">
+                <a:latin typeface="Courier"/>
+              </a:rPr>
+              <a:t>mutate()</a:t>
+            </a:r>
+            <a:r>
+              <a:rPr sz="2000"/>
+              <a:t> never removes columns — it adds to the right of your data frame.</a:t>
+            </a:r>
+          </a:p>
+          <a:p>
+            <a:pPr lvl="0" indent="0" marL="1270000">
+              <a:buNone/>
+            </a:pPr>
+            <a:r>
+              <a:rPr sz="2000"/>
+              <a:t>To overwrite a column, just use the same name on the left: </a:t>
+            </a:r>
+            <a:r>
+              <a:rPr sz="2000">
+                <a:latin typeface="Courier"/>
+              </a:rPr>
+              <a:t>mutate(weight_g = round(weight_g, 1))</a:t>
+            </a:r>
+          </a:p>
+          <a:p>
+            <a:pPr lvl="0" indent="0" marL="0">
+              <a:buNone/>
+            </a:pPr>
+            <a:r>
+              <a:rPr/>
+              <a:t>📖 </a:t>
+            </a:r>
+            <a:r>
+              <a:rPr>
+                <a:hlinkClick r:id="rId2"/>
+              </a:rPr>
+              <a:t>R4DS §3.3</a:t>
+            </a:r>
+          </a:p>
+        </p:txBody>
+      </p:sp>
+    </p:spTree>
+  </p:cSld>
+</p:sld>
+</file>
+
+<file path=ppt/slides/slide15.xml><?xml version="1.0" encoding="utf-8"?>
+<p:sld xmlns:a="http://schemas.openxmlformats.org/drawingml/2006/main" xmlns:r="http://schemas.openxmlformats.org/officeDocument/2006/relationships" xmlns:p="http://schemas.openxmlformats.org/presentationml/2006/main">
+  <p:cSld>
+    <p:spTree>
+      <p:nvGrpSpPr>
+        <p:cNvPr id="1" name=""/>
+        <p:cNvGrpSpPr/>
+        <p:nvPr/>
+      </p:nvGrpSpPr>
+      <p:grpSpPr>
+        <a:xfrm>
+          <a:off x="0" y="0"/>
+          <a:ext cx="0" cy="0"/>
+          <a:chOff x="0" y="0"/>
+          <a:chExt cx="0" cy="0"/>
+        </a:xfrm>
+      </p:grpSpPr>
+      <p:sp>
+        <p:nvSpPr>
+          <p:cNvPr id="2" name="Title 1"/>
+          <p:cNvSpPr>
+            <a:spLocks noGrp="1"/>
+          </p:cNvSpPr>
+          <p:nvPr>
+            <p:ph type="title"/>
+          </p:nvPr>
+        </p:nvSpPr>
+        <p:spPr>
+          <a:xfrm>
+            <a:off x="0" y="0"/>
+            <a:ext cx="9144000" cy="602780"/>
+          </a:xfrm>
+          <a:solidFill>
+            <a:srgbClr val="1A1A2E"/>
+          </a:solidFill>
+        </p:spPr>
+        <p:txBody>
+          <a:bodyPr/>
+          <a:lstStyle/>
+          <a:p>
+            <a:pPr lvl="0" indent="0" marL="0">
+              <a:buNone/>
+            </a:pPr>
+            <a:r>
               <a:rPr>
                 <a:latin typeface="Courier"/>
               </a:rPr>
@@ -3873,7 +6748,7 @@
 </p:sld>
 </file>
 
-<file path=ppt/slides/slide11.xml><?xml version="1.0" encoding="utf-8"?>
+<file path=ppt/slides/slide16.xml><?xml version="1.0" encoding="utf-8"?>
 <p:sld xmlns:a="http://schemas.openxmlformats.org/drawingml/2006/main" xmlns:r="http://schemas.openxmlformats.org/officeDocument/2006/relationships" xmlns:p="http://schemas.openxmlformats.org/presentationml/2006/main">
   <p:cSld>
     <p:spTree>
@@ -4858,7 +7733,143 @@
 </p:sld>
 </file>
 
-<file path=ppt/slides/slide12.xml><?xml version="1.0" encoding="utf-8"?>
+<file path=ppt/slides/slide17.xml><?xml version="1.0" encoding="utf-8"?>
+<p:sld xmlns:a="http://schemas.openxmlformats.org/drawingml/2006/main" xmlns:r="http://schemas.openxmlformats.org/officeDocument/2006/relationships" xmlns:p="http://schemas.openxmlformats.org/presentationml/2006/main">
+  <p:cSld>
+    <p:spTree>
+      <p:nvGrpSpPr>
+        <p:cNvPr id="1" name=""/>
+        <p:cNvGrpSpPr/>
+        <p:nvPr/>
+      </p:nvGrpSpPr>
+      <p:grpSpPr>
+        <a:xfrm>
+          <a:off x="0" y="0"/>
+          <a:ext cx="0" cy="0"/>
+          <a:chOff x="0" y="0"/>
+          <a:chExt cx="0" cy="0"/>
+        </a:xfrm>
+      </p:grpSpPr>
+      <p:sp>
+        <p:nvSpPr>
+          <p:cNvPr id="2" name="Title 1"/>
+          <p:cNvSpPr>
+            <a:spLocks noGrp="1"/>
+          </p:cNvSpPr>
+          <p:nvPr>
+            <p:ph type="title"/>
+          </p:nvPr>
+        </p:nvSpPr>
+        <p:spPr>
+          <a:xfrm>
+            <a:off x="0" y="0"/>
+            <a:ext cx="9144000" cy="582780"/>
+          </a:xfrm>
+        </p:spPr>
+        <p:txBody>
+          <a:bodyPr/>
+          <a:lstStyle/>
+          <a:p>
+            <a:pPr lvl="0" indent="0" marL="0">
+              <a:buNone/>
+            </a:pPr>
+            <a:r>
+              <a:rPr/>
+              <a:t>🛑 Pause — Do Activity Parts 1–3 Now</a:t>
+            </a:r>
+          </a:p>
+        </p:txBody>
+      </p:sp>
+      <p:sp>
+        <p:nvSpPr>
+          <p:cNvPr id="3" name="Content Placeholder 2"/>
+          <p:cNvSpPr>
+            <a:spLocks noGrp="1"/>
+          </p:cNvSpPr>
+          <p:nvPr>
+            <p:ph idx="1"/>
+          </p:nvPr>
+        </p:nvSpPr>
+        <p:spPr/>
+        <p:txBody>
+          <a:bodyPr/>
+          <a:lstStyle/>
+          <a:p>
+            <a:pPr lvl="0" indent="0" marL="0">
+              <a:buNone/>
+            </a:pPr>
+            <a:r>
+              <a:rPr/>
+              <a:t>Open the worksheet and work through </a:t>
+            </a:r>
+            <a:r>
+              <a:rPr b="1"/>
+              <a:t>filter, select, mutate, arrange, and the full pipeline.</a:t>
+            </a:r>
+            <a:r>
+              <a:rPr/>
+              <a:t> Type every line; predict before you run.</a:t>
+            </a:r>
+          </a:p>
+          <a:p>
+            <a:pPr lvl="0" indent="0" marL="1270000">
+              <a:buNone/>
+            </a:pPr>
+            <a:r>
+              <a:rPr sz="2000" b="1"/>
+              <a:t>Note</a:t>
+            </a:r>
+          </a:p>
+          <a:p>
+            <a:pPr lvl="0" indent="0" marL="1270000">
+              <a:buNone/>
+            </a:pPr>
+            <a:r>
+              <a:rPr sz="2000" b="1"/>
+              <a:t>Natural stopping point (optional two-session split)</a:t>
+            </a:r>
+          </a:p>
+          <a:p>
+            <a:pPr lvl="0" indent="0" marL="1270000">
+              <a:buNone/>
+            </a:pPr>
+            <a:r>
+              <a:rPr sz="2000"/>
+              <a:t>Chunk 1 is all </a:t>
+            </a:r>
+            <a:r>
+              <a:rPr sz="2000" i="1"/>
+              <a:t>new code</a:t>
+            </a:r>
+            <a:r>
+              <a:rPr sz="2000"/>
+              <a:t>. Everything after this is </a:t>
+            </a:r>
+            <a:r>
+              <a:rPr sz="2000" i="1"/>
+              <a:t>new statistics</a:t>
+            </a:r>
+            <a:r>
+              <a:rPr sz="2000"/>
+              <a:t>. If class runs short, </a:t>
+            </a:r>
+            <a:r>
+              <a:rPr sz="2000" b="1"/>
+              <a:t>stop here</a:t>
+            </a:r>
+            <a:r>
+              <a:rPr sz="2000"/>
+              <a:t> and start next session at Chunk 2 — that keeps students from meeting new code and new statistics at the same moment, which is exactly what cognitive-load research warns against.</a:t>
+            </a:r>
+          </a:p>
+        </p:txBody>
+      </p:sp>
+    </p:spTree>
+  </p:cSld>
+</p:sld>
+</file>
+
+<file path=ppt/slides/slide18.xml><?xml version="1.0" encoding="utf-8"?>
 <p:sld xmlns:a="http://schemas.openxmlformats.org/drawingml/2006/main" xmlns:r="http://schemas.openxmlformats.org/officeDocument/2006/relationships" xmlns:p="http://schemas.openxmlformats.org/presentationml/2006/main">
   <p:cSld>
     <p:spTree>
@@ -5151,7 +8162,462 @@
 </p:sld>
 </file>
 
-<file path=ppt/slides/slide13.xml><?xml version="1.0" encoding="utf-8"?>
+<file path=ppt/slides/slide19.xml><?xml version="1.0" encoding="utf-8"?>
+<p:sld xmlns:a="http://schemas.openxmlformats.org/drawingml/2006/main" xmlns:r="http://schemas.openxmlformats.org/officeDocument/2006/relationships" xmlns:p="http://schemas.openxmlformats.org/presentationml/2006/main">
+  <p:cSld>
+    <p:spTree>
+      <p:nvGrpSpPr>
+        <p:cNvPr id="1" name=""/>
+        <p:cNvGrpSpPr/>
+        <p:nvPr/>
+      </p:nvGrpSpPr>
+      <p:grpSpPr>
+        <a:xfrm>
+          <a:off x="0" y="0"/>
+          <a:ext cx="0" cy="0"/>
+          <a:chOff x="0" y="0"/>
+          <a:chExt cx="0" cy="0"/>
+        </a:xfrm>
+      </p:grpSpPr>
+      <p:sp>
+        <p:nvSpPr>
+          <p:cNvPr id="2" name="Title 1"/>
+          <p:cNvSpPr>
+            <a:spLocks noGrp="1"/>
+          </p:cNvSpPr>
+          <p:nvPr>
+            <p:ph type="title"/>
+          </p:nvPr>
+        </p:nvSpPr>
+        <p:spPr>
+          <a:xfrm>
+            <a:off x="0" y="0"/>
+            <a:ext cx="9144000" cy="582780"/>
+          </a:xfrm>
+        </p:spPr>
+        <p:txBody>
+          <a:bodyPr/>
+          <a:lstStyle/>
+          <a:p>
+            <a:pPr lvl="0" indent="0" marL="0">
+              <a:buNone/>
+            </a:pPr>
+            <a:r>
+              <a:rPr/>
+              <a:t>🧩 Chunk 2 of 4 · Centre — Mean &amp; Median</a:t>
+            </a:r>
+          </a:p>
+        </p:txBody>
+      </p:sp>
+      <p:sp>
+        <p:nvSpPr>
+          <p:cNvPr id="3" name="Content Placeholder 2"/>
+          <p:cNvSpPr>
+            <a:spLocks noGrp="1"/>
+          </p:cNvSpPr>
+          <p:nvPr>
+            <p:ph idx="1"/>
+          </p:nvPr>
+        </p:nvSpPr>
+        <p:spPr/>
+        <p:txBody>
+          <a:bodyPr/>
+          <a:lstStyle/>
+          <a:p>
+            <a:pPr lvl="0" indent="0" marL="0">
+              <a:buNone/>
+            </a:pPr>
+            <a:r>
+              <a:rPr b="1"/>
+              <a:t>We will cover:</a:t>
+            </a:r>
+            <a:r>
+              <a:rPr/>
+              <a:t> the mean, extracting one group with </a:t>
+            </a:r>
+            <a:r>
+              <a:rPr>
+                <a:latin typeface="Courier"/>
+              </a:rPr>
+              <a:t>filter()</a:t>
+            </a:r>
+            <a:r>
+              <a:rPr/>
+              <a:t> + </a:t>
+            </a:r>
+            <a:r>
+              <a:rPr>
+                <a:latin typeface="Courier"/>
+              </a:rPr>
+              <a:t>pull()</a:t>
+            </a:r>
+            <a:r>
+              <a:rPr/>
+              <a:t>, and the median.</a:t>
+            </a:r>
+          </a:p>
+          <a:p>
+            <a:pPr lvl="0" indent="0" marL="1270000">
+              <a:buNone/>
+            </a:pPr>
+            <a:r>
+              <a:rPr sz="2000" b="1"/>
+              <a:t>Tip</a:t>
+            </a:r>
+          </a:p>
+          <a:p>
+            <a:pPr lvl="0" indent="0" marL="1270000">
+              <a:buNone/>
+            </a:pPr>
+            <a:r>
+              <a:rPr sz="2000" b="1"/>
+              <a:t>🖐 After this chunk: Activity Part 5 (mean &amp; median).</a:t>
+            </a:r>
+          </a:p>
+        </p:txBody>
+      </p:sp>
+    </p:spTree>
+  </p:cSld>
+</p:sld>
+</file>
+
+<file path=ppt/slides/slide2.xml><?xml version="1.0" encoding="utf-8"?>
+<p:sld xmlns:a="http://schemas.openxmlformats.org/drawingml/2006/main" xmlns:r="http://schemas.openxmlformats.org/officeDocument/2006/relationships" xmlns:p="http://schemas.openxmlformats.org/presentationml/2006/main">
+  <p:cSld>
+    <p:spTree>
+      <p:nvGrpSpPr>
+        <p:cNvPr id="1" name=""/>
+        <p:cNvGrpSpPr/>
+        <p:nvPr/>
+      </p:nvGrpSpPr>
+      <p:grpSpPr>
+        <a:xfrm>
+          <a:off x="0" y="0"/>
+          <a:ext cx="0" cy="0"/>
+          <a:chOff x="0" y="0"/>
+          <a:chExt cx="0" cy="0"/>
+        </a:xfrm>
+      </p:grpSpPr>
+      <p:sp>
+        <p:nvSpPr>
+          <p:cNvPr id="2" name="Title 1"/>
+          <p:cNvSpPr>
+            <a:spLocks noGrp="1"/>
+          </p:cNvSpPr>
+          <p:nvPr>
+            <p:ph type="title"/>
+          </p:nvPr>
+        </p:nvSpPr>
+        <p:spPr>
+          <a:xfrm>
+            <a:off x="0" y="0"/>
+            <a:ext cx="9144000" cy="582780"/>
+          </a:xfrm>
+        </p:spPr>
+        <p:txBody>
+          <a:bodyPr/>
+          <a:lstStyle/>
+          <a:p>
+            <a:pPr lvl="0" indent="0" marL="0">
+              <a:buNone/>
+            </a:pPr>
+            <a:r>
+              <a:rPr/>
+              <a:t>Where we left off (Lecture 02)</a:t>
+            </a:r>
+          </a:p>
+        </p:txBody>
+      </p:sp>
+      <p:sp>
+        <p:nvSpPr>
+          <p:cNvPr id="3" name="Content Placeholder 2"/>
+          <p:cNvSpPr>
+            <a:spLocks noGrp="1"/>
+          </p:cNvSpPr>
+          <p:nvPr>
+            <p:ph idx="1"/>
+          </p:nvPr>
+        </p:nvSpPr>
+        <p:spPr/>
+        <p:txBody>
+          <a:bodyPr/>
+          <a:lstStyle/>
+          <a:p>
+            <a:pPr lvl="0"/>
+            <a:r>
+              <a:rPr b="1"/>
+              <a:t>Setup</a:t>
+            </a:r>
+            <a:r>
+              <a:rPr/>
+              <a:t> — R and Positron installed; project folders created (</a:t>
+            </a:r>
+            <a:r>
+              <a:rPr>
+                <a:latin typeface="Courier"/>
+              </a:rPr>
+              <a:t>data/</a:t>
+            </a:r>
+            <a:r>
+              <a:rPr/>
+              <a:t>, </a:t>
+            </a:r>
+            <a:r>
+              <a:rPr>
+                <a:latin typeface="Courier"/>
+              </a:rPr>
+              <a:t>figures/</a:t>
+            </a:r>
+            <a:r>
+              <a:rPr/>
+              <a:t>, </a:t>
+            </a:r>
+            <a:r>
+              <a:rPr>
+                <a:latin typeface="Courier"/>
+              </a:rPr>
+              <a:t>scripts/</a:t>
+            </a:r>
+            <a:r>
+              <a:rPr/>
+              <a:t>)</a:t>
+            </a:r>
+          </a:p>
+          <a:p>
+            <a:pPr lvl="0"/>
+            <a:r>
+              <a:rPr b="1"/>
+              <a:t>R as a calculator</a:t>
+            </a:r>
+            <a:r>
+              <a:rPr/>
+              <a:t> — arithmetic, order of operations, assignment with </a:t>
+            </a:r>
+            <a:r>
+              <a:rPr>
+                <a:latin typeface="Courier"/>
+              </a:rPr>
+              <a:t>&lt;-</a:t>
+            </a:r>
+          </a:p>
+          <a:p>
+            <a:pPr lvl="0"/>
+            <a:r>
+              <a:rPr b="1"/>
+              <a:t>Vectors</a:t>
+            </a:r>
+            <a:r>
+              <a:rPr/>
+              <a:t> — </a:t>
+            </a:r>
+            <a:r>
+              <a:rPr>
+                <a:latin typeface="Courier"/>
+              </a:rPr>
+              <a:t>c()</a:t>
+            </a:r>
+            <a:r>
+              <a:rPr/>
+              <a:t>, data types (</a:t>
+            </a:r>
+            <a:r>
+              <a:rPr>
+                <a:latin typeface="Courier"/>
+              </a:rPr>
+              <a:t>numeric</a:t>
+            </a:r>
+            <a:r>
+              <a:rPr/>
+              <a:t>, </a:t>
+            </a:r>
+            <a:r>
+              <a:rPr>
+                <a:latin typeface="Courier"/>
+              </a:rPr>
+              <a:t>character</a:t>
+            </a:r>
+            <a:r>
+              <a:rPr/>
+              <a:t>, </a:t>
+            </a:r>
+            <a:r>
+              <a:rPr>
+                <a:latin typeface="Courier"/>
+              </a:rPr>
+              <a:t>logical</a:t>
+            </a:r>
+            <a:r>
+              <a:rPr/>
+              <a:t>)</a:t>
+            </a:r>
+          </a:p>
+          <a:p>
+            <a:pPr lvl="0"/>
+            <a:r>
+              <a:rPr b="1"/>
+              <a:t>Functions</a:t>
+            </a:r>
+            <a:r>
+              <a:rPr/>
+              <a:t> — calling built-in functions, reading help with </a:t>
+            </a:r>
+            <a:r>
+              <a:rPr>
+                <a:latin typeface="Courier"/>
+              </a:rPr>
+              <a:t>?</a:t>
+            </a:r>
+          </a:p>
+          <a:p>
+            <a:pPr lvl="0"/>
+            <a:r>
+              <a:rPr b="1"/>
+              <a:t>Loading data</a:t>
+            </a:r>
+            <a:r>
+              <a:rPr/>
+              <a:t> — </a:t>
+            </a:r>
+            <a:r>
+              <a:rPr>
+                <a:latin typeface="Courier"/>
+              </a:rPr>
+              <a:t>read_excel()</a:t>
+            </a:r>
+            <a:r>
+              <a:rPr/>
+              <a:t> and </a:t>
+            </a:r>
+            <a:r>
+              <a:rPr>
+                <a:latin typeface="Courier"/>
+              </a:rPr>
+              <a:t>read_csv()</a:t>
+            </a:r>
+            <a:r>
+              <a:rPr/>
+              <a:t>; inspecting with </a:t>
+            </a:r>
+            <a:r>
+              <a:rPr>
+                <a:latin typeface="Courier"/>
+              </a:rPr>
+              <a:t>glimpse()</a:t>
+            </a:r>
+            <a:r>
+              <a:rPr/>
+              <a:t>, </a:t>
+            </a:r>
+            <a:r>
+              <a:rPr>
+                <a:latin typeface="Courier"/>
+              </a:rPr>
+              <a:t>head()</a:t>
+            </a:r>
+            <a:r>
+              <a:rPr/>
+              <a:t>, </a:t>
+            </a:r>
+            <a:r>
+              <a:rPr>
+                <a:latin typeface="Courier"/>
+              </a:rPr>
+              <a:t>dim()</a:t>
+            </a:r>
+          </a:p>
+          <a:p>
+            <a:pPr lvl="0"/>
+            <a:r>
+              <a:rPr b="1"/>
+              <a:t>Pipe</a:t>
+            </a:r>
+            <a:r>
+              <a:rPr/>
+              <a:t> — </a:t>
+            </a:r>
+            <a:r>
+              <a:rPr>
+                <a:latin typeface="Courier"/>
+              </a:rPr>
+              <a:t>%&gt;%</a:t>
+            </a:r>
+            <a:r>
+              <a:rPr/>
+              <a:t> reads as “then”; chains steps together</a:t>
+            </a:r>
+          </a:p>
+          <a:p>
+            <a:pPr lvl="0"/>
+            <a:r>
+              <a:rPr b="1"/>
+              <a:t>First ggplot</a:t>
+            </a:r>
+            <a:r>
+              <a:rPr/>
+              <a:t> — boxplot + </a:t>
+            </a:r>
+            <a:r>
+              <a:rPr>
+                <a:latin typeface="Courier"/>
+              </a:rPr>
+              <a:t>geom_jitter()</a:t>
+            </a:r>
+            <a:r>
+              <a:rPr/>
+              <a:t>, saved as PNG</a:t>
+            </a:r>
+          </a:p>
+          <a:p>
+            <a:pPr lvl="0" indent="0" marL="1270000">
+              <a:buNone/>
+            </a:pPr>
+            <a:r>
+              <a:rPr sz="2000" b="1"/>
+              <a:t>Note</a:t>
+            </a:r>
+          </a:p>
+          <a:p>
+            <a:pPr lvl="0" indent="0" marL="1270000">
+              <a:buNone/>
+            </a:pPr>
+            <a:r>
+              <a:rPr sz="2000" b="1"/>
+              <a:t>✅ Key idea from Lecture 02</a:t>
+            </a:r>
+          </a:p>
+          <a:p>
+            <a:pPr lvl="0" indent="0" marL="1270000">
+              <a:buNone/>
+            </a:pPr>
+            <a:r>
+              <a:rPr sz="2000"/>
+              <a:t>You can get data into R and make a plot. Today we learn to </a:t>
+            </a:r>
+            <a:r>
+              <a:rPr sz="2000" i="1"/>
+              <a:t>wrangle</a:t>
+            </a:r>
+            <a:r>
+              <a:rPr sz="2000"/>
+              <a:t> and </a:t>
+            </a:r>
+            <a:r>
+              <a:rPr sz="2000" i="1"/>
+              <a:t>describe</a:t>
+            </a:r>
+            <a:r>
+              <a:rPr sz="2000"/>
+              <a:t> what we actually have.</a:t>
+            </a:r>
+          </a:p>
+        </p:txBody>
+      </p:sp>
+    </p:spTree>
+  </p:cSld>
+</p:sld>
+</file>
+
+<file path=ppt/slides/slide20.xml><?xml version="1.0" encoding="utf-8"?>
 <p:sld xmlns:a="http://schemas.openxmlformats.org/drawingml/2006/main" xmlns:r="http://schemas.openxmlformats.org/officeDocument/2006/relationships" xmlns:p="http://schemas.openxmlformats.org/presentationml/2006/main">
   <p:cSld>
     <p:spTree>
@@ -5450,7 +8916,7 @@
 </p:sld>
 </file>
 
-<file path=ppt/slides/slide14.xml><?xml version="1.0" encoding="utf-8"?>
+<file path=ppt/slides/slide21.xml><?xml version="1.0" encoding="utf-8"?>
 <p:sld xmlns:a="http://schemas.openxmlformats.org/drawingml/2006/main" xmlns:r="http://schemas.openxmlformats.org/officeDocument/2006/relationships" xmlns:p="http://schemas.openxmlformats.org/presentationml/2006/main">
   <p:cSld>
     <p:spTree>
@@ -6019,7 +9485,7 @@
 </p:sld>
 </file>
 
-<file path=ppt/slides/slide15.xml><?xml version="1.0" encoding="utf-8"?>
+<file path=ppt/slides/slide22.xml><?xml version="1.0" encoding="utf-8"?>
 <p:sld xmlns:a="http://schemas.openxmlformats.org/drawingml/2006/main" xmlns:r="http://schemas.openxmlformats.org/officeDocument/2006/relationships" xmlns:p="http://schemas.openxmlformats.org/presentationml/2006/main">
   <p:cSld>
     <p:spTree>
@@ -6819,7 +10285,126 @@
 </p:sld>
 </file>
 
-<file path=ppt/slides/slide16.xml><?xml version="1.0" encoding="utf-8"?>
+<file path=ppt/slides/slide23.xml><?xml version="1.0" encoding="utf-8"?>
+<p:sld xmlns:a="http://schemas.openxmlformats.org/drawingml/2006/main" xmlns:r="http://schemas.openxmlformats.org/officeDocument/2006/relationships" xmlns:p="http://schemas.openxmlformats.org/presentationml/2006/main">
+  <p:cSld>
+    <p:spTree>
+      <p:nvGrpSpPr>
+        <p:cNvPr id="1" name=""/>
+        <p:cNvGrpSpPr/>
+        <p:nvPr/>
+      </p:nvGrpSpPr>
+      <p:grpSpPr>
+        <a:xfrm>
+          <a:off x="0" y="0"/>
+          <a:ext cx="0" cy="0"/>
+          <a:chOff x="0" y="0"/>
+          <a:chExt cx="0" cy="0"/>
+        </a:xfrm>
+      </p:grpSpPr>
+      <p:sp>
+        <p:nvSpPr>
+          <p:cNvPr id="2" name="Title 1"/>
+          <p:cNvSpPr>
+            <a:spLocks noGrp="1"/>
+          </p:cNvSpPr>
+          <p:nvPr>
+            <p:ph type="title"/>
+          </p:nvPr>
+        </p:nvSpPr>
+        <p:spPr>
+          <a:xfrm>
+            <a:off x="0" y="0"/>
+            <a:ext cx="9144000" cy="582780"/>
+          </a:xfrm>
+        </p:spPr>
+        <p:txBody>
+          <a:bodyPr/>
+          <a:lstStyle/>
+          <a:p>
+            <a:pPr lvl="0" indent="0" marL="0">
+              <a:buNone/>
+            </a:pPr>
+            <a:r>
+              <a:rPr/>
+              <a:t>🧩 Chunk 3 of 4 · Spread &amp; Counting Correctly</a:t>
+            </a:r>
+          </a:p>
+        </p:txBody>
+      </p:sp>
+      <p:sp>
+        <p:nvSpPr>
+          <p:cNvPr id="3" name="Content Placeholder 2"/>
+          <p:cNvSpPr>
+            <a:spLocks noGrp="1"/>
+          </p:cNvSpPr>
+          <p:nvPr>
+            <p:ph idx="1"/>
+          </p:nvPr>
+        </p:nvSpPr>
+        <p:spPr/>
+        <p:txBody>
+          <a:bodyPr/>
+          <a:lstStyle/>
+          <a:p>
+            <a:pPr lvl="0" indent="0" marL="0">
+              <a:buNone/>
+            </a:pPr>
+            <a:r>
+              <a:rPr b="1"/>
+              <a:t>We will cover:</a:t>
+            </a:r>
+            <a:r>
+              <a:rPr/>
+              <a:t> variance, SD, SE, the trap in </a:t>
+            </a:r>
+            <a:r>
+              <a:rPr>
+                <a:latin typeface="Courier"/>
+              </a:rPr>
+              <a:t>length()</a:t>
+            </a:r>
+            <a:r>
+              <a:rPr/>
+              <a:t>, and the fix </a:t>
+            </a:r>
+            <a:r>
+              <a:rPr>
+                <a:latin typeface="Courier"/>
+              </a:rPr>
+              <a:t>sum(!is.na())</a:t>
+            </a:r>
+            <a:r>
+              <a:rPr/>
+              <a:t>.</a:t>
+            </a:r>
+          </a:p>
+          <a:p>
+            <a:pPr lvl="0" indent="0" marL="1270000">
+              <a:buNone/>
+            </a:pPr>
+            <a:r>
+              <a:rPr sz="2000" b="1"/>
+              <a:t>Tip</a:t>
+            </a:r>
+          </a:p>
+          <a:p>
+            <a:pPr lvl="0" indent="0" marL="1270000">
+              <a:buNone/>
+            </a:pPr>
+            <a:r>
+              <a:rPr sz="2000" b="1"/>
+              <a:t>🖐 After this chunk: Activity Part 4 (the NA problem) and the SD / SE steps of Part 5.</a:t>
+            </a:r>
+          </a:p>
+        </p:txBody>
+      </p:sp>
+    </p:spTree>
+  </p:cSld>
+</p:sld>
+</file>
+
+<file path=ppt/slides/slide24.xml><?xml version="1.0" encoding="utf-8"?>
 <p:sld xmlns:a="http://schemas.openxmlformats.org/drawingml/2006/main" xmlns:r="http://schemas.openxmlformats.org/officeDocument/2006/relationships" xmlns:p="http://schemas.openxmlformats.org/presentationml/2006/main">
   <p:cSld>
     <p:spTree>
@@ -7606,7 +11191,7 @@
 </p:sld>
 </file>
 
-<file path=ppt/slides/slide17.xml><?xml version="1.0" encoding="utf-8"?>
+<file path=ppt/slides/slide25.xml><?xml version="1.0" encoding="utf-8"?>
 <p:sld xmlns:a="http://schemas.openxmlformats.org/drawingml/2006/main" xmlns:r="http://schemas.openxmlformats.org/officeDocument/2006/relationships" xmlns:p="http://schemas.openxmlformats.org/presentationml/2006/main">
   <p:cSld>
     <p:spTree>
@@ -8284,7 +11869,7 @@
 </p:sld>
 </file>
 
-<file path=ppt/slides/slide18.xml><?xml version="1.0" encoding="utf-8"?>
+<file path=ppt/slides/slide26.xml><?xml version="1.0" encoding="utf-8"?>
 <p:sld xmlns:a="http://schemas.openxmlformats.org/drawingml/2006/main" xmlns:r="http://schemas.openxmlformats.org/officeDocument/2006/relationships" xmlns:p="http://schemas.openxmlformats.org/presentationml/2006/main">
   <p:cSld>
     <p:spTree>
@@ -9261,7 +12846,7 @@
 </p:sld>
 </file>
 
-<file path=ppt/slides/slide19.xml><?xml version="1.0" encoding="utf-8"?>
+<file path=ppt/slides/slide27.xml><?xml version="1.0" encoding="utf-8"?>
 <p:sld xmlns:a="http://schemas.openxmlformats.org/drawingml/2006/main" xmlns:r="http://schemas.openxmlformats.org/officeDocument/2006/relationships" xmlns:p="http://schemas.openxmlformats.org/presentationml/2006/main">
   <p:cSld>
     <p:spTree>
@@ -10011,343 +13596,7 @@
 </p:sld>
 </file>
 
-<file path=ppt/slides/slide2.xml><?xml version="1.0" encoding="utf-8"?>
-<p:sld xmlns:a="http://schemas.openxmlformats.org/drawingml/2006/main" xmlns:r="http://schemas.openxmlformats.org/officeDocument/2006/relationships" xmlns:p="http://schemas.openxmlformats.org/presentationml/2006/main">
-  <p:cSld>
-    <p:spTree>
-      <p:nvGrpSpPr>
-        <p:cNvPr id="1" name=""/>
-        <p:cNvGrpSpPr/>
-        <p:nvPr/>
-      </p:nvGrpSpPr>
-      <p:grpSpPr>
-        <a:xfrm>
-          <a:off x="0" y="0"/>
-          <a:ext cx="0" cy="0"/>
-          <a:chOff x="0" y="0"/>
-          <a:chExt cx="0" cy="0"/>
-        </a:xfrm>
-      </p:grpSpPr>
-      <p:sp>
-        <p:nvSpPr>
-          <p:cNvPr id="2" name="Title 1"/>
-          <p:cNvSpPr>
-            <a:spLocks noGrp="1"/>
-          </p:cNvSpPr>
-          <p:nvPr>
-            <p:ph type="title"/>
-          </p:nvPr>
-        </p:nvSpPr>
-        <p:spPr>
-          <a:xfrm>
-            <a:off x="0" y="0"/>
-            <a:ext cx="9144000" cy="582780"/>
-          </a:xfrm>
-        </p:spPr>
-        <p:txBody>
-          <a:bodyPr/>
-          <a:lstStyle/>
-          <a:p>
-            <a:pPr lvl="0" indent="0" marL="0">
-              <a:buNone/>
-            </a:pPr>
-            <a:r>
-              <a:rPr/>
-              <a:t>Where we left off (Lecture 02)</a:t>
-            </a:r>
-          </a:p>
-        </p:txBody>
-      </p:sp>
-      <p:sp>
-        <p:nvSpPr>
-          <p:cNvPr id="3" name="Content Placeholder 2"/>
-          <p:cNvSpPr>
-            <a:spLocks noGrp="1"/>
-          </p:cNvSpPr>
-          <p:nvPr>
-            <p:ph idx="1"/>
-          </p:nvPr>
-        </p:nvSpPr>
-        <p:spPr/>
-        <p:txBody>
-          <a:bodyPr/>
-          <a:lstStyle/>
-          <a:p>
-            <a:pPr lvl="0"/>
-            <a:r>
-              <a:rPr b="1"/>
-              <a:t>Setup</a:t>
-            </a:r>
-            <a:r>
-              <a:rPr/>
-              <a:t> — R and Positron installed; project folders created (</a:t>
-            </a:r>
-            <a:r>
-              <a:rPr>
-                <a:latin typeface="Courier"/>
-              </a:rPr>
-              <a:t>data/</a:t>
-            </a:r>
-            <a:r>
-              <a:rPr/>
-              <a:t>, </a:t>
-            </a:r>
-            <a:r>
-              <a:rPr>
-                <a:latin typeface="Courier"/>
-              </a:rPr>
-              <a:t>figures/</a:t>
-            </a:r>
-            <a:r>
-              <a:rPr/>
-              <a:t>, </a:t>
-            </a:r>
-            <a:r>
-              <a:rPr>
-                <a:latin typeface="Courier"/>
-              </a:rPr>
-              <a:t>scripts/</a:t>
-            </a:r>
-            <a:r>
-              <a:rPr/>
-              <a:t>)</a:t>
-            </a:r>
-          </a:p>
-          <a:p>
-            <a:pPr lvl="0"/>
-            <a:r>
-              <a:rPr b="1"/>
-              <a:t>R as a calculator</a:t>
-            </a:r>
-            <a:r>
-              <a:rPr/>
-              <a:t> — arithmetic, order of operations, assignment with </a:t>
-            </a:r>
-            <a:r>
-              <a:rPr>
-                <a:latin typeface="Courier"/>
-              </a:rPr>
-              <a:t>&lt;-</a:t>
-            </a:r>
-          </a:p>
-          <a:p>
-            <a:pPr lvl="0"/>
-            <a:r>
-              <a:rPr b="1"/>
-              <a:t>Vectors</a:t>
-            </a:r>
-            <a:r>
-              <a:rPr/>
-              <a:t> — </a:t>
-            </a:r>
-            <a:r>
-              <a:rPr>
-                <a:latin typeface="Courier"/>
-              </a:rPr>
-              <a:t>c()</a:t>
-            </a:r>
-            <a:r>
-              <a:rPr/>
-              <a:t>, data types (</a:t>
-            </a:r>
-            <a:r>
-              <a:rPr>
-                <a:latin typeface="Courier"/>
-              </a:rPr>
-              <a:t>numeric</a:t>
-            </a:r>
-            <a:r>
-              <a:rPr/>
-              <a:t>, </a:t>
-            </a:r>
-            <a:r>
-              <a:rPr>
-                <a:latin typeface="Courier"/>
-              </a:rPr>
-              <a:t>character</a:t>
-            </a:r>
-            <a:r>
-              <a:rPr/>
-              <a:t>, </a:t>
-            </a:r>
-            <a:r>
-              <a:rPr>
-                <a:latin typeface="Courier"/>
-              </a:rPr>
-              <a:t>logical</a:t>
-            </a:r>
-            <a:r>
-              <a:rPr/>
-              <a:t>)</a:t>
-            </a:r>
-          </a:p>
-          <a:p>
-            <a:pPr lvl="0"/>
-            <a:r>
-              <a:rPr b="1"/>
-              <a:t>Functions</a:t>
-            </a:r>
-            <a:r>
-              <a:rPr/>
-              <a:t> — calling built-in functions, reading help with </a:t>
-            </a:r>
-            <a:r>
-              <a:rPr>
-                <a:latin typeface="Courier"/>
-              </a:rPr>
-              <a:t>?</a:t>
-            </a:r>
-          </a:p>
-          <a:p>
-            <a:pPr lvl="0"/>
-            <a:r>
-              <a:rPr b="1"/>
-              <a:t>Loading data</a:t>
-            </a:r>
-            <a:r>
-              <a:rPr/>
-              <a:t> — </a:t>
-            </a:r>
-            <a:r>
-              <a:rPr>
-                <a:latin typeface="Courier"/>
-              </a:rPr>
-              <a:t>read_excel()</a:t>
-            </a:r>
-            <a:r>
-              <a:rPr/>
-              <a:t> and </a:t>
-            </a:r>
-            <a:r>
-              <a:rPr>
-                <a:latin typeface="Courier"/>
-              </a:rPr>
-              <a:t>read_csv()</a:t>
-            </a:r>
-            <a:r>
-              <a:rPr/>
-              <a:t>; inspecting with </a:t>
-            </a:r>
-            <a:r>
-              <a:rPr>
-                <a:latin typeface="Courier"/>
-              </a:rPr>
-              <a:t>glimpse()</a:t>
-            </a:r>
-            <a:r>
-              <a:rPr/>
-              <a:t>, </a:t>
-            </a:r>
-            <a:r>
-              <a:rPr>
-                <a:latin typeface="Courier"/>
-              </a:rPr>
-              <a:t>head()</a:t>
-            </a:r>
-            <a:r>
-              <a:rPr/>
-              <a:t>, </a:t>
-            </a:r>
-            <a:r>
-              <a:rPr>
-                <a:latin typeface="Courier"/>
-              </a:rPr>
-              <a:t>dim()</a:t>
-            </a:r>
-          </a:p>
-          <a:p>
-            <a:pPr lvl="0"/>
-            <a:r>
-              <a:rPr b="1"/>
-              <a:t>Pipe</a:t>
-            </a:r>
-            <a:r>
-              <a:rPr/>
-              <a:t> — </a:t>
-            </a:r>
-            <a:r>
-              <a:rPr>
-                <a:latin typeface="Courier"/>
-              </a:rPr>
-              <a:t>%&gt;%</a:t>
-            </a:r>
-            <a:r>
-              <a:rPr/>
-              <a:t> reads as “then”; chains steps together</a:t>
-            </a:r>
-          </a:p>
-          <a:p>
-            <a:pPr lvl="0"/>
-            <a:r>
-              <a:rPr b="1"/>
-              <a:t>First ggplot</a:t>
-            </a:r>
-            <a:r>
-              <a:rPr/>
-              <a:t> — boxplot + </a:t>
-            </a:r>
-            <a:r>
-              <a:rPr>
-                <a:latin typeface="Courier"/>
-              </a:rPr>
-              <a:t>geom_jitter()</a:t>
-            </a:r>
-            <a:r>
-              <a:rPr/>
-              <a:t>, saved as PNG</a:t>
-            </a:r>
-          </a:p>
-          <a:p>
-            <a:pPr lvl="0" indent="0" marL="1270000">
-              <a:buNone/>
-            </a:pPr>
-            <a:r>
-              <a:rPr sz="2000" b="1"/>
-              <a:t>Note</a:t>
-            </a:r>
-          </a:p>
-          <a:p>
-            <a:pPr lvl="0" indent="0" marL="1270000">
-              <a:buNone/>
-            </a:pPr>
-            <a:r>
-              <a:rPr sz="2000" b="1"/>
-              <a:t>✅ Key idea from Lecture 02</a:t>
-            </a:r>
-          </a:p>
-          <a:p>
-            <a:pPr lvl="0" indent="0" marL="1270000">
-              <a:buNone/>
-            </a:pPr>
-            <a:r>
-              <a:rPr sz="2000"/>
-              <a:t>You can get data into R and make a plot. Today we learn to </a:t>
-            </a:r>
-            <a:r>
-              <a:rPr sz="2000" i="1"/>
-              <a:t>wrangle</a:t>
-            </a:r>
-            <a:r>
-              <a:rPr sz="2000"/>
-              <a:t> and </a:t>
-            </a:r>
-            <a:r>
-              <a:rPr sz="2000" i="1"/>
-              <a:t>describe</a:t>
-            </a:r>
-            <a:r>
-              <a:rPr sz="2000"/>
-              <a:t> what we actually have.</a:t>
-            </a:r>
-          </a:p>
-        </p:txBody>
-      </p:sp>
-    </p:spTree>
-  </p:cSld>
-</p:sld>
-</file>
-
-<file path=ppt/slides/slide20.xml><?xml version="1.0" encoding="utf-8"?>
+<file path=ppt/slides/slide28.xml><?xml version="1.0" encoding="utf-8"?>
 <p:sld xmlns:a="http://schemas.openxmlformats.org/drawingml/2006/main" xmlns:r="http://schemas.openxmlformats.org/officeDocument/2006/relationships" xmlns:p="http://schemas.openxmlformats.org/presentationml/2006/main">
   <p:cSld>
     <p:spTree>
@@ -11025,7 +14274,7 @@
 </p:sld>
 </file>
 
-<file path=ppt/slides/slide21.xml><?xml version="1.0" encoding="utf-8"?>
+<file path=ppt/slides/slide29.xml><?xml version="1.0" encoding="utf-8"?>
 <p:sld xmlns:a="http://schemas.openxmlformats.org/drawingml/2006/main" xmlns:r="http://schemas.openxmlformats.org/officeDocument/2006/relationships" xmlns:p="http://schemas.openxmlformats.org/presentationml/2006/main">
   <p:cSld>
     <p:spTree>
@@ -12121,7 +15370,7 @@
 </p:sld>
 </file>
 
-<file path=ppt/slides/slide22.xml><?xml version="1.0" encoding="utf-8"?>
+<file path=ppt/slides/slide3.xml><?xml version="1.0" encoding="utf-8"?>
 <p:sld xmlns:a="http://schemas.openxmlformats.org/drawingml/2006/main" xmlns:r="http://schemas.openxmlformats.org/officeDocument/2006/relationships" xmlns:p="http://schemas.openxmlformats.org/presentationml/2006/main">
   <p:cSld>
     <p:spTree>
@@ -12166,23 +15415,7 @@
             </a:pPr>
             <a:r>
               <a:rPr/>
-              <a:t>Stats the Tidy Way — </a:t>
-            </a:r>
-            <a:r>
-              <a:rPr>
-                <a:latin typeface="Courier"/>
-              </a:rPr>
-              <a:t>group_by()</a:t>
-            </a:r>
-            <a:r>
-              <a:rPr/>
-              <a:t> + </a:t>
-            </a:r>
-            <a:r>
-              <a:rPr>
-                <a:latin typeface="Courier"/>
-              </a:rPr>
-              <a:t>summarize()</a:t>
+              <a:t>Goals for Today</a:t>
             </a:r>
           </a:p>
         </p:txBody>
@@ -12202,664 +15435,170 @@
           <a:bodyPr/>
           <a:lstStyle/>
           <a:p>
-            <a:pPr lvl="0" indent="0">
+            <a:pPr lvl="0" indent="0" marL="0">
               <a:buNone/>
             </a:pPr>
             <a:r>
-              <a:rPr>
-                <a:solidFill>
-                  <a:srgbClr val="5E5E5E"/>
-                </a:solidFill>
-                <a:latin typeface="Courier"/>
-              </a:rPr>
-              <a:t># Calculate all stats for both sides at once ----------</a:t>
-            </a:r>
-            <a:br/>
-            <a:r>
-              <a:rPr>
-                <a:solidFill>
-                  <a:srgbClr val="003B4F"/>
-                </a:solidFill>
-                <a:latin typeface="Courier"/>
-              </a:rPr>
-              <a:t>stats_df &lt;- tree_df </a:t>
-            </a:r>
-            <a:r>
-              <a:rPr>
-                <a:solidFill>
-                  <a:srgbClr val="5E5E5E"/>
-                </a:solidFill>
-                <a:latin typeface="Courier"/>
-              </a:rPr>
-              <a:t>%&gt;%</a:t>
-            </a:r>
-            <a:br/>
-            <a:r>
-              <a:rPr>
-                <a:solidFill>
-                  <a:srgbClr val="003B4F"/>
-                </a:solidFill>
-                <a:latin typeface="Courier"/>
-              </a:rPr>
-              <a:t>  </a:t>
-            </a:r>
-            <a:r>
-              <a:rPr>
-                <a:solidFill>
-                  <a:srgbClr val="4758AB"/>
-                </a:solidFill>
-                <a:latin typeface="Courier"/>
-              </a:rPr>
-              <a:t>group_by</a:t>
-            </a:r>
-            <a:r>
-              <a:rPr>
-                <a:solidFill>
-                  <a:srgbClr val="003B4F"/>
-                </a:solidFill>
-                <a:latin typeface="Courier"/>
-              </a:rPr>
-              <a:t>(side) </a:t>
-            </a:r>
-            <a:r>
-              <a:rPr>
-                <a:solidFill>
-                  <a:srgbClr val="5E5E5E"/>
-                </a:solidFill>
-                <a:latin typeface="Courier"/>
-              </a:rPr>
-              <a:t>%&gt;%</a:t>
-            </a:r>
-            <a:br/>
-            <a:r>
-              <a:rPr>
-                <a:solidFill>
-                  <a:srgbClr val="003B4F"/>
-                </a:solidFill>
-                <a:latin typeface="Courier"/>
-              </a:rPr>
-              <a:t>  </a:t>
-            </a:r>
-            <a:r>
-              <a:rPr>
-                <a:solidFill>
-                  <a:srgbClr val="4758AB"/>
-                </a:solidFill>
-                <a:latin typeface="Courier"/>
-              </a:rPr>
-              <a:t>summarize</a:t>
-            </a:r>
-            <a:r>
-              <a:rPr>
-                <a:solidFill>
-                  <a:srgbClr val="003B4F"/>
-                </a:solidFill>
-                <a:latin typeface="Courier"/>
-              </a:rPr>
-              <a:t>(</a:t>
-            </a:r>
-            <a:br/>
-            <a:r>
-              <a:rPr>
-                <a:solidFill>
-                  <a:srgbClr val="003B4F"/>
-                </a:solidFill>
-                <a:latin typeface="Courier"/>
-              </a:rPr>
-              <a:t>    </a:t>
-            </a:r>
-            <a:r>
-              <a:rPr>
-                <a:solidFill>
-                  <a:srgbClr val="657422"/>
-                </a:solidFill>
-                <a:latin typeface="Courier"/>
-              </a:rPr>
-              <a:t>n =</a:t>
-            </a:r>
-            <a:r>
-              <a:rPr>
-                <a:solidFill>
-                  <a:srgbClr val="003B4F"/>
-                </a:solidFill>
-                <a:latin typeface="Courier"/>
-              </a:rPr>
-              <a:t> </a:t>
-            </a:r>
-            <a:r>
-              <a:rPr>
-                <a:solidFill>
-                  <a:srgbClr val="4758AB"/>
-                </a:solidFill>
-                <a:latin typeface="Courier"/>
-              </a:rPr>
-              <a:t>sum</a:t>
-            </a:r>
-            <a:r>
-              <a:rPr>
-                <a:solidFill>
-                  <a:srgbClr val="003B4F"/>
-                </a:solidFill>
-                <a:latin typeface="Courier"/>
-              </a:rPr>
-              <a:t>(</a:t>
-            </a:r>
-            <a:r>
-              <a:rPr>
-                <a:solidFill>
-                  <a:srgbClr val="5E5E5E"/>
-                </a:solidFill>
-                <a:latin typeface="Courier"/>
-              </a:rPr>
-              <a:t>!</a:t>
-            </a:r>
-            <a:r>
-              <a:rPr>
-                <a:solidFill>
-                  <a:srgbClr val="4758AB"/>
-                </a:solidFill>
-                <a:latin typeface="Courier"/>
-              </a:rPr>
-              <a:t>is.na</a:t>
-            </a:r>
-            <a:r>
-              <a:rPr>
-                <a:solidFill>
-                  <a:srgbClr val="003B4F"/>
-                </a:solidFill>
-                <a:latin typeface="Courier"/>
-              </a:rPr>
-              <a:t>(weight_g)),</a:t>
-            </a:r>
-            <a:br/>
-            <a:r>
-              <a:rPr>
-                <a:solidFill>
-                  <a:srgbClr val="003B4F"/>
-                </a:solidFill>
-                <a:latin typeface="Courier"/>
-              </a:rPr>
-              <a:t>    </a:t>
-            </a:r>
-            <a:r>
-              <a:rPr>
-                <a:solidFill>
-                  <a:srgbClr val="657422"/>
-                </a:solidFill>
-                <a:latin typeface="Courier"/>
-              </a:rPr>
-              <a:t>mean_wt =</a:t>
-            </a:r>
-            <a:r>
-              <a:rPr>
-                <a:solidFill>
-                  <a:srgbClr val="003B4F"/>
-                </a:solidFill>
-                <a:latin typeface="Courier"/>
-              </a:rPr>
-              <a:t> </a:t>
-            </a:r>
-            <a:r>
-              <a:rPr>
-                <a:solidFill>
-                  <a:srgbClr val="4758AB"/>
-                </a:solidFill>
-                <a:latin typeface="Courier"/>
-              </a:rPr>
-              <a:t>round</a:t>
-            </a:r>
-            <a:r>
-              <a:rPr>
-                <a:solidFill>
-                  <a:srgbClr val="003B4F"/>
-                </a:solidFill>
-                <a:latin typeface="Courier"/>
-              </a:rPr>
-              <a:t>(</a:t>
-            </a:r>
-            <a:r>
-              <a:rPr>
-                <a:solidFill>
-                  <a:srgbClr val="4758AB"/>
-                </a:solidFill>
-                <a:latin typeface="Courier"/>
-              </a:rPr>
-              <a:t>mean</a:t>
-            </a:r>
-            <a:r>
-              <a:rPr>
-                <a:solidFill>
-                  <a:srgbClr val="003B4F"/>
-                </a:solidFill>
-                <a:latin typeface="Courier"/>
-              </a:rPr>
-              <a:t>(weight_g, </a:t>
-            </a:r>
-            <a:r>
-              <a:rPr>
-                <a:solidFill>
-                  <a:srgbClr val="657422"/>
-                </a:solidFill>
-                <a:latin typeface="Courier"/>
-              </a:rPr>
-              <a:t>na.rm =</a:t>
-            </a:r>
-            <a:r>
-              <a:rPr>
-                <a:solidFill>
-                  <a:srgbClr val="003B4F"/>
-                </a:solidFill>
-                <a:latin typeface="Courier"/>
-              </a:rPr>
-              <a:t> </a:t>
-            </a:r>
-            <a:r>
-              <a:rPr>
-                <a:solidFill>
-                  <a:srgbClr val="8F5902"/>
-                </a:solidFill>
-                <a:latin typeface="Courier"/>
-              </a:rPr>
-              <a:t>TRUE</a:t>
-            </a:r>
-            <a:r>
-              <a:rPr>
-                <a:solidFill>
-                  <a:srgbClr val="003B4F"/>
-                </a:solidFill>
-                <a:latin typeface="Courier"/>
-              </a:rPr>
-              <a:t>), </a:t>
-            </a:r>
-            <a:r>
-              <a:rPr>
-                <a:solidFill>
-                  <a:srgbClr val="AD0000"/>
-                </a:solidFill>
-                <a:latin typeface="Courier"/>
-              </a:rPr>
-              <a:t>2</a:t>
-            </a:r>
-            <a:r>
-              <a:rPr>
-                <a:solidFill>
-                  <a:srgbClr val="003B4F"/>
-                </a:solidFill>
-                <a:latin typeface="Courier"/>
-              </a:rPr>
-              <a:t>),</a:t>
-            </a:r>
-            <a:br/>
-            <a:r>
-              <a:rPr>
-                <a:solidFill>
-                  <a:srgbClr val="003B4F"/>
-                </a:solidFill>
-                <a:latin typeface="Courier"/>
-              </a:rPr>
-              <a:t>    </a:t>
-            </a:r>
-            <a:r>
-              <a:rPr>
-                <a:solidFill>
-                  <a:srgbClr val="657422"/>
-                </a:solidFill>
-                <a:latin typeface="Courier"/>
-              </a:rPr>
-              <a:t>med_wt =</a:t>
-            </a:r>
-            <a:r>
-              <a:rPr>
-                <a:solidFill>
-                  <a:srgbClr val="003B4F"/>
-                </a:solidFill>
-                <a:latin typeface="Courier"/>
-              </a:rPr>
-              <a:t> </a:t>
-            </a:r>
-            <a:r>
-              <a:rPr>
-                <a:solidFill>
-                  <a:srgbClr val="4758AB"/>
-                </a:solidFill>
-                <a:latin typeface="Courier"/>
-              </a:rPr>
-              <a:t>round</a:t>
-            </a:r>
-            <a:r>
-              <a:rPr>
-                <a:solidFill>
-                  <a:srgbClr val="003B4F"/>
-                </a:solidFill>
-                <a:latin typeface="Courier"/>
-              </a:rPr>
-              <a:t>(</a:t>
-            </a:r>
-            <a:r>
-              <a:rPr>
-                <a:solidFill>
-                  <a:srgbClr val="4758AB"/>
-                </a:solidFill>
-                <a:latin typeface="Courier"/>
-              </a:rPr>
-              <a:t>median</a:t>
-            </a:r>
-            <a:r>
-              <a:rPr>
-                <a:solidFill>
-                  <a:srgbClr val="003B4F"/>
-                </a:solidFill>
-                <a:latin typeface="Courier"/>
-              </a:rPr>
-              <a:t>(weight_g, </a:t>
-            </a:r>
-            <a:r>
-              <a:rPr>
-                <a:solidFill>
-                  <a:srgbClr val="657422"/>
-                </a:solidFill>
-                <a:latin typeface="Courier"/>
-              </a:rPr>
-              <a:t>na.rm =</a:t>
-            </a:r>
-            <a:r>
-              <a:rPr>
-                <a:solidFill>
-                  <a:srgbClr val="003B4F"/>
-                </a:solidFill>
-                <a:latin typeface="Courier"/>
-              </a:rPr>
-              <a:t> </a:t>
-            </a:r>
-            <a:r>
-              <a:rPr>
-                <a:solidFill>
-                  <a:srgbClr val="8F5902"/>
-                </a:solidFill>
-                <a:latin typeface="Courier"/>
-              </a:rPr>
-              <a:t>TRUE</a:t>
-            </a:r>
-            <a:r>
-              <a:rPr>
-                <a:solidFill>
-                  <a:srgbClr val="003B4F"/>
-                </a:solidFill>
-                <a:latin typeface="Courier"/>
-              </a:rPr>
-              <a:t>), </a:t>
-            </a:r>
-            <a:r>
-              <a:rPr>
-                <a:solidFill>
-                  <a:srgbClr val="AD0000"/>
-                </a:solidFill>
-                <a:latin typeface="Courier"/>
-              </a:rPr>
-              <a:t>2</a:t>
-            </a:r>
-            <a:r>
-              <a:rPr>
-                <a:solidFill>
-                  <a:srgbClr val="003B4F"/>
-                </a:solidFill>
-                <a:latin typeface="Courier"/>
-              </a:rPr>
-              <a:t>),</a:t>
-            </a:r>
-            <a:br/>
-            <a:r>
-              <a:rPr>
-                <a:solidFill>
-                  <a:srgbClr val="003B4F"/>
-                </a:solidFill>
-                <a:latin typeface="Courier"/>
-              </a:rPr>
-              <a:t>    </a:t>
-            </a:r>
-            <a:r>
-              <a:rPr>
-                <a:solidFill>
-                  <a:srgbClr val="657422"/>
-                </a:solidFill>
-                <a:latin typeface="Courier"/>
-              </a:rPr>
-              <a:t>sd_wt =</a:t>
-            </a:r>
-            <a:r>
-              <a:rPr>
-                <a:solidFill>
-                  <a:srgbClr val="003B4F"/>
-                </a:solidFill>
-                <a:latin typeface="Courier"/>
-              </a:rPr>
-              <a:t> </a:t>
-            </a:r>
-            <a:r>
-              <a:rPr>
-                <a:solidFill>
-                  <a:srgbClr val="4758AB"/>
-                </a:solidFill>
-                <a:latin typeface="Courier"/>
-              </a:rPr>
-              <a:t>round</a:t>
-            </a:r>
-            <a:r>
-              <a:rPr>
-                <a:solidFill>
-                  <a:srgbClr val="003B4F"/>
-                </a:solidFill>
-                <a:latin typeface="Courier"/>
-              </a:rPr>
-              <a:t>(</a:t>
-            </a:r>
-            <a:r>
-              <a:rPr>
-                <a:solidFill>
-                  <a:srgbClr val="4758AB"/>
-                </a:solidFill>
-                <a:latin typeface="Courier"/>
-              </a:rPr>
-              <a:t>sd</a:t>
-            </a:r>
-            <a:r>
-              <a:rPr>
-                <a:solidFill>
-                  <a:srgbClr val="003B4F"/>
-                </a:solidFill>
-                <a:latin typeface="Courier"/>
-              </a:rPr>
-              <a:t>(weight_g, </a:t>
-            </a:r>
-            <a:r>
-              <a:rPr>
-                <a:solidFill>
-                  <a:srgbClr val="657422"/>
-                </a:solidFill>
-                <a:latin typeface="Courier"/>
-              </a:rPr>
-              <a:t>na.rm =</a:t>
-            </a:r>
-            <a:r>
-              <a:rPr>
-                <a:solidFill>
-                  <a:srgbClr val="003B4F"/>
-                </a:solidFill>
-                <a:latin typeface="Courier"/>
-              </a:rPr>
-              <a:t> </a:t>
-            </a:r>
-            <a:r>
-              <a:rPr>
-                <a:solidFill>
-                  <a:srgbClr val="8F5902"/>
-                </a:solidFill>
-                <a:latin typeface="Courier"/>
-              </a:rPr>
-              <a:t>TRUE</a:t>
-            </a:r>
-            <a:r>
-              <a:rPr>
-                <a:solidFill>
-                  <a:srgbClr val="003B4F"/>
-                </a:solidFill>
-                <a:latin typeface="Courier"/>
-              </a:rPr>
-              <a:t>), </a:t>
-            </a:r>
-            <a:r>
-              <a:rPr>
-                <a:solidFill>
-                  <a:srgbClr val="AD0000"/>
-                </a:solidFill>
-                <a:latin typeface="Courier"/>
-              </a:rPr>
-              <a:t>2</a:t>
-            </a:r>
-            <a:r>
-              <a:rPr>
-                <a:solidFill>
-                  <a:srgbClr val="003B4F"/>
-                </a:solidFill>
-                <a:latin typeface="Courier"/>
-              </a:rPr>
-              <a:t>),</a:t>
-            </a:r>
-            <a:br/>
-            <a:r>
-              <a:rPr>
-                <a:solidFill>
-                  <a:srgbClr val="003B4F"/>
-                </a:solidFill>
-                <a:latin typeface="Courier"/>
-              </a:rPr>
-              <a:t>    </a:t>
-            </a:r>
-            <a:r>
-              <a:rPr>
-                <a:solidFill>
-                  <a:srgbClr val="657422"/>
-                </a:solidFill>
-                <a:latin typeface="Courier"/>
-              </a:rPr>
-              <a:t>se_wt =</a:t>
-            </a:r>
-            <a:r>
-              <a:rPr>
-                <a:solidFill>
-                  <a:srgbClr val="003B4F"/>
-                </a:solidFill>
-                <a:latin typeface="Courier"/>
-              </a:rPr>
-              <a:t> </a:t>
-            </a:r>
-            <a:r>
-              <a:rPr>
-                <a:solidFill>
-                  <a:srgbClr val="4758AB"/>
-                </a:solidFill>
-                <a:latin typeface="Courier"/>
-              </a:rPr>
-              <a:t>round</a:t>
-            </a:r>
-            <a:r>
-              <a:rPr>
-                <a:solidFill>
-                  <a:srgbClr val="003B4F"/>
-                </a:solidFill>
-                <a:latin typeface="Courier"/>
-              </a:rPr>
-              <a:t>(sd_wt </a:t>
-            </a:r>
-            <a:r>
-              <a:rPr>
-                <a:solidFill>
-                  <a:srgbClr val="5E5E5E"/>
-                </a:solidFill>
-                <a:latin typeface="Courier"/>
-              </a:rPr>
-              <a:t>/</a:t>
-            </a:r>
-            <a:r>
-              <a:rPr>
-                <a:solidFill>
-                  <a:srgbClr val="003B4F"/>
-                </a:solidFill>
-                <a:latin typeface="Courier"/>
-              </a:rPr>
-              <a:t> </a:t>
-            </a:r>
-            <a:r>
-              <a:rPr>
-                <a:solidFill>
-                  <a:srgbClr val="4758AB"/>
-                </a:solidFill>
-                <a:latin typeface="Courier"/>
-              </a:rPr>
-              <a:t>sqrt</a:t>
-            </a:r>
-            <a:r>
-              <a:rPr>
-                <a:solidFill>
-                  <a:srgbClr val="003B4F"/>
-                </a:solidFill>
-                <a:latin typeface="Courier"/>
-              </a:rPr>
-              <a:t>(n), </a:t>
-            </a:r>
-            <a:r>
-              <a:rPr>
-                <a:solidFill>
-                  <a:srgbClr val="AD0000"/>
-                </a:solidFill>
-                <a:latin typeface="Courier"/>
-              </a:rPr>
-              <a:t>2</a:t>
-            </a:r>
-            <a:r>
-              <a:rPr>
-                <a:solidFill>
-                  <a:srgbClr val="003B4F"/>
-                </a:solidFill>
-                <a:latin typeface="Courier"/>
-              </a:rPr>
-              <a:t>)</a:t>
-            </a:r>
-            <a:br/>
-            <a:r>
-              <a:rPr>
-                <a:solidFill>
-                  <a:srgbClr val="003B4F"/>
-                </a:solidFill>
-                <a:latin typeface="Courier"/>
-              </a:rPr>
-              <a:t>  )</a:t>
-            </a:r>
-            <a:br/>
-            <a:br/>
-            <a:r>
-              <a:rPr>
-                <a:solidFill>
-                  <a:srgbClr val="003B4F"/>
-                </a:solidFill>
-                <a:latin typeface="Courier"/>
-              </a:rPr>
-              <a:t>stats_df</a:t>
-            </a:r>
-          </a:p>
-          <a:p>
-            <a:pPr lvl="0" indent="0">
+              <a:rPr b="1"/>
+              <a:t>Part 1 — Tidyverse wrangling:</a:t>
+            </a:r>
+          </a:p>
+          <a:p>
+            <a:pPr lvl="0"/>
+            <a:r>
+              <a:rPr>
+                <a:latin typeface="Courier"/>
+              </a:rPr>
+              <a:t>filter()</a:t>
+            </a:r>
+            <a:r>
+              <a:rPr/>
+              <a:t> — pick rows by a condition</a:t>
+            </a:r>
+          </a:p>
+          <a:p>
+            <a:pPr lvl="0"/>
+            <a:r>
+              <a:rPr>
+                <a:latin typeface="Courier"/>
+              </a:rPr>
+              <a:t>select()</a:t>
+            </a:r>
+            <a:r>
+              <a:rPr/>
+              <a:t> — pick columns by name</a:t>
+            </a:r>
+          </a:p>
+          <a:p>
+            <a:pPr lvl="0"/>
+            <a:r>
+              <a:rPr>
+                <a:latin typeface="Courier"/>
+              </a:rPr>
+              <a:t>mutate()</a:t>
+            </a:r>
+            <a:r>
+              <a:rPr/>
+              <a:t> — create new columns</a:t>
+            </a:r>
+          </a:p>
+          <a:p>
+            <a:pPr lvl="0"/>
+            <a:r>
+              <a:rPr>
+                <a:latin typeface="Courier"/>
+              </a:rPr>
+              <a:t>arrange()</a:t>
+            </a:r>
+            <a:r>
+              <a:rPr/>
+              <a:t> — sort rows</a:t>
+            </a:r>
+          </a:p>
+          <a:p>
+            <a:pPr lvl="0"/>
+            <a:r>
+              <a:rPr/>
+              <a:t>Chain them all into a </a:t>
+            </a:r>
+            <a:r>
+              <a:rPr b="1"/>
+              <a:t>pipeline</a:t>
+            </a:r>
+          </a:p>
+          <a:p>
+            <a:pPr lvl="0" indent="0" marL="0">
               <a:buNone/>
             </a:pPr>
             <a:r>
-              <a:rPr>
-                <a:latin typeface="Courier"/>
-              </a:rPr>
-              <a:t># A tibble: 2 × 6
-  side      n mean_wt med_wt sd_wt se_wt
-  &lt;chr&gt; &lt;int&gt;   &lt;dbl&gt;  &lt;dbl&gt; &lt;dbl&gt; &lt;dbl&gt;
-1 shady    10     7.8      8  1.03  0.33
-2 sunny    10     3.8      4  0.79  0.25</a:t>
+              <a:rPr b="1"/>
+              <a:t>Part 2 — Descriptive statistics:</a:t>
+            </a:r>
+          </a:p>
+          <a:p>
+            <a:pPr lvl="0"/>
+            <a:r>
+              <a:rPr/>
+              <a:t>mean, median, variance, SD, SE</a:t>
+            </a:r>
+          </a:p>
+          <a:p>
+            <a:pPr lvl="0"/>
+            <a:r>
+              <a:rPr/>
+              <a:t>NA handling — </a:t>
+            </a:r>
+            <a:r>
+              <a:rPr>
+                <a:latin typeface="Courier"/>
+              </a:rPr>
+              <a:t>sum(!is.na())</a:t>
+            </a:r>
+          </a:p>
+          <a:p>
+            <a:pPr lvl="0"/>
+            <a:r>
+              <a:rPr>
+                <a:latin typeface="Courier"/>
+              </a:rPr>
+              <a:t>group_by()</a:t>
+            </a:r>
+            <a:r>
+              <a:rPr/>
+              <a:t> + </a:t>
+            </a:r>
+            <a:r>
+              <a:rPr>
+                <a:latin typeface="Courier"/>
+              </a:rPr>
+              <a:t>summarize()</a:t>
+            </a:r>
+          </a:p>
+          <a:p>
+            <a:pPr lvl="0"/>
+            <a:r>
+              <a:rPr>
+                <a:latin typeface="Courier"/>
+              </a:rPr>
+              <a:t>skimr</a:t>
+            </a:r>
+            <a:r>
+              <a:rPr/>
+              <a:t> for a fast full overview</a:t>
+            </a:r>
+          </a:p>
+          <a:p>
+            <a:pPr lvl="0"/>
+            <a:r>
+              <a:rPr/>
+              <a:t>Boxplot + mean ± SE plots</a:t>
+            </a:r>
+          </a:p>
+          <a:p>
+            <a:pPr lvl="0" indent="0" marL="1270000">
+              <a:buNone/>
+            </a:pPr>
+            <a:r>
+              <a:rPr sz="2000" b="1"/>
+              <a:t>Tip</a:t>
+            </a:r>
+          </a:p>
+          <a:p>
+            <a:pPr lvl="0" indent="0" marL="1270000">
+              <a:buNone/>
+            </a:pPr>
+            <a:r>
+              <a:rPr sz="2000" b="1"/>
+              <a:t>🖐 Try it yourself</a:t>
+            </a:r>
+          </a:p>
+          <a:p>
+            <a:pPr lvl="0" indent="0" marL="1270000">
+              <a:buNone/>
+            </a:pPr>
+            <a:r>
+              <a:rPr sz="2000"/>
+              <a:t>By the end you will wrangle and describe our leaf data in one connected pipeline.</a:t>
             </a:r>
           </a:p>
         </p:txBody>
@@ -12879,26 +15618,21 @@
           <a:bodyPr/>
           <a:lstStyle/>
           <a:p>
+            <a:pPr lvl="0" indent="0" marL="0">
+              <a:buNone/>
+            </a:pPr>
+            <a:r>
+              <a:rPr b="1"/>
+              <a:t>Our tools today:</a:t>
+            </a:r>
+          </a:p>
+          <a:p>
             <a:pPr lvl="0"/>
             <a:r>
               <a:rPr>
                 <a:latin typeface="Courier"/>
               </a:rPr>
-              <a:t>group_by(side)</a:t>
-            </a:r>
-            <a:r>
-              <a:rPr/>
-              <a:t> — splits the data by the </a:t>
-            </a:r>
-            <a:r>
-              <a:rPr>
-                <a:latin typeface="Courier"/>
-              </a:rPr>
-              <a:t>side</a:t>
-            </a:r>
-            <a:r>
-              <a:rPr/>
-              <a:t> column</a:t>
+              <a:t>readxl</a:t>
             </a:r>
           </a:p>
           <a:p>
@@ -12907,55 +15641,29 @@
               <a:rPr>
                 <a:latin typeface="Courier"/>
               </a:rPr>
-              <a:t>summarize()</a:t>
-            </a:r>
-            <a:r>
-              <a:rPr/>
-              <a:t> — collapses each group to one row of stats</a:t>
+              <a:t>tidyverse</a:t>
             </a:r>
           </a:p>
           <a:p>
             <a:pPr lvl="0"/>
             <a:r>
-              <a:rPr/>
-              <a:t>You get </a:t>
-            </a:r>
+              <a:rPr>
+                <a:latin typeface="Courier"/>
+              </a:rPr>
+              <a:t>skimr</a:t>
+            </a:r>
+          </a:p>
+          <a:p>
+            <a:pPr lvl="0" indent="0" marL="0">
+              <a:buNone/>
+            </a:pPr>
             <a:r>
               <a:rPr b="1"/>
-              <a:t>both groups in one clean table</a:t>
+              <a:t>References:</a:t>
             </a:r>
           </a:p>
           <a:p>
             <a:pPr lvl="0"/>
-            <a:r>
-              <a:rPr/>
-              <a:t>You can reference a column just created (</a:t>
-            </a:r>
-            <a:r>
-              <a:rPr>
-                <a:latin typeface="Courier"/>
-              </a:rPr>
-              <a:t>sd_wt</a:t>
-            </a:r>
-            <a:r>
-              <a:rPr/>
-              <a:t> → </a:t>
-            </a:r>
-            <a:r>
-              <a:rPr>
-                <a:latin typeface="Courier"/>
-              </a:rPr>
-              <a:t>se_wt</a:t>
-            </a:r>
-            <a:r>
-              <a:rPr/>
-              <a:t>)</a:t>
-            </a:r>
-          </a:p>
-          <a:p>
-            <a:pPr lvl="0" indent="0" marL="0">
-              <a:buNone/>
-            </a:pPr>
             <a:r>
               <a:rPr/>
               <a:t>📖 </a:t>
@@ -12964,14 +15672,106 @@
               <a:rPr>
                 <a:hlinkClick r:id="rId2"/>
               </a:rPr>
-              <a:t>R4DS §3.5 — </a:t>
+              <a:t>R4DS Ch 3</a:t>
+            </a:r>
+            <a:r>
+              <a:rPr/>
+              <a:t> — Data Transformation</a:t>
+            </a:r>
+          </a:p>
+          <a:p>
+            <a:pPr lvl="0"/>
+            <a:r>
+              <a:rPr/>
+              <a:t>📖 </a:t>
             </a:r>
             <a:r>
               <a:rPr>
                 <a:hlinkClick r:id="rId3"/>
-                <a:latin typeface="Courier"/>
-              </a:rPr>
-              <a:t>summarize()</a:t>
+              </a:rPr>
+              <a:t>R4DS Ch 13</a:t>
+            </a:r>
+            <a:r>
+              <a:rPr/>
+              <a:t> — Numbers</a:t>
+            </a:r>
+          </a:p>
+          <a:p>
+            <a:pPr lvl="0"/>
+            <a:r>
+              <a:rPr/>
+              <a:t>📖 </a:t>
+            </a:r>
+            <a:r>
+              <a:rPr>
+                <a:hlinkClick r:id="rId4"/>
+              </a:rPr>
+              <a:t>R4DS Ch 18</a:t>
+            </a:r>
+            <a:r>
+              <a:rPr/>
+              <a:t> — Missing Values</a:t>
+            </a:r>
+          </a:p>
+          <a:p>
+            <a:pPr lvl="0"/>
+            <a:r>
+              <a:rPr/>
+              <a:t>🌐 </a:t>
+            </a:r>
+            <a:r>
+              <a:rPr>
+                <a:hlinkClick r:id="rId5"/>
+              </a:rPr>
+              <a:t>Data Carpentry</a:t>
+            </a:r>
+          </a:p>
+          <a:p>
+            <a:pPr lvl="0" indent="0" marL="0">
+              <a:buNone/>
+            </a:pPr>
+            <a:r>
+              <a:rPr b="1"/>
+              <a:t>Naming conventions:</a:t>
+            </a:r>
+          </a:p>
+          <a:p>
+            <a:pPr lvl="0"/>
+            <a:r>
+              <a:rPr/>
+              <a:t>data frames → </a:t>
+            </a:r>
+            <a:r>
+              <a:rPr>
+                <a:latin typeface="Courier"/>
+              </a:rPr>
+              <a:t>_df</a:t>
+            </a:r>
+          </a:p>
+          <a:p>
+            <a:pPr lvl="0"/>
+            <a:r>
+              <a:rPr/>
+              <a:t>plots → </a:t>
+            </a:r>
+            <a:r>
+              <a:rPr>
+                <a:latin typeface="Courier"/>
+              </a:rPr>
+              <a:t>_plot</a:t>
+            </a:r>
+          </a:p>
+          <a:p>
+            <a:pPr lvl="0"/>
+            <a:r>
+              <a:rPr/>
+              <a:t>models → </a:t>
+            </a:r>
+            <a:r>
+              <a:rPr>
+                <a:latin typeface="Courier"/>
+              </a:rPr>
+              <a:t>_model</a:t>
             </a:r>
           </a:p>
         </p:txBody>
@@ -12981,7 +15781,1081 @@
 </p:sld>
 </file>
 
-<file path=ppt/slides/slide23.xml><?xml version="1.0" encoding="utf-8"?>
+<file path=ppt/slides/slide30.xml><?xml version="1.0" encoding="utf-8"?>
+<p:sld xmlns:a="http://schemas.openxmlformats.org/drawingml/2006/main" xmlns:r="http://schemas.openxmlformats.org/officeDocument/2006/relationships" xmlns:p="http://schemas.openxmlformats.org/presentationml/2006/main">
+  <p:cSld>
+    <p:spTree>
+      <p:nvGrpSpPr>
+        <p:cNvPr id="1" name=""/>
+        <p:cNvGrpSpPr/>
+        <p:nvPr/>
+      </p:nvGrpSpPr>
+      <p:grpSpPr>
+        <a:xfrm>
+          <a:off x="0" y="0"/>
+          <a:ext cx="0" cy="0"/>
+          <a:chOff x="0" y="0"/>
+          <a:chExt cx="0" cy="0"/>
+        </a:xfrm>
+      </p:grpSpPr>
+      <p:sp>
+        <p:nvSpPr>
+          <p:cNvPr id="2" name="Title 1"/>
+          <p:cNvSpPr>
+            <a:spLocks noGrp="1"/>
+          </p:cNvSpPr>
+          <p:nvPr>
+            <p:ph type="title"/>
+          </p:nvPr>
+        </p:nvSpPr>
+        <p:spPr>
+          <a:xfrm>
+            <a:off x="0" y="0"/>
+            <a:ext cx="9144000" cy="582780"/>
+          </a:xfrm>
+        </p:spPr>
+        <p:txBody>
+          <a:bodyPr/>
+          <a:lstStyle/>
+          <a:p>
+            <a:pPr lvl="0" indent="0" marL="0">
+              <a:buNone/>
+            </a:pPr>
+            <a:r>
+              <a:rPr/>
+              <a:t>🧩 Chunk 4 of 4 · Tidy Stats &amp; Plots</a:t>
+            </a:r>
+          </a:p>
+        </p:txBody>
+      </p:sp>
+      <p:sp>
+        <p:nvSpPr>
+          <p:cNvPr id="3" name="Content Placeholder 2"/>
+          <p:cNvSpPr>
+            <a:spLocks noGrp="1"/>
+          </p:cNvSpPr>
+          <p:nvPr>
+            <p:ph idx="1"/>
+          </p:nvPr>
+        </p:nvSpPr>
+        <p:spPr/>
+        <p:txBody>
+          <a:bodyPr/>
+          <a:lstStyle/>
+          <a:p>
+            <a:pPr lvl="0" indent="0" marL="0">
+              <a:buNone/>
+            </a:pPr>
+            <a:r>
+              <a:rPr b="1"/>
+              <a:t>We will cover:</a:t>
+            </a:r>
+            <a:r>
+              <a:rPr/>
+              <a:t> </a:t>
+            </a:r>
+            <a:r>
+              <a:rPr>
+                <a:latin typeface="Courier"/>
+              </a:rPr>
+              <a:t>group_by()</a:t>
+            </a:r>
+            <a:r>
+              <a:rPr/>
+              <a:t> + </a:t>
+            </a:r>
+            <a:r>
+              <a:rPr>
+                <a:latin typeface="Courier"/>
+              </a:rPr>
+              <a:t>summarize()</a:t>
+            </a:r>
+            <a:r>
+              <a:rPr/>
+              <a:t>, </a:t>
+            </a:r>
+            <a:r>
+              <a:rPr>
+                <a:latin typeface="Courier"/>
+              </a:rPr>
+              <a:t>skimr</a:t>
+            </a:r>
+            <a:r>
+              <a:rPr/>
+              <a:t>, and the boxplot / mean ± SE plots.</a:t>
+            </a:r>
+          </a:p>
+          <a:p>
+            <a:pPr lvl="0" indent="0" marL="1270000">
+              <a:buNone/>
+            </a:pPr>
+            <a:r>
+              <a:rPr sz="2000" b="1"/>
+              <a:t>Tip</a:t>
+            </a:r>
+          </a:p>
+          <a:p>
+            <a:pPr lvl="0" indent="0" marL="1270000">
+              <a:buNone/>
+            </a:pPr>
+            <a:r>
+              <a:rPr sz="2000" b="1"/>
+              <a:t>🖐 After this chunk: Activity Parts 6–9.</a:t>
+            </a:r>
+          </a:p>
+        </p:txBody>
+      </p:sp>
+    </p:spTree>
+  </p:cSld>
+</p:sld>
+</file>
+
+<file path=ppt/slides/slide31.xml><?xml version="1.0" encoding="utf-8"?>
+<p:sld xmlns:a="http://schemas.openxmlformats.org/drawingml/2006/main" xmlns:r="http://schemas.openxmlformats.org/officeDocument/2006/relationships" xmlns:p="http://schemas.openxmlformats.org/presentationml/2006/main">
+  <p:cSld>
+    <p:spTree>
+      <p:nvGrpSpPr>
+        <p:cNvPr id="1" name=""/>
+        <p:cNvGrpSpPr/>
+        <p:nvPr/>
+      </p:nvGrpSpPr>
+      <p:grpSpPr>
+        <a:xfrm>
+          <a:off x="0" y="0"/>
+          <a:ext cx="0" cy="0"/>
+          <a:chOff x="0" y="0"/>
+          <a:chExt cx="0" cy="0"/>
+        </a:xfrm>
+      </p:grpSpPr>
+      <p:sp>
+        <p:nvSpPr>
+          <p:cNvPr id="2" name="Title 1"/>
+          <p:cNvSpPr>
+            <a:spLocks noGrp="1"/>
+          </p:cNvSpPr>
+          <p:nvPr>
+            <p:ph type="title"/>
+          </p:nvPr>
+        </p:nvSpPr>
+        <p:spPr>
+          <a:xfrm>
+            <a:off x="0" y="0"/>
+            <a:ext cx="9144000" cy="582780"/>
+          </a:xfrm>
+        </p:spPr>
+        <p:txBody>
+          <a:bodyPr/>
+          <a:lstStyle/>
+          <a:p>
+            <a:pPr lvl="0" indent="0" marL="0">
+              <a:buNone/>
+            </a:pPr>
+            <a:r>
+              <a:rPr/>
+              <a:t>Stats the Tidy Way — </a:t>
+            </a:r>
+            <a:r>
+              <a:rPr>
+                <a:latin typeface="Courier"/>
+              </a:rPr>
+              <a:t>group_by()</a:t>
+            </a:r>
+            <a:r>
+              <a:rPr/>
+              <a:t> + </a:t>
+            </a:r>
+            <a:r>
+              <a:rPr>
+                <a:latin typeface="Courier"/>
+              </a:rPr>
+              <a:t>summarize()</a:t>
+            </a:r>
+          </a:p>
+        </p:txBody>
+      </p:sp>
+      <p:sp>
+        <p:nvSpPr>
+          <p:cNvPr id="3" name="Content Placeholder 2"/>
+          <p:cNvSpPr>
+            <a:spLocks noGrp="1"/>
+          </p:cNvSpPr>
+          <p:nvPr>
+            <p:ph idx="1"/>
+          </p:nvPr>
+        </p:nvSpPr>
+        <p:spPr/>
+        <p:txBody>
+          <a:bodyPr/>
+          <a:lstStyle/>
+          <a:p>
+            <a:pPr lvl="0" indent="0" marL="1270000">
+              <a:buNone/>
+            </a:pPr>
+            <a:r>
+              <a:rPr sz="2000" b="1"/>
+              <a:t>Note</a:t>
+            </a:r>
+          </a:p>
+          <a:p>
+            <a:pPr lvl="0" indent="0" marL="1270000">
+              <a:buNone/>
+            </a:pPr>
+            <a:r>
+              <a:rPr sz="2000" b="1"/>
+              <a:t>🔮 Predict first:</a:t>
+            </a:r>
+            <a:r>
+              <a:rPr sz="2000"/>
+              <a:t> How many </a:t>
+            </a:r>
+            <a:r>
+              <a:rPr sz="2000" b="1"/>
+              <a:t>rows</a:t>
+            </a:r>
+            <a:r>
+              <a:rPr sz="2000"/>
+              <a:t> will </a:t>
+            </a:r>
+            <a:r>
+              <a:rPr sz="2000">
+                <a:latin typeface="Courier"/>
+              </a:rPr>
+              <a:t>stats_df</a:t>
+            </a:r>
+            <a:r>
+              <a:rPr sz="2000"/>
+              <a:t> have? (Hint: how many values does </a:t>
+            </a:r>
+            <a:r>
+              <a:rPr sz="2000">
+                <a:latin typeface="Courier"/>
+              </a:rPr>
+              <a:t>side</a:t>
+            </a:r>
+            <a:r>
+              <a:rPr sz="2000"/>
+              <a:t> take?) Predict the number before you run it.</a:t>
+            </a:r>
+          </a:p>
+        </p:txBody>
+      </p:sp>
+    </p:spTree>
+  </p:cSld>
+</p:sld>
+</file>
+
+<file path=ppt/slides/slide32.xml><?xml version="1.0" encoding="utf-8"?>
+<p:sld xmlns:a="http://schemas.openxmlformats.org/drawingml/2006/main" xmlns:r="http://schemas.openxmlformats.org/officeDocument/2006/relationships" xmlns:p="http://schemas.openxmlformats.org/presentationml/2006/main">
+  <p:cSld>
+    <p:spTree>
+      <p:nvGrpSpPr>
+        <p:cNvPr id="1" name=""/>
+        <p:cNvGrpSpPr/>
+        <p:nvPr/>
+      </p:nvGrpSpPr>
+      <p:grpSpPr>
+        <a:xfrm>
+          <a:off x="0" y="0"/>
+          <a:ext cx="0" cy="0"/>
+          <a:chOff x="0" y="0"/>
+          <a:chExt cx="0" cy="0"/>
+        </a:xfrm>
+      </p:grpSpPr>
+      <p:sp>
+        <p:nvSpPr>
+          <p:cNvPr id="3" name="Content Placeholder 2"/>
+          <p:cNvSpPr>
+            <a:spLocks noGrp="1"/>
+          </p:cNvSpPr>
+          <p:nvPr>
+            <p:ph idx="1" sz="half"/>
+          </p:nvPr>
+        </p:nvSpPr>
+        <p:spPr/>
+        <p:txBody>
+          <a:bodyPr/>
+          <a:lstStyle/>
+          <a:p>
+            <a:pPr lvl="0" indent="0">
+              <a:buNone/>
+            </a:pPr>
+            <a:r>
+              <a:rPr>
+                <a:solidFill>
+                  <a:srgbClr val="5E5E5E"/>
+                </a:solidFill>
+                <a:latin typeface="Courier"/>
+              </a:rPr>
+              <a:t># Calculate all stats for both sides at once ----------</a:t>
+            </a:r>
+            <a:br/>
+            <a:r>
+              <a:rPr>
+                <a:solidFill>
+                  <a:srgbClr val="003B4F"/>
+                </a:solidFill>
+                <a:latin typeface="Courier"/>
+              </a:rPr>
+              <a:t>stats_df &lt;- tree_df </a:t>
+            </a:r>
+            <a:r>
+              <a:rPr>
+                <a:solidFill>
+                  <a:srgbClr val="5E5E5E"/>
+                </a:solidFill>
+                <a:latin typeface="Courier"/>
+              </a:rPr>
+              <a:t>%&gt;%</a:t>
+            </a:r>
+            <a:br/>
+            <a:r>
+              <a:rPr>
+                <a:solidFill>
+                  <a:srgbClr val="003B4F"/>
+                </a:solidFill>
+                <a:latin typeface="Courier"/>
+              </a:rPr>
+              <a:t>  </a:t>
+            </a:r>
+            <a:r>
+              <a:rPr>
+                <a:solidFill>
+                  <a:srgbClr val="4758AB"/>
+                </a:solidFill>
+                <a:latin typeface="Courier"/>
+              </a:rPr>
+              <a:t>group_by</a:t>
+            </a:r>
+            <a:r>
+              <a:rPr>
+                <a:solidFill>
+                  <a:srgbClr val="003B4F"/>
+                </a:solidFill>
+                <a:latin typeface="Courier"/>
+              </a:rPr>
+              <a:t>(side) </a:t>
+            </a:r>
+            <a:r>
+              <a:rPr>
+                <a:solidFill>
+                  <a:srgbClr val="5E5E5E"/>
+                </a:solidFill>
+                <a:latin typeface="Courier"/>
+              </a:rPr>
+              <a:t>%&gt;%</a:t>
+            </a:r>
+            <a:br/>
+            <a:r>
+              <a:rPr>
+                <a:solidFill>
+                  <a:srgbClr val="003B4F"/>
+                </a:solidFill>
+                <a:latin typeface="Courier"/>
+              </a:rPr>
+              <a:t>  </a:t>
+            </a:r>
+            <a:r>
+              <a:rPr>
+                <a:solidFill>
+                  <a:srgbClr val="4758AB"/>
+                </a:solidFill>
+                <a:latin typeface="Courier"/>
+              </a:rPr>
+              <a:t>summarize</a:t>
+            </a:r>
+            <a:r>
+              <a:rPr>
+                <a:solidFill>
+                  <a:srgbClr val="003B4F"/>
+                </a:solidFill>
+                <a:latin typeface="Courier"/>
+              </a:rPr>
+              <a:t>(</a:t>
+            </a:r>
+            <a:br/>
+            <a:r>
+              <a:rPr>
+                <a:solidFill>
+                  <a:srgbClr val="003B4F"/>
+                </a:solidFill>
+                <a:latin typeface="Courier"/>
+              </a:rPr>
+              <a:t>    </a:t>
+            </a:r>
+            <a:r>
+              <a:rPr>
+                <a:solidFill>
+                  <a:srgbClr val="657422"/>
+                </a:solidFill>
+                <a:latin typeface="Courier"/>
+              </a:rPr>
+              <a:t>n =</a:t>
+            </a:r>
+            <a:r>
+              <a:rPr>
+                <a:solidFill>
+                  <a:srgbClr val="003B4F"/>
+                </a:solidFill>
+                <a:latin typeface="Courier"/>
+              </a:rPr>
+              <a:t> </a:t>
+            </a:r>
+            <a:r>
+              <a:rPr>
+                <a:solidFill>
+                  <a:srgbClr val="4758AB"/>
+                </a:solidFill>
+                <a:latin typeface="Courier"/>
+              </a:rPr>
+              <a:t>sum</a:t>
+            </a:r>
+            <a:r>
+              <a:rPr>
+                <a:solidFill>
+                  <a:srgbClr val="003B4F"/>
+                </a:solidFill>
+                <a:latin typeface="Courier"/>
+              </a:rPr>
+              <a:t>(</a:t>
+            </a:r>
+            <a:r>
+              <a:rPr>
+                <a:solidFill>
+                  <a:srgbClr val="5E5E5E"/>
+                </a:solidFill>
+                <a:latin typeface="Courier"/>
+              </a:rPr>
+              <a:t>!</a:t>
+            </a:r>
+            <a:r>
+              <a:rPr>
+                <a:solidFill>
+                  <a:srgbClr val="4758AB"/>
+                </a:solidFill>
+                <a:latin typeface="Courier"/>
+              </a:rPr>
+              <a:t>is.na</a:t>
+            </a:r>
+            <a:r>
+              <a:rPr>
+                <a:solidFill>
+                  <a:srgbClr val="003B4F"/>
+                </a:solidFill>
+                <a:latin typeface="Courier"/>
+              </a:rPr>
+              <a:t>(weight_g)),</a:t>
+            </a:r>
+            <a:br/>
+            <a:r>
+              <a:rPr>
+                <a:solidFill>
+                  <a:srgbClr val="003B4F"/>
+                </a:solidFill>
+                <a:latin typeface="Courier"/>
+              </a:rPr>
+              <a:t>    </a:t>
+            </a:r>
+            <a:r>
+              <a:rPr>
+                <a:solidFill>
+                  <a:srgbClr val="657422"/>
+                </a:solidFill>
+                <a:latin typeface="Courier"/>
+              </a:rPr>
+              <a:t>mean_wt =</a:t>
+            </a:r>
+            <a:r>
+              <a:rPr>
+                <a:solidFill>
+                  <a:srgbClr val="003B4F"/>
+                </a:solidFill>
+                <a:latin typeface="Courier"/>
+              </a:rPr>
+              <a:t> </a:t>
+            </a:r>
+            <a:r>
+              <a:rPr>
+                <a:solidFill>
+                  <a:srgbClr val="4758AB"/>
+                </a:solidFill>
+                <a:latin typeface="Courier"/>
+              </a:rPr>
+              <a:t>round</a:t>
+            </a:r>
+            <a:r>
+              <a:rPr>
+                <a:solidFill>
+                  <a:srgbClr val="003B4F"/>
+                </a:solidFill>
+                <a:latin typeface="Courier"/>
+              </a:rPr>
+              <a:t>(</a:t>
+            </a:r>
+            <a:r>
+              <a:rPr>
+                <a:solidFill>
+                  <a:srgbClr val="4758AB"/>
+                </a:solidFill>
+                <a:latin typeface="Courier"/>
+              </a:rPr>
+              <a:t>mean</a:t>
+            </a:r>
+            <a:r>
+              <a:rPr>
+                <a:solidFill>
+                  <a:srgbClr val="003B4F"/>
+                </a:solidFill>
+                <a:latin typeface="Courier"/>
+              </a:rPr>
+              <a:t>(weight_g, </a:t>
+            </a:r>
+            <a:r>
+              <a:rPr>
+                <a:solidFill>
+                  <a:srgbClr val="657422"/>
+                </a:solidFill>
+                <a:latin typeface="Courier"/>
+              </a:rPr>
+              <a:t>na.rm =</a:t>
+            </a:r>
+            <a:r>
+              <a:rPr>
+                <a:solidFill>
+                  <a:srgbClr val="003B4F"/>
+                </a:solidFill>
+                <a:latin typeface="Courier"/>
+              </a:rPr>
+              <a:t> </a:t>
+            </a:r>
+            <a:r>
+              <a:rPr>
+                <a:solidFill>
+                  <a:srgbClr val="8F5902"/>
+                </a:solidFill>
+                <a:latin typeface="Courier"/>
+              </a:rPr>
+              <a:t>TRUE</a:t>
+            </a:r>
+            <a:r>
+              <a:rPr>
+                <a:solidFill>
+                  <a:srgbClr val="003B4F"/>
+                </a:solidFill>
+                <a:latin typeface="Courier"/>
+              </a:rPr>
+              <a:t>), </a:t>
+            </a:r>
+            <a:r>
+              <a:rPr>
+                <a:solidFill>
+                  <a:srgbClr val="AD0000"/>
+                </a:solidFill>
+                <a:latin typeface="Courier"/>
+              </a:rPr>
+              <a:t>2</a:t>
+            </a:r>
+            <a:r>
+              <a:rPr>
+                <a:solidFill>
+                  <a:srgbClr val="003B4F"/>
+                </a:solidFill>
+                <a:latin typeface="Courier"/>
+              </a:rPr>
+              <a:t>),</a:t>
+            </a:r>
+            <a:br/>
+            <a:r>
+              <a:rPr>
+                <a:solidFill>
+                  <a:srgbClr val="003B4F"/>
+                </a:solidFill>
+                <a:latin typeface="Courier"/>
+              </a:rPr>
+              <a:t>    </a:t>
+            </a:r>
+            <a:r>
+              <a:rPr>
+                <a:solidFill>
+                  <a:srgbClr val="657422"/>
+                </a:solidFill>
+                <a:latin typeface="Courier"/>
+              </a:rPr>
+              <a:t>med_wt =</a:t>
+            </a:r>
+            <a:r>
+              <a:rPr>
+                <a:solidFill>
+                  <a:srgbClr val="003B4F"/>
+                </a:solidFill>
+                <a:latin typeface="Courier"/>
+              </a:rPr>
+              <a:t> </a:t>
+            </a:r>
+            <a:r>
+              <a:rPr>
+                <a:solidFill>
+                  <a:srgbClr val="4758AB"/>
+                </a:solidFill>
+                <a:latin typeface="Courier"/>
+              </a:rPr>
+              <a:t>round</a:t>
+            </a:r>
+            <a:r>
+              <a:rPr>
+                <a:solidFill>
+                  <a:srgbClr val="003B4F"/>
+                </a:solidFill>
+                <a:latin typeface="Courier"/>
+              </a:rPr>
+              <a:t>(</a:t>
+            </a:r>
+            <a:r>
+              <a:rPr>
+                <a:solidFill>
+                  <a:srgbClr val="4758AB"/>
+                </a:solidFill>
+                <a:latin typeface="Courier"/>
+              </a:rPr>
+              <a:t>median</a:t>
+            </a:r>
+            <a:r>
+              <a:rPr>
+                <a:solidFill>
+                  <a:srgbClr val="003B4F"/>
+                </a:solidFill>
+                <a:latin typeface="Courier"/>
+              </a:rPr>
+              <a:t>(weight_g, </a:t>
+            </a:r>
+            <a:r>
+              <a:rPr>
+                <a:solidFill>
+                  <a:srgbClr val="657422"/>
+                </a:solidFill>
+                <a:latin typeface="Courier"/>
+              </a:rPr>
+              <a:t>na.rm =</a:t>
+            </a:r>
+            <a:r>
+              <a:rPr>
+                <a:solidFill>
+                  <a:srgbClr val="003B4F"/>
+                </a:solidFill>
+                <a:latin typeface="Courier"/>
+              </a:rPr>
+              <a:t> </a:t>
+            </a:r>
+            <a:r>
+              <a:rPr>
+                <a:solidFill>
+                  <a:srgbClr val="8F5902"/>
+                </a:solidFill>
+                <a:latin typeface="Courier"/>
+              </a:rPr>
+              <a:t>TRUE</a:t>
+            </a:r>
+            <a:r>
+              <a:rPr>
+                <a:solidFill>
+                  <a:srgbClr val="003B4F"/>
+                </a:solidFill>
+                <a:latin typeface="Courier"/>
+              </a:rPr>
+              <a:t>), </a:t>
+            </a:r>
+            <a:r>
+              <a:rPr>
+                <a:solidFill>
+                  <a:srgbClr val="AD0000"/>
+                </a:solidFill>
+                <a:latin typeface="Courier"/>
+              </a:rPr>
+              <a:t>2</a:t>
+            </a:r>
+            <a:r>
+              <a:rPr>
+                <a:solidFill>
+                  <a:srgbClr val="003B4F"/>
+                </a:solidFill>
+                <a:latin typeface="Courier"/>
+              </a:rPr>
+              <a:t>),</a:t>
+            </a:r>
+            <a:br/>
+            <a:r>
+              <a:rPr>
+                <a:solidFill>
+                  <a:srgbClr val="003B4F"/>
+                </a:solidFill>
+                <a:latin typeface="Courier"/>
+              </a:rPr>
+              <a:t>    </a:t>
+            </a:r>
+            <a:r>
+              <a:rPr>
+                <a:solidFill>
+                  <a:srgbClr val="657422"/>
+                </a:solidFill>
+                <a:latin typeface="Courier"/>
+              </a:rPr>
+              <a:t>sd_wt =</a:t>
+            </a:r>
+            <a:r>
+              <a:rPr>
+                <a:solidFill>
+                  <a:srgbClr val="003B4F"/>
+                </a:solidFill>
+                <a:latin typeface="Courier"/>
+              </a:rPr>
+              <a:t> </a:t>
+            </a:r>
+            <a:r>
+              <a:rPr>
+                <a:solidFill>
+                  <a:srgbClr val="4758AB"/>
+                </a:solidFill>
+                <a:latin typeface="Courier"/>
+              </a:rPr>
+              <a:t>round</a:t>
+            </a:r>
+            <a:r>
+              <a:rPr>
+                <a:solidFill>
+                  <a:srgbClr val="003B4F"/>
+                </a:solidFill>
+                <a:latin typeface="Courier"/>
+              </a:rPr>
+              <a:t>(</a:t>
+            </a:r>
+            <a:r>
+              <a:rPr>
+                <a:solidFill>
+                  <a:srgbClr val="4758AB"/>
+                </a:solidFill>
+                <a:latin typeface="Courier"/>
+              </a:rPr>
+              <a:t>sd</a:t>
+            </a:r>
+            <a:r>
+              <a:rPr>
+                <a:solidFill>
+                  <a:srgbClr val="003B4F"/>
+                </a:solidFill>
+                <a:latin typeface="Courier"/>
+              </a:rPr>
+              <a:t>(weight_g, </a:t>
+            </a:r>
+            <a:r>
+              <a:rPr>
+                <a:solidFill>
+                  <a:srgbClr val="657422"/>
+                </a:solidFill>
+                <a:latin typeface="Courier"/>
+              </a:rPr>
+              <a:t>na.rm =</a:t>
+            </a:r>
+            <a:r>
+              <a:rPr>
+                <a:solidFill>
+                  <a:srgbClr val="003B4F"/>
+                </a:solidFill>
+                <a:latin typeface="Courier"/>
+              </a:rPr>
+              <a:t> </a:t>
+            </a:r>
+            <a:r>
+              <a:rPr>
+                <a:solidFill>
+                  <a:srgbClr val="8F5902"/>
+                </a:solidFill>
+                <a:latin typeface="Courier"/>
+              </a:rPr>
+              <a:t>TRUE</a:t>
+            </a:r>
+            <a:r>
+              <a:rPr>
+                <a:solidFill>
+                  <a:srgbClr val="003B4F"/>
+                </a:solidFill>
+                <a:latin typeface="Courier"/>
+              </a:rPr>
+              <a:t>), </a:t>
+            </a:r>
+            <a:r>
+              <a:rPr>
+                <a:solidFill>
+                  <a:srgbClr val="AD0000"/>
+                </a:solidFill>
+                <a:latin typeface="Courier"/>
+              </a:rPr>
+              <a:t>2</a:t>
+            </a:r>
+            <a:r>
+              <a:rPr>
+                <a:solidFill>
+                  <a:srgbClr val="003B4F"/>
+                </a:solidFill>
+                <a:latin typeface="Courier"/>
+              </a:rPr>
+              <a:t>),</a:t>
+            </a:r>
+            <a:br/>
+            <a:r>
+              <a:rPr>
+                <a:solidFill>
+                  <a:srgbClr val="003B4F"/>
+                </a:solidFill>
+                <a:latin typeface="Courier"/>
+              </a:rPr>
+              <a:t>    </a:t>
+            </a:r>
+            <a:r>
+              <a:rPr>
+                <a:solidFill>
+                  <a:srgbClr val="657422"/>
+                </a:solidFill>
+                <a:latin typeface="Courier"/>
+              </a:rPr>
+              <a:t>se_wt =</a:t>
+            </a:r>
+            <a:r>
+              <a:rPr>
+                <a:solidFill>
+                  <a:srgbClr val="003B4F"/>
+                </a:solidFill>
+                <a:latin typeface="Courier"/>
+              </a:rPr>
+              <a:t> </a:t>
+            </a:r>
+            <a:r>
+              <a:rPr>
+                <a:solidFill>
+                  <a:srgbClr val="4758AB"/>
+                </a:solidFill>
+                <a:latin typeface="Courier"/>
+              </a:rPr>
+              <a:t>round</a:t>
+            </a:r>
+            <a:r>
+              <a:rPr>
+                <a:solidFill>
+                  <a:srgbClr val="003B4F"/>
+                </a:solidFill>
+                <a:latin typeface="Courier"/>
+              </a:rPr>
+              <a:t>(sd_wt </a:t>
+            </a:r>
+            <a:r>
+              <a:rPr>
+                <a:solidFill>
+                  <a:srgbClr val="5E5E5E"/>
+                </a:solidFill>
+                <a:latin typeface="Courier"/>
+              </a:rPr>
+              <a:t>/</a:t>
+            </a:r>
+            <a:r>
+              <a:rPr>
+                <a:solidFill>
+                  <a:srgbClr val="003B4F"/>
+                </a:solidFill>
+                <a:latin typeface="Courier"/>
+              </a:rPr>
+              <a:t> </a:t>
+            </a:r>
+            <a:r>
+              <a:rPr>
+                <a:solidFill>
+                  <a:srgbClr val="4758AB"/>
+                </a:solidFill>
+                <a:latin typeface="Courier"/>
+              </a:rPr>
+              <a:t>sqrt</a:t>
+            </a:r>
+            <a:r>
+              <a:rPr>
+                <a:solidFill>
+                  <a:srgbClr val="003B4F"/>
+                </a:solidFill>
+                <a:latin typeface="Courier"/>
+              </a:rPr>
+              <a:t>(n), </a:t>
+            </a:r>
+            <a:r>
+              <a:rPr>
+                <a:solidFill>
+                  <a:srgbClr val="AD0000"/>
+                </a:solidFill>
+                <a:latin typeface="Courier"/>
+              </a:rPr>
+              <a:t>2</a:t>
+            </a:r>
+            <a:r>
+              <a:rPr>
+                <a:solidFill>
+                  <a:srgbClr val="003B4F"/>
+                </a:solidFill>
+                <a:latin typeface="Courier"/>
+              </a:rPr>
+              <a:t>)</a:t>
+            </a:r>
+            <a:br/>
+            <a:r>
+              <a:rPr>
+                <a:solidFill>
+                  <a:srgbClr val="003B4F"/>
+                </a:solidFill>
+                <a:latin typeface="Courier"/>
+              </a:rPr>
+              <a:t>  )</a:t>
+            </a:r>
+            <a:br/>
+            <a:br/>
+            <a:r>
+              <a:rPr>
+                <a:solidFill>
+                  <a:srgbClr val="003B4F"/>
+                </a:solidFill>
+                <a:latin typeface="Courier"/>
+              </a:rPr>
+              <a:t>stats_df</a:t>
+            </a:r>
+          </a:p>
+          <a:p>
+            <a:pPr lvl="0" indent="0">
+              <a:buNone/>
+            </a:pPr>
+            <a:r>
+              <a:rPr>
+                <a:latin typeface="Courier"/>
+              </a:rPr>
+              <a:t># A tibble: 2 × 6
+  side      n mean_wt med_wt sd_wt se_wt
+  &lt;chr&gt; &lt;int&gt;   &lt;dbl&gt;  &lt;dbl&gt; &lt;dbl&gt; &lt;dbl&gt;
+1 shady    10     7.8      8  1.03  0.33
+2 sunny    10     3.8      4  0.79  0.25</a:t>
+            </a:r>
+          </a:p>
+        </p:txBody>
+      </p:sp>
+      <p:sp>
+        <p:nvSpPr>
+          <p:cNvPr id="4" name="Content Placeholder 3"/>
+          <p:cNvSpPr>
+            <a:spLocks noGrp="1"/>
+          </p:cNvSpPr>
+          <p:nvPr>
+            <p:ph idx="2" sz="half"/>
+          </p:nvPr>
+        </p:nvSpPr>
+        <p:spPr/>
+        <p:txBody>
+          <a:bodyPr/>
+          <a:lstStyle/>
+          <a:p>
+            <a:pPr lvl="0"/>
+            <a:r>
+              <a:rPr>
+                <a:latin typeface="Courier"/>
+              </a:rPr>
+              <a:t>group_by(side)</a:t>
+            </a:r>
+            <a:r>
+              <a:rPr/>
+              <a:t> — splits the data by the </a:t>
+            </a:r>
+            <a:r>
+              <a:rPr>
+                <a:latin typeface="Courier"/>
+              </a:rPr>
+              <a:t>side</a:t>
+            </a:r>
+            <a:r>
+              <a:rPr/>
+              <a:t> column</a:t>
+            </a:r>
+          </a:p>
+          <a:p>
+            <a:pPr lvl="0"/>
+            <a:r>
+              <a:rPr>
+                <a:latin typeface="Courier"/>
+              </a:rPr>
+              <a:t>summarize()</a:t>
+            </a:r>
+            <a:r>
+              <a:rPr/>
+              <a:t> — collapses each group to one row of stats</a:t>
+            </a:r>
+          </a:p>
+          <a:p>
+            <a:pPr lvl="0"/>
+            <a:r>
+              <a:rPr/>
+              <a:t>You get </a:t>
+            </a:r>
+            <a:r>
+              <a:rPr b="1"/>
+              <a:t>both groups in one clean table</a:t>
+            </a:r>
+          </a:p>
+          <a:p>
+            <a:pPr lvl="0"/>
+            <a:r>
+              <a:rPr/>
+              <a:t>You can reference a column just created (</a:t>
+            </a:r>
+            <a:r>
+              <a:rPr>
+                <a:latin typeface="Courier"/>
+              </a:rPr>
+              <a:t>sd_wt</a:t>
+            </a:r>
+            <a:r>
+              <a:rPr/>
+              <a:t> → </a:t>
+            </a:r>
+            <a:r>
+              <a:rPr>
+                <a:latin typeface="Courier"/>
+              </a:rPr>
+              <a:t>se_wt</a:t>
+            </a:r>
+            <a:r>
+              <a:rPr/>
+              <a:t>)</a:t>
+            </a:r>
+          </a:p>
+          <a:p>
+            <a:pPr lvl="0" indent="0" marL="0">
+              <a:buNone/>
+            </a:pPr>
+            <a:r>
+              <a:rPr/>
+              <a:t>📖 </a:t>
+            </a:r>
+            <a:r>
+              <a:rPr>
+                <a:hlinkClick r:id="rId2"/>
+              </a:rPr>
+              <a:t>R4DS §3.5 — </a:t>
+            </a:r>
+            <a:r>
+              <a:rPr>
+                <a:hlinkClick r:id="rId3"/>
+                <a:latin typeface="Courier"/>
+              </a:rPr>
+              <a:t>summarize()</a:t>
+            </a:r>
+          </a:p>
+        </p:txBody>
+      </p:sp>
+    </p:spTree>
+  </p:cSld>
+</p:sld>
+</file>
+
+<file path=ppt/slides/slide33.xml><?xml version="1.0" encoding="utf-8"?>
 <p:sld xmlns:a="http://schemas.openxmlformats.org/drawingml/2006/main" xmlns:r="http://schemas.openxmlformats.org/officeDocument/2006/relationships" xmlns:p="http://schemas.openxmlformats.org/presentationml/2006/main">
   <p:cSld>
     <p:spTree>
@@ -13708,7 +17582,7 @@
 </p:sld>
 </file>
 
-<file path=ppt/slides/slide24.xml><?xml version="1.0" encoding="utf-8"?>
+<file path=ppt/slides/slide34.xml><?xml version="1.0" encoding="utf-8"?>
 <p:sld xmlns:a="http://schemas.openxmlformats.org/drawingml/2006/main" xmlns:r="http://schemas.openxmlformats.org/officeDocument/2006/relationships" xmlns:p="http://schemas.openxmlformats.org/presentationml/2006/main">
   <p:cSld>
     <p:spTree>
@@ -14178,7 +18052,7 @@
 </p:sld>
 </file>
 
-<file path=ppt/slides/slide25.xml><?xml version="1.0" encoding="utf-8"?>
+<file path=ppt/slides/slide35.xml><?xml version="1.0" encoding="utf-8"?>
 <p:sld xmlns:a="http://schemas.openxmlformats.org/drawingml/2006/main" xmlns:r="http://schemas.openxmlformats.org/officeDocument/2006/relationships" xmlns:p="http://schemas.openxmlformats.org/presentationml/2006/main">
   <p:cSld>
     <p:spTree>
@@ -15913,7 +19787,7 @@
 </p:sld>
 </file>
 
-<file path=ppt/slides/slide26.xml><?xml version="1.0" encoding="utf-8"?>
+<file path=ppt/slides/slide36.xml><?xml version="1.0" encoding="utf-8"?>
 <p:sld xmlns:a="http://schemas.openxmlformats.org/drawingml/2006/main" xmlns:r="http://schemas.openxmlformats.org/officeDocument/2006/relationships" xmlns:p="http://schemas.openxmlformats.org/presentationml/2006/main">
   <p:cSld>
     <p:spTree>
@@ -16068,7 +19942,7 @@
 </p:sld>
 </file>
 
-<file path=ppt/slides/slide27.xml><?xml version="1.0" encoding="utf-8"?>
+<file path=ppt/slides/slide37.xml><?xml version="1.0" encoding="utf-8"?>
 <p:sld xmlns:a="http://schemas.openxmlformats.org/drawingml/2006/main" xmlns:r="http://schemas.openxmlformats.org/officeDocument/2006/relationships" xmlns:p="http://schemas.openxmlformats.org/presentationml/2006/main">
   <p:cSld>
     <p:spTree>
@@ -16872,7 +20746,7 @@
 </p:sld>
 </file>
 
-<file path=ppt/slides/slide28.xml><?xml version="1.0" encoding="utf-8"?>
+<file path=ppt/slides/slide38.xml><?xml version="1.0" encoding="utf-8"?>
 <p:sld xmlns:a="http://schemas.openxmlformats.org/drawingml/2006/main" xmlns:r="http://schemas.openxmlformats.org/officeDocument/2006/relationships" xmlns:p="http://schemas.openxmlformats.org/presentationml/2006/main">
   <p:cSld>
     <p:spTree>
@@ -17898,7 +21772,7 @@
 </p:sld>
 </file>
 
-<file path=ppt/slides/slide29.xml><?xml version="1.0" encoding="utf-8"?>
+<file path=ppt/slides/slide39.xml><?xml version="1.0" encoding="utf-8"?>
 <p:sld xmlns:a="http://schemas.openxmlformats.org/drawingml/2006/main" xmlns:r="http://schemas.openxmlformats.org/officeDocument/2006/relationships" xmlns:p="http://schemas.openxmlformats.org/presentationml/2006/main">
   <p:cSld>
     <p:spTree>
@@ -19285,7 +23159,7 @@
 </p:sld>
 </file>
 
-<file path=ppt/slides/slide3.xml><?xml version="1.0" encoding="utf-8"?>
+<file path=ppt/slides/slide4.xml><?xml version="1.0" encoding="utf-8"?>
 <p:sld xmlns:a="http://schemas.openxmlformats.org/drawingml/2006/main" xmlns:r="http://schemas.openxmlformats.org/officeDocument/2006/relationships" xmlns:p="http://schemas.openxmlformats.org/presentationml/2006/main">
   <p:cSld>
     <p:spTree>
@@ -19330,7 +23204,7 @@
             </a:pPr>
             <a:r>
               <a:rPr/>
-              <a:t>Goals for Today</a:t>
+              <a:t>How to Use These Slides — Predict · Type · Run</a:t>
             </a:r>
           </a:p>
         </p:txBody>
@@ -19354,166 +23228,72 @@
               <a:buNone/>
             </a:pPr>
             <a:r>
+              <a:rPr/>
+              <a:t>This lecture runs in </a:t>
+            </a:r>
+            <a:r>
               <a:rPr b="1"/>
-              <a:t>Part 1 — Tidyverse wrangling:</a:t>
-            </a:r>
-          </a:p>
-          <a:p>
-            <a:pPr lvl="0"/>
-            <a:r>
-              <a:rPr>
-                <a:latin typeface="Courier"/>
-              </a:rPr>
-              <a:t>filter()</a:t>
+              <a:t>four short chunks</a:t>
             </a:r>
             <a:r>
               <a:rPr/>
-              <a:t> — pick rows by a condition</a:t>
-            </a:r>
-          </a:p>
-          <a:p>
-            <a:pPr lvl="0"/>
-            <a:r>
-              <a:rPr>
-                <a:latin typeface="Courier"/>
-              </a:rPr>
-              <a:t>select()</a:t>
+              <a:t>. After each chunk you switch to the </a:t>
+            </a:r>
+            <a:r>
+              <a:rPr b="1"/>
+              <a:t>activity worksheet</a:t>
             </a:r>
             <a:r>
               <a:rPr/>
-              <a:t> — pick columns by name</a:t>
-            </a:r>
-          </a:p>
-          <a:p>
-            <a:pPr lvl="0"/>
-            <a:r>
-              <a:rPr>
-                <a:latin typeface="Courier"/>
-              </a:rPr>
-              <a:t>mutate()</a:t>
+              <a:t> and type the code yourself.</a:t>
+            </a:r>
+          </a:p>
+          <a:p>
+            <a:pPr lvl="0" indent="0" marL="0">
+              <a:buNone/>
+            </a:pPr>
+            <a:r>
+              <a:rPr b="1"/>
+              <a:t>For every code block, do three things:</a:t>
+            </a:r>
+          </a:p>
+          <a:p>
+            <a:pPr lvl="0" indent="-342900" marL="342900">
+              <a:buAutoNum type="arabicPeriod"/>
+            </a:pPr>
+            <a:r>
+              <a:rPr b="1"/>
+              <a:t>Predict</a:t>
             </a:r>
             <a:r>
               <a:rPr/>
-              <a:t> — create new columns</a:t>
-            </a:r>
-          </a:p>
-          <a:p>
-            <a:pPr lvl="0"/>
-            <a:r>
-              <a:rPr>
-                <a:latin typeface="Courier"/>
-              </a:rPr>
-              <a:t>arrange()</a:t>
+              <a:t> — before it runs, say what you think the output will be</a:t>
+            </a:r>
+          </a:p>
+          <a:p>
+            <a:pPr lvl="0" indent="-342900" marL="342900">
+              <a:buAutoNum type="arabicPeriod"/>
+            </a:pPr>
+            <a:r>
+              <a:rPr b="1"/>
+              <a:t>Type</a:t>
             </a:r>
             <a:r>
               <a:rPr/>
-              <a:t> — sort rows</a:t>
-            </a:r>
-          </a:p>
-          <a:p>
-            <a:pPr lvl="0"/>
+              <a:t> it out by hand — do not copy-paste</a:t>
+            </a:r>
+          </a:p>
+          <a:p>
+            <a:pPr lvl="0" indent="-342900" marL="342900">
+              <a:buAutoNum type="arabicPeriod"/>
+            </a:pPr>
+            <a:r>
+              <a:rPr b="1"/>
+              <a:t>Run</a:t>
+            </a:r>
             <a:r>
               <a:rPr/>
-              <a:t>Chain them all into a </a:t>
-            </a:r>
-            <a:r>
-              <a:rPr b="1"/>
-              <a:t>pipeline</a:t>
-            </a:r>
-          </a:p>
-          <a:p>
-            <a:pPr lvl="0" indent="0" marL="0">
-              <a:buNone/>
-            </a:pPr>
-            <a:r>
-              <a:rPr b="1"/>
-              <a:t>Part 2 — Descriptive statistics:</a:t>
-            </a:r>
-          </a:p>
-          <a:p>
-            <a:pPr lvl="0"/>
-            <a:r>
-              <a:rPr/>
-              <a:t>mean, median, variance, SD, SE</a:t>
-            </a:r>
-          </a:p>
-          <a:p>
-            <a:pPr lvl="0"/>
-            <a:r>
-              <a:rPr/>
-              <a:t>NA handling — </a:t>
-            </a:r>
-            <a:r>
-              <a:rPr>
-                <a:latin typeface="Courier"/>
-              </a:rPr>
-              <a:t>sum(!is.na())</a:t>
-            </a:r>
-          </a:p>
-          <a:p>
-            <a:pPr lvl="0"/>
-            <a:r>
-              <a:rPr>
-                <a:latin typeface="Courier"/>
-              </a:rPr>
-              <a:t>group_by()</a:t>
-            </a:r>
-            <a:r>
-              <a:rPr/>
-              <a:t> + </a:t>
-            </a:r>
-            <a:r>
-              <a:rPr>
-                <a:latin typeface="Courier"/>
-              </a:rPr>
-              <a:t>summarize()</a:t>
-            </a:r>
-          </a:p>
-          <a:p>
-            <a:pPr lvl="0"/>
-            <a:r>
-              <a:rPr>
-                <a:latin typeface="Courier"/>
-              </a:rPr>
-              <a:t>skimr</a:t>
-            </a:r>
-            <a:r>
-              <a:rPr/>
-              <a:t> for a fast full overview</a:t>
-            </a:r>
-          </a:p>
-          <a:p>
-            <a:pPr lvl="0"/>
-            <a:r>
-              <a:rPr/>
-              <a:t>Boxplot + mean ± SE plots</a:t>
-            </a:r>
-          </a:p>
-          <a:p>
-            <a:pPr lvl="0" indent="0" marL="1270000">
-              <a:buNone/>
-            </a:pPr>
-            <a:r>
-              <a:rPr sz="2000" b="1"/>
-              <a:t>Tip</a:t>
-            </a:r>
-          </a:p>
-          <a:p>
-            <a:pPr lvl="0" indent="0" marL="1270000">
-              <a:buNone/>
-            </a:pPr>
-            <a:r>
-              <a:rPr sz="2000" b="1"/>
-              <a:t>🖐 Try it yourself</a:t>
-            </a:r>
-          </a:p>
-          <a:p>
-            <a:pPr lvl="0" indent="0" marL="1270000">
-              <a:buNone/>
-            </a:pPr>
-            <a:r>
-              <a:rPr sz="2000"/>
-              <a:t>By the end you will wrangle and describe our leaf data in one connected pipeline.</a:t>
+              <a:t> it and compare to your prediction</a:t>
             </a:r>
           </a:p>
         </p:txBody>
@@ -19533,160 +23313,62 @@
           <a:bodyPr/>
           <a:lstStyle/>
           <a:p>
-            <a:pPr lvl="0" indent="0" marL="0">
+            <a:pPr lvl="0" indent="0" marL="1270000">
               <a:buNone/>
             </a:pPr>
             <a:r>
-              <a:rPr b="1"/>
-              <a:t>Our tools today:</a:t>
+              <a:rPr sz="2000" b="1"/>
+              <a:t>Note</a:t>
+            </a:r>
+          </a:p>
+          <a:p>
+            <a:pPr lvl="0" indent="0" marL="1270000">
+              <a:buNone/>
+            </a:pPr>
+            <a:r>
+              <a:rPr sz="2000" b="1"/>
+              <a:t>✅ Why bother? (the evidence)</a:t>
             </a:r>
           </a:p>
           <a:p>
             <a:pPr lvl="0"/>
             <a:r>
-              <a:rPr>
-                <a:latin typeface="Courier"/>
-              </a:rPr>
-              <a:t>readxl</a:t>
+              <a:rPr sz="2000" b="1"/>
+              <a:t>Predicting first</a:t>
+            </a:r>
+            <a:r>
+              <a:rPr sz="2000"/>
+              <a:t> forces your brain to </a:t>
+            </a:r>
+            <a:r>
+              <a:rPr sz="2000" i="1"/>
+              <a:t>retrieve</a:t>
+            </a:r>
+            <a:r>
+              <a:rPr sz="2000"/>
+              <a:t> what it knows. The gap between your guess and the real answer is what makes the idea stick.</a:t>
             </a:r>
           </a:p>
           <a:p>
             <a:pPr lvl="0"/>
             <a:r>
-              <a:rPr>
-                <a:latin typeface="Courier"/>
-              </a:rPr>
-              <a:t>tidyverse</a:t>
+              <a:rPr sz="2000" b="1"/>
+              <a:t>Typing by hand</a:t>
+            </a:r>
+            <a:r>
+              <a:rPr sz="2000"/>
+              <a:t> builds the finger-memory and error-spotting that copy-paste skips — including the typos R actually throws at you.</a:t>
             </a:r>
           </a:p>
           <a:p>
             <a:pPr lvl="0"/>
             <a:r>
-              <a:rPr>
-                <a:latin typeface="Courier"/>
-              </a:rPr>
-              <a:t>skimr</a:t>
-            </a:r>
-          </a:p>
-          <a:p>
-            <a:pPr lvl="0" indent="0" marL="0">
-              <a:buNone/>
-            </a:pPr>
-            <a:r>
-              <a:rPr b="1"/>
-              <a:t>References:</a:t>
-            </a:r>
-          </a:p>
-          <a:p>
-            <a:pPr lvl="0"/>
-            <a:r>
-              <a:rPr/>
-              <a:t>📖 </a:t>
-            </a:r>
-            <a:r>
-              <a:rPr>
-                <a:hlinkClick r:id="rId2"/>
-              </a:rPr>
-              <a:t>R4DS Ch 3</a:t>
-            </a:r>
-            <a:r>
-              <a:rPr/>
-              <a:t> — Data Transformation</a:t>
-            </a:r>
-          </a:p>
-          <a:p>
-            <a:pPr lvl="0"/>
-            <a:r>
-              <a:rPr/>
-              <a:t>📖 </a:t>
-            </a:r>
-            <a:r>
-              <a:rPr>
-                <a:hlinkClick r:id="rId3"/>
-              </a:rPr>
-              <a:t>R4DS Ch 13</a:t>
-            </a:r>
-            <a:r>
-              <a:rPr/>
-              <a:t> — Numbers</a:t>
-            </a:r>
-          </a:p>
-          <a:p>
-            <a:pPr lvl="0"/>
-            <a:r>
-              <a:rPr/>
-              <a:t>📖 </a:t>
-            </a:r>
-            <a:r>
-              <a:rPr>
-                <a:hlinkClick r:id="rId4"/>
-              </a:rPr>
-              <a:t>R4DS Ch 18</a:t>
-            </a:r>
-            <a:r>
-              <a:rPr/>
-              <a:t> — Missing Values</a:t>
-            </a:r>
-          </a:p>
-          <a:p>
-            <a:pPr lvl="0"/>
-            <a:r>
-              <a:rPr/>
-              <a:t>🌐 </a:t>
-            </a:r>
-            <a:r>
-              <a:rPr>
-                <a:hlinkClick r:id="rId5"/>
-              </a:rPr>
-              <a:t>Data Carpentry</a:t>
-            </a:r>
-          </a:p>
-          <a:p>
-            <a:pPr lvl="0" indent="0" marL="0">
-              <a:buNone/>
-            </a:pPr>
-            <a:r>
-              <a:rPr b="1"/>
-              <a:t>Naming conventions:</a:t>
-            </a:r>
-          </a:p>
-          <a:p>
-            <a:pPr lvl="0"/>
-            <a:r>
-              <a:rPr/>
-              <a:t>data frames → </a:t>
-            </a:r>
-            <a:r>
-              <a:rPr>
-                <a:latin typeface="Courier"/>
-              </a:rPr>
-              <a:t>_df</a:t>
-            </a:r>
-          </a:p>
-          <a:p>
-            <a:pPr lvl="0"/>
-            <a:r>
-              <a:rPr/>
-              <a:t>plots → </a:t>
-            </a:r>
-            <a:r>
-              <a:rPr>
-                <a:latin typeface="Courier"/>
-              </a:rPr>
-              <a:t>_plot</a:t>
-            </a:r>
-          </a:p>
-          <a:p>
-            <a:pPr lvl="0"/>
-            <a:r>
-              <a:rPr/>
-              <a:t>models → </a:t>
-            </a:r>
-            <a:r>
-              <a:rPr>
-                <a:latin typeface="Courier"/>
-              </a:rPr>
-              <a:t>_model</a:t>
+              <a:rPr sz="2000" b="1"/>
+              <a:t>Chunk → immediate practice</a:t>
+            </a:r>
+            <a:r>
+              <a:rPr sz="2000"/>
+              <a:t> keeps a new idea in working memory long enough to form a lasting schema. A 90-minute lecture overloads it; an 8-minute chunk does not.</a:t>
             </a:r>
           </a:p>
         </p:txBody>
@@ -19696,7 +23378,104 @@
 </p:sld>
 </file>
 
-<file path=ppt/slides/slide30.xml><?xml version="1.0" encoding="utf-8"?>
+<file path=ppt/slides/slide40.xml><?xml version="1.0" encoding="utf-8"?>
+<p:sld xmlns:a="http://schemas.openxmlformats.org/drawingml/2006/main" xmlns:r="http://schemas.openxmlformats.org/officeDocument/2006/relationships" xmlns:p="http://schemas.openxmlformats.org/presentationml/2006/main">
+  <p:cSld>
+    <p:spTree>
+      <p:nvGrpSpPr>
+        <p:cNvPr id="1" name=""/>
+        <p:cNvGrpSpPr/>
+        <p:nvPr/>
+      </p:nvGrpSpPr>
+      <p:grpSpPr>
+        <a:xfrm>
+          <a:off x="0" y="0"/>
+          <a:ext cx="0" cy="0"/>
+          <a:chOff x="0" y="0"/>
+          <a:chExt cx="0" cy="0"/>
+        </a:xfrm>
+      </p:grpSpPr>
+      <p:sp>
+        <p:nvSpPr>
+          <p:cNvPr id="2" name="Title 1"/>
+          <p:cNvSpPr>
+            <a:spLocks noGrp="1"/>
+          </p:cNvSpPr>
+          <p:nvPr>
+            <p:ph type="title"/>
+          </p:nvPr>
+        </p:nvSpPr>
+        <p:spPr>
+          <a:xfrm>
+            <a:off x="0" y="0"/>
+            <a:ext cx="9144000" cy="582780"/>
+          </a:xfrm>
+        </p:spPr>
+        <p:txBody>
+          <a:bodyPr/>
+          <a:lstStyle/>
+          <a:p>
+            <a:pPr lvl="0" indent="0" marL="0">
+              <a:buNone/>
+            </a:pPr>
+            <a:r>
+              <a:rPr/>
+              <a:t>🛑 Pause — Do Activity Parts 6–9 Now</a:t>
+            </a:r>
+          </a:p>
+        </p:txBody>
+      </p:sp>
+      <p:sp>
+        <p:nvSpPr>
+          <p:cNvPr id="3" name="Content Placeholder 2"/>
+          <p:cNvSpPr>
+            <a:spLocks noGrp="1"/>
+          </p:cNvSpPr>
+          <p:nvPr>
+            <p:ph idx="1"/>
+          </p:nvPr>
+        </p:nvSpPr>
+        <p:spPr/>
+        <p:txBody>
+          <a:bodyPr/>
+          <a:lstStyle/>
+          <a:p>
+            <a:pPr lvl="0" indent="0" marL="0">
+              <a:buNone/>
+            </a:pPr>
+            <a:r>
+              <a:rPr/>
+              <a:t>Tidy stats with </a:t>
+            </a:r>
+            <a:r>
+              <a:rPr>
+                <a:latin typeface="Courier"/>
+              </a:rPr>
+              <a:t>group_by()</a:t>
+            </a:r>
+            <a:r>
+              <a:rPr/>
+              <a:t>, a fast </a:t>
+            </a:r>
+            <a:r>
+              <a:rPr>
+                <a:latin typeface="Courier"/>
+              </a:rPr>
+              <a:t>skim()</a:t>
+            </a:r>
+            <a:r>
+              <a:rPr/>
+              <a:t>, and both plots. Predict each output, type it, then run it.</a:t>
+            </a:r>
+          </a:p>
+        </p:txBody>
+      </p:sp>
+    </p:spTree>
+  </p:cSld>
+</p:sld>
+</file>
+
+<file path=ppt/slides/slide41.xml><?xml version="1.0" encoding="utf-8"?>
 <p:sld xmlns:a="http://schemas.openxmlformats.org/drawingml/2006/main" xmlns:r="http://schemas.openxmlformats.org/officeDocument/2006/relationships" xmlns:p="http://schemas.openxmlformats.org/presentationml/2006/main">
   <p:cSld>
     <p:spTree>
@@ -20098,7 +23877,7 @@
 </p:sld>
 </file>
 
-<file path=ppt/slides/slide4.xml><?xml version="1.0" encoding="utf-8"?>
+<file path=ppt/slides/slide5.xml><?xml version="1.0" encoding="utf-8"?>
 <p:sld xmlns:a="http://schemas.openxmlformats.org/drawingml/2006/main" xmlns:r="http://schemas.openxmlformats.org/officeDocument/2006/relationships" xmlns:p="http://schemas.openxmlformats.org/presentationml/2006/main">
   <p:cSld>
     <p:spTree>
@@ -20372,7 +24151,7 @@
 </p:sld>
 </file>
 
-<file path=ppt/slides/slide5.xml><?xml version="1.0" encoding="utf-8"?>
+<file path=ppt/slides/slide6.xml><?xml version="1.0" encoding="utf-8"?>
 <p:sld xmlns:a="http://schemas.openxmlformats.org/drawingml/2006/main" xmlns:r="http://schemas.openxmlformats.org/officeDocument/2006/relationships" xmlns:p="http://schemas.openxmlformats.org/presentationml/2006/main">
   <p:cSld>
     <p:spTree>
@@ -20631,7 +24410,150 @@
 </p:sld>
 </file>
 
-<file path=ppt/slides/slide6.xml><?xml version="1.0" encoding="utf-8"?>
+<file path=ppt/slides/slide7.xml><?xml version="1.0" encoding="utf-8"?>
+<p:sld xmlns:a="http://schemas.openxmlformats.org/drawingml/2006/main" xmlns:r="http://schemas.openxmlformats.org/officeDocument/2006/relationships" xmlns:p="http://schemas.openxmlformats.org/presentationml/2006/main">
+  <p:cSld>
+    <p:spTree>
+      <p:nvGrpSpPr>
+        <p:cNvPr id="1" name=""/>
+        <p:cNvGrpSpPr/>
+        <p:nvPr/>
+      </p:nvGrpSpPr>
+      <p:grpSpPr>
+        <a:xfrm>
+          <a:off x="0" y="0"/>
+          <a:ext cx="0" cy="0"/>
+          <a:chOff x="0" y="0"/>
+          <a:chExt cx="0" cy="0"/>
+        </a:xfrm>
+      </p:grpSpPr>
+      <p:sp>
+        <p:nvSpPr>
+          <p:cNvPr id="2" name="Title 1"/>
+          <p:cNvSpPr>
+            <a:spLocks noGrp="1"/>
+          </p:cNvSpPr>
+          <p:nvPr>
+            <p:ph type="title"/>
+          </p:nvPr>
+        </p:nvSpPr>
+        <p:spPr>
+          <a:xfrm>
+            <a:off x="0" y="0"/>
+            <a:ext cx="9144000" cy="582780"/>
+          </a:xfrm>
+        </p:spPr>
+        <p:txBody>
+          <a:bodyPr/>
+          <a:lstStyle/>
+          <a:p>
+            <a:pPr lvl="0" indent="0" marL="0">
+              <a:buNone/>
+            </a:pPr>
+            <a:r>
+              <a:rPr/>
+              <a:t>🧩 Chunk 1 of 4 · Wrangling Verbs</a:t>
+            </a:r>
+          </a:p>
+        </p:txBody>
+      </p:sp>
+      <p:sp>
+        <p:nvSpPr>
+          <p:cNvPr id="3" name="Content Placeholder 2"/>
+          <p:cNvSpPr>
+            <a:spLocks noGrp="1"/>
+          </p:cNvSpPr>
+          <p:nvPr>
+            <p:ph idx="1"/>
+          </p:nvPr>
+        </p:nvSpPr>
+        <p:spPr/>
+        <p:txBody>
+          <a:bodyPr/>
+          <a:lstStyle/>
+          <a:p>
+            <a:pPr lvl="0" indent="0" marL="0">
+              <a:buNone/>
+            </a:pPr>
+            <a:r>
+              <a:rPr b="1"/>
+              <a:t>We will cover:</a:t>
+            </a:r>
+            <a:r>
+              <a:rPr/>
+              <a:t> </a:t>
+            </a:r>
+            <a:r>
+              <a:rPr>
+                <a:latin typeface="Courier"/>
+              </a:rPr>
+              <a:t>filter()</a:t>
+            </a:r>
+            <a:r>
+              <a:rPr/>
+              <a:t>, </a:t>
+            </a:r>
+            <a:r>
+              <a:rPr>
+                <a:latin typeface="Courier"/>
+              </a:rPr>
+              <a:t>select()</a:t>
+            </a:r>
+            <a:r>
+              <a:rPr/>
+              <a:t>, </a:t>
+            </a:r>
+            <a:r>
+              <a:rPr>
+                <a:latin typeface="Courier"/>
+              </a:rPr>
+              <a:t>mutate()</a:t>
+            </a:r>
+            <a:r>
+              <a:rPr/>
+              <a:t>, </a:t>
+            </a:r>
+            <a:r>
+              <a:rPr>
+                <a:latin typeface="Courier"/>
+              </a:rPr>
+              <a:t>arrange()</a:t>
+            </a:r>
+            <a:r>
+              <a:rPr/>
+              <a:t>, and chaining them into a pipeline.</a:t>
+            </a:r>
+          </a:p>
+          <a:p>
+            <a:pPr lvl="0" indent="0" marL="1270000">
+              <a:buNone/>
+            </a:pPr>
+            <a:r>
+              <a:rPr sz="2000" b="1"/>
+              <a:t>Tip</a:t>
+            </a:r>
+          </a:p>
+          <a:p>
+            <a:pPr lvl="0" indent="0" marL="1270000">
+              <a:buNone/>
+            </a:pPr>
+            <a:r>
+              <a:rPr sz="2000" b="1"/>
+              <a:t>🖐 After this chunk you will do Activity Parts 1–3.</a:t>
+            </a:r>
+            <a:r>
+              <a:rPr sz="2000"/>
+              <a:t> Keep the worksheet open beside you — you will type every verb yourself.</a:t>
+            </a:r>
+          </a:p>
+        </p:txBody>
+      </p:sp>
+    </p:spTree>
+  </p:cSld>
+</p:sld>
+</file>
+
+<file path=ppt/slides/slide8.xml><?xml version="1.0" encoding="utf-8"?>
 <p:sld xmlns:a="http://schemas.openxmlformats.org/drawingml/2006/main" xmlns:r="http://schemas.openxmlformats.org/officeDocument/2006/relationships" xmlns:p="http://schemas.openxmlformats.org/presentationml/2006/main">
   <p:cSld>
     <p:spTree>
@@ -21085,1585 +25007,6 @@
 </p:sld>
 </file>
 
-<file path=ppt/slides/slide7.xml><?xml version="1.0" encoding="utf-8"?>
-<p:sld xmlns:a="http://schemas.openxmlformats.org/drawingml/2006/main" xmlns:r="http://schemas.openxmlformats.org/officeDocument/2006/relationships" xmlns:p="http://schemas.openxmlformats.org/presentationml/2006/main">
-  <p:cSld>
-    <p:spTree>
-      <p:nvGrpSpPr>
-        <p:cNvPr id="1" name=""/>
-        <p:cNvGrpSpPr/>
-        <p:nvPr/>
-      </p:nvGrpSpPr>
-      <p:grpSpPr>
-        <a:xfrm>
-          <a:off x="0" y="0"/>
-          <a:ext cx="0" cy="0"/>
-          <a:chOff x="0" y="0"/>
-          <a:chExt cx="0" cy="0"/>
-        </a:xfrm>
-      </p:grpSpPr>
-      <p:sp>
-        <p:nvSpPr>
-          <p:cNvPr id="2" name="Title 1"/>
-          <p:cNvSpPr>
-            <a:spLocks noGrp="1"/>
-          </p:cNvSpPr>
-          <p:nvPr>
-            <p:ph type="title"/>
-          </p:nvPr>
-        </p:nvSpPr>
-        <p:spPr>
-          <a:xfrm>
-            <a:off x="139485" y="78119"/>
-            <a:ext cx="8229600" cy="607682"/>
-          </a:xfrm>
-        </p:spPr>
-        <p:txBody>
-          <a:bodyPr/>
-          <a:lstStyle/>
-          <a:p>
-            <a:pPr lvl="0" indent="0" marL="0">
-              <a:buNone/>
-            </a:pPr>
-            <a:r>
-              <a:rPr>
-                <a:latin typeface="Courier"/>
-              </a:rPr>
-              <a:t>filter()</a:t>
-            </a:r>
-            <a:r>
-              <a:rPr/>
-              <a:t> — Picking Rows</a:t>
-            </a:r>
-          </a:p>
-        </p:txBody>
-      </p:sp>
-      <p:sp>
-        <p:nvSpPr>
-          <p:cNvPr id="3" name="Text Placeholder 2"/>
-          <p:cNvSpPr>
-            <a:spLocks noGrp="1"/>
-          </p:cNvSpPr>
-          <p:nvPr>
-            <p:ph idx="1" type="body"/>
-          </p:nvPr>
-        </p:nvSpPr>
-        <p:spPr/>
-        <p:txBody>
-          <a:bodyPr/>
-          <a:lstStyle/>
-          <a:p>
-            <a:pPr lvl="0" indent="0">
-              <a:buNone/>
-            </a:pPr>
-            <a:r>
-              <a:rPr>
-                <a:solidFill>
-                  <a:srgbClr val="5E5E5E"/>
-                </a:solidFill>
-                <a:latin typeface="Courier"/>
-              </a:rPr>
-              <a:t># filter() keeps rows where the condition is TRUE -------</a:t>
-            </a:r>
-            <a:br/>
-            <a:br/>
-            <a:r>
-              <a:rPr>
-                <a:solidFill>
-                  <a:srgbClr val="5E5E5E"/>
-                </a:solidFill>
-                <a:latin typeface="Courier"/>
-              </a:rPr>
-              <a:t># Keep only sunny leaves</a:t>
-            </a:r>
-            <a:br/>
-            <a:r>
-              <a:rPr>
-                <a:solidFill>
-                  <a:srgbClr val="003B4F"/>
-                </a:solidFill>
-                <a:latin typeface="Courier"/>
-              </a:rPr>
-              <a:t>tree_df </a:t>
-            </a:r>
-            <a:r>
-              <a:rPr>
-                <a:solidFill>
-                  <a:srgbClr val="5E5E5E"/>
-                </a:solidFill>
-                <a:latin typeface="Courier"/>
-              </a:rPr>
-              <a:t>%&gt;%</a:t>
-            </a:r>
-            <a:r>
-              <a:rPr>
-                <a:solidFill>
-                  <a:srgbClr val="003B4F"/>
-                </a:solidFill>
-                <a:latin typeface="Courier"/>
-              </a:rPr>
-              <a:t> </a:t>
-            </a:r>
-            <a:r>
-              <a:rPr>
-                <a:solidFill>
-                  <a:srgbClr val="4758AB"/>
-                </a:solidFill>
-                <a:latin typeface="Courier"/>
-              </a:rPr>
-              <a:t>filter</a:t>
-            </a:r>
-            <a:r>
-              <a:rPr>
-                <a:solidFill>
-                  <a:srgbClr val="003B4F"/>
-                </a:solidFill>
-                <a:latin typeface="Courier"/>
-              </a:rPr>
-              <a:t>(side </a:t>
-            </a:r>
-            <a:r>
-              <a:rPr>
-                <a:solidFill>
-                  <a:srgbClr val="5E5E5E"/>
-                </a:solidFill>
-                <a:latin typeface="Courier"/>
-              </a:rPr>
-              <a:t>==</a:t>
-            </a:r>
-            <a:r>
-              <a:rPr>
-                <a:solidFill>
-                  <a:srgbClr val="003B4F"/>
-                </a:solidFill>
-                <a:latin typeface="Courier"/>
-              </a:rPr>
-              <a:t> </a:t>
-            </a:r>
-            <a:r>
-              <a:rPr>
-                <a:solidFill>
-                  <a:srgbClr val="20794D"/>
-                </a:solidFill>
-                <a:latin typeface="Courier"/>
-              </a:rPr>
-              <a:t>"sunny"</a:t>
-            </a:r>
-            <a:r>
-              <a:rPr>
-                <a:solidFill>
-                  <a:srgbClr val="003B4F"/>
-                </a:solidFill>
-                <a:latin typeface="Courier"/>
-              </a:rPr>
-              <a:t>) </a:t>
-            </a:r>
-            <a:r>
-              <a:rPr>
-                <a:solidFill>
-                  <a:srgbClr val="5E5E5E"/>
-                </a:solidFill>
-                <a:latin typeface="Courier"/>
-              </a:rPr>
-              <a:t>%&gt;%</a:t>
-            </a:r>
-            <a:r>
-              <a:rPr>
-                <a:solidFill>
-                  <a:srgbClr val="003B4F"/>
-                </a:solidFill>
-                <a:latin typeface="Courier"/>
-              </a:rPr>
-              <a:t> </a:t>
-            </a:r>
-            <a:r>
-              <a:rPr>
-                <a:solidFill>
-                  <a:srgbClr val="4758AB"/>
-                </a:solidFill>
-                <a:latin typeface="Courier"/>
-              </a:rPr>
-              <a:t>head</a:t>
-            </a:r>
-            <a:r>
-              <a:rPr>
-                <a:solidFill>
-                  <a:srgbClr val="003B4F"/>
-                </a:solidFill>
-                <a:latin typeface="Courier"/>
-              </a:rPr>
-              <a:t>()</a:t>
-            </a:r>
-          </a:p>
-          <a:p>
-            <a:pPr lvl="0" indent="0">
-              <a:buNone/>
-            </a:pPr>
-            <a:r>
-              <a:rPr>
-                <a:latin typeface="Courier"/>
-              </a:rPr>
-              <a:t># A tibble: 6 × 5
-  index side  weight_g width_cm height_cm
-  &lt;dbl&gt; &lt;chr&gt;    &lt;dbl&gt;    &lt;dbl&gt;     &lt;dbl&gt;
-1     1 sunny        4       12        21
-2     2 sunny        3       14        22
-3     3 sunny        5       12        21
-4     4 sunny        3       13        23
-5     5 sunny        4       15        22
-6     6 sunny        3       13        23</a:t>
-            </a:r>
-          </a:p>
-          <a:p>
-            <a:pPr lvl="0" indent="0">
-              <a:buNone/>
-            </a:pPr>
-            <a:r>
-              <a:rPr>
-                <a:solidFill>
-                  <a:srgbClr val="5E5E5E"/>
-                </a:solidFill>
-                <a:latin typeface="Courier"/>
-              </a:rPr>
-              <a:t># Keep only leaves heavier than 5 g</a:t>
-            </a:r>
-            <a:br/>
-            <a:r>
-              <a:rPr>
-                <a:solidFill>
-                  <a:srgbClr val="003B4F"/>
-                </a:solidFill>
-                <a:latin typeface="Courier"/>
-              </a:rPr>
-              <a:t>tree_df </a:t>
-            </a:r>
-            <a:r>
-              <a:rPr>
-                <a:solidFill>
-                  <a:srgbClr val="5E5E5E"/>
-                </a:solidFill>
-                <a:latin typeface="Courier"/>
-              </a:rPr>
-              <a:t>%&gt;%</a:t>
-            </a:r>
-            <a:r>
-              <a:rPr>
-                <a:solidFill>
-                  <a:srgbClr val="003B4F"/>
-                </a:solidFill>
-                <a:latin typeface="Courier"/>
-              </a:rPr>
-              <a:t> </a:t>
-            </a:r>
-            <a:r>
-              <a:rPr>
-                <a:solidFill>
-                  <a:srgbClr val="4758AB"/>
-                </a:solidFill>
-                <a:latin typeface="Courier"/>
-              </a:rPr>
-              <a:t>filter</a:t>
-            </a:r>
-            <a:r>
-              <a:rPr>
-                <a:solidFill>
-                  <a:srgbClr val="003B4F"/>
-                </a:solidFill>
-                <a:latin typeface="Courier"/>
-              </a:rPr>
-              <a:t>(weight_g </a:t>
-            </a:r>
-            <a:r>
-              <a:rPr>
-                <a:solidFill>
-                  <a:srgbClr val="5E5E5E"/>
-                </a:solidFill>
-                <a:latin typeface="Courier"/>
-              </a:rPr>
-              <a:t>&gt;</a:t>
-            </a:r>
-            <a:r>
-              <a:rPr>
-                <a:solidFill>
-                  <a:srgbClr val="003B4F"/>
-                </a:solidFill>
-                <a:latin typeface="Courier"/>
-              </a:rPr>
-              <a:t> </a:t>
-            </a:r>
-            <a:r>
-              <a:rPr>
-                <a:solidFill>
-                  <a:srgbClr val="AD0000"/>
-                </a:solidFill>
-                <a:latin typeface="Courier"/>
-              </a:rPr>
-              <a:t>5</a:t>
-            </a:r>
-            <a:r>
-              <a:rPr>
-                <a:solidFill>
-                  <a:srgbClr val="003B4F"/>
-                </a:solidFill>
-                <a:latin typeface="Courier"/>
-              </a:rPr>
-              <a:t>) </a:t>
-            </a:r>
-            <a:r>
-              <a:rPr>
-                <a:solidFill>
-                  <a:srgbClr val="5E5E5E"/>
-                </a:solidFill>
-                <a:latin typeface="Courier"/>
-              </a:rPr>
-              <a:t>%&gt;%</a:t>
-            </a:r>
-            <a:r>
-              <a:rPr>
-                <a:solidFill>
-                  <a:srgbClr val="003B4F"/>
-                </a:solidFill>
-                <a:latin typeface="Courier"/>
-              </a:rPr>
-              <a:t> </a:t>
-            </a:r>
-            <a:r>
-              <a:rPr>
-                <a:solidFill>
-                  <a:srgbClr val="4758AB"/>
-                </a:solidFill>
-                <a:latin typeface="Courier"/>
-              </a:rPr>
-              <a:t>head</a:t>
-            </a:r>
-            <a:r>
-              <a:rPr>
-                <a:solidFill>
-                  <a:srgbClr val="003B4F"/>
-                </a:solidFill>
-                <a:latin typeface="Courier"/>
-              </a:rPr>
-              <a:t>()</a:t>
-            </a:r>
-          </a:p>
-          <a:p>
-            <a:pPr lvl="0" indent="0">
-              <a:buNone/>
-            </a:pPr>
-            <a:r>
-              <a:rPr>
-                <a:latin typeface="Courier"/>
-              </a:rPr>
-              <a:t># A tibble: 6 × 5
-  index side  weight_g width_cm height_cm
-  &lt;dbl&gt; &lt;chr&gt;    &lt;dbl&gt;    &lt;dbl&gt;     &lt;dbl&gt;
-1    11 shady        7        9        28
-2    12 shady        8       18        29
-3    13 shady        6       17        27
-4    14 shady        9       18        28
-5    15 shady        8       19        27
-6    16 shady        7       19        28</a:t>
-            </a:r>
-          </a:p>
-          <a:p>
-            <a:pPr lvl="0" indent="0">
-              <a:buNone/>
-            </a:pPr>
-            <a:r>
-              <a:rPr>
-                <a:solidFill>
-                  <a:srgbClr val="5E5E5E"/>
-                </a:solidFill>
-                <a:latin typeface="Courier"/>
-              </a:rPr>
-              <a:t># Combine two conditions with &amp; (AND)</a:t>
-            </a:r>
-            <a:br/>
-            <a:r>
-              <a:rPr>
-                <a:solidFill>
-                  <a:srgbClr val="003B4F"/>
-                </a:solidFill>
-                <a:latin typeface="Courier"/>
-              </a:rPr>
-              <a:t>tree_df </a:t>
-            </a:r>
-            <a:r>
-              <a:rPr>
-                <a:solidFill>
-                  <a:srgbClr val="5E5E5E"/>
-                </a:solidFill>
-                <a:latin typeface="Courier"/>
-              </a:rPr>
-              <a:t>%&gt;%</a:t>
-            </a:r>
-            <a:r>
-              <a:rPr>
-                <a:solidFill>
-                  <a:srgbClr val="003B4F"/>
-                </a:solidFill>
-                <a:latin typeface="Courier"/>
-              </a:rPr>
-              <a:t> </a:t>
-            </a:r>
-            <a:r>
-              <a:rPr>
-                <a:solidFill>
-                  <a:srgbClr val="4758AB"/>
-                </a:solidFill>
-                <a:latin typeface="Courier"/>
-              </a:rPr>
-              <a:t>filter</a:t>
-            </a:r>
-            <a:r>
-              <a:rPr>
-                <a:solidFill>
-                  <a:srgbClr val="003B4F"/>
-                </a:solidFill>
-                <a:latin typeface="Courier"/>
-              </a:rPr>
-              <a:t>(side </a:t>
-            </a:r>
-            <a:r>
-              <a:rPr>
-                <a:solidFill>
-                  <a:srgbClr val="5E5E5E"/>
-                </a:solidFill>
-                <a:latin typeface="Courier"/>
-              </a:rPr>
-              <a:t>==</a:t>
-            </a:r>
-            <a:r>
-              <a:rPr>
-                <a:solidFill>
-                  <a:srgbClr val="003B4F"/>
-                </a:solidFill>
-                <a:latin typeface="Courier"/>
-              </a:rPr>
-              <a:t> </a:t>
-            </a:r>
-            <a:r>
-              <a:rPr>
-                <a:solidFill>
-                  <a:srgbClr val="20794D"/>
-                </a:solidFill>
-                <a:latin typeface="Courier"/>
-              </a:rPr>
-              <a:t>"shady"</a:t>
-            </a:r>
-            <a:r>
-              <a:rPr>
-                <a:solidFill>
-                  <a:srgbClr val="003B4F"/>
-                </a:solidFill>
-                <a:latin typeface="Courier"/>
-              </a:rPr>
-              <a:t>, weight_g </a:t>
-            </a:r>
-            <a:r>
-              <a:rPr>
-                <a:solidFill>
-                  <a:srgbClr val="5E5E5E"/>
-                </a:solidFill>
-                <a:latin typeface="Courier"/>
-              </a:rPr>
-              <a:t>&gt;</a:t>
-            </a:r>
-            <a:r>
-              <a:rPr>
-                <a:solidFill>
-                  <a:srgbClr val="003B4F"/>
-                </a:solidFill>
-                <a:latin typeface="Courier"/>
-              </a:rPr>
-              <a:t> </a:t>
-            </a:r>
-            <a:r>
-              <a:rPr>
-                <a:solidFill>
-                  <a:srgbClr val="AD0000"/>
-                </a:solidFill>
-                <a:latin typeface="Courier"/>
-              </a:rPr>
-              <a:t>7</a:t>
-            </a:r>
-            <a:r>
-              <a:rPr>
-                <a:solidFill>
-                  <a:srgbClr val="003B4F"/>
-                </a:solidFill>
-                <a:latin typeface="Courier"/>
-              </a:rPr>
-              <a:t>) </a:t>
-            </a:r>
-            <a:r>
-              <a:rPr>
-                <a:solidFill>
-                  <a:srgbClr val="5E5E5E"/>
-                </a:solidFill>
-                <a:latin typeface="Courier"/>
-              </a:rPr>
-              <a:t>%&gt;%</a:t>
-            </a:r>
-            <a:r>
-              <a:rPr>
-                <a:solidFill>
-                  <a:srgbClr val="003B4F"/>
-                </a:solidFill>
-                <a:latin typeface="Courier"/>
-              </a:rPr>
-              <a:t> </a:t>
-            </a:r>
-            <a:r>
-              <a:rPr>
-                <a:solidFill>
-                  <a:srgbClr val="4758AB"/>
-                </a:solidFill>
-                <a:latin typeface="Courier"/>
-              </a:rPr>
-              <a:t>head</a:t>
-            </a:r>
-            <a:r>
-              <a:rPr>
-                <a:solidFill>
-                  <a:srgbClr val="003B4F"/>
-                </a:solidFill>
-                <a:latin typeface="Courier"/>
-              </a:rPr>
-              <a:t>()</a:t>
-            </a:r>
-          </a:p>
-          <a:p>
-            <a:pPr lvl="0" indent="0">
-              <a:buNone/>
-            </a:pPr>
-            <a:r>
-              <a:rPr>
-                <a:latin typeface="Courier"/>
-              </a:rPr>
-              <a:t># A tibble: 6 × 5
-  index side  weight_g width_cm height_cm
-  &lt;dbl&gt; &lt;chr&gt;    &lt;dbl&gt;    &lt;dbl&gt;     &lt;dbl&gt;
-1    12 shady        8       18        29
-2    14 shady        9       18        28
-3    15 shady        8       19        27
-4    17 shady        8       18        29
-5    18 shady        9       17        27
-6    19 shady        9       19        27</a:t>
-            </a:r>
-          </a:p>
-        </p:txBody>
-      </p:sp>
-      <p:sp>
-        <p:nvSpPr>
-          <p:cNvPr id="5" name="Text Placeholder 4"/>
-          <p:cNvSpPr>
-            <a:spLocks noGrp="1"/>
-          </p:cNvSpPr>
-          <p:nvPr>
-            <p:ph idx="3" sz="quarter" type="body"/>
-          </p:nvPr>
-        </p:nvSpPr>
-        <p:spPr/>
-        <p:txBody>
-          <a:bodyPr/>
-          <a:lstStyle/>
-          <a:p>
-            <a:pPr lvl="0" indent="0" marL="0">
-              <a:buNone/>
-            </a:pPr>
-            <a:r>
-              <a:rPr b="1"/>
-              <a:t>Common comparison operators:</a:t>
-            </a:r>
-          </a:p>
-        </p:txBody>
-      </p:sp>
-      <p:graphicFrame>
-        <p:nvGraphicFramePr>
-          <p:cNvPr id="6" name="Content Placeholder 5"/>
-          <p:cNvGraphicFramePr>
-            <a:graphicFrameLocks noGrp="1"/>
-          </p:cNvGraphicFramePr>
-          <p:nvPr>
-            <p:ph idx="1"/>
-          </p:nvPr>
-        </p:nvGraphicFramePr>
-        <p:xfrm>
-          <a:off x="4749800" y="1295400"/>
-          <a:ext cx="4038600" cy="3276600"/>
-        </p:xfrm>
-        <a:graphic>
-          <a:graphicData uri="http://schemas.openxmlformats.org/drawingml/2006/table">
-            <a:tbl>
-              <a:tblPr firstRow="1" bandRow="1">
-                <a:tableStyleId>{5C22544A-7EE6-4342-B048-85BDC9FD1C3A}</a:tableStyleId>
-              </a:tblPr>
-              <a:tblGrid>
-                <a:gridCol w="2019300"/>
-                <a:gridCol w="2019300"/>
-              </a:tblGrid>
-              <a:tr h="0">
-                <a:tc>
-                  <a:txBody>
-                    <a:bodyPr/>
-                    <a:lstStyle/>
-                    <a:p>
-                      <a:pPr lvl="0" indent="0" marL="0">
-                        <a:buNone/>
-                      </a:pPr>
-                      <a:r>
-                        <a:rPr/>
-                        <a:t>Symbol</a:t>
-                      </a:r>
-                    </a:p>
-                  </a:txBody>
-                  <a:tcPr/>
-                </a:tc>
-                <a:tc>
-                  <a:txBody>
-                    <a:bodyPr/>
-                    <a:lstStyle/>
-                    <a:p>
-                      <a:pPr lvl="0" indent="0" marL="0">
-                        <a:buNone/>
-                      </a:pPr>
-                      <a:r>
-                        <a:rPr/>
-                        <a:t>Meaning</a:t>
-                      </a:r>
-                    </a:p>
-                  </a:txBody>
-                  <a:tcPr/>
-                </a:tc>
-              </a:tr>
-              <a:tr h="0">
-                <a:tc>
-                  <a:txBody>
-                    <a:bodyPr/>
-                    <a:lstStyle/>
-                    <a:p>
-                      <a:pPr lvl="0" indent="0" marL="0">
-                        <a:buNone/>
-                      </a:pPr>
-                      <a:r>
-                        <a:rPr>
-                          <a:latin typeface="Courier"/>
-                        </a:rPr>
-                        <a:t>==</a:t>
-                      </a:r>
-                    </a:p>
-                  </a:txBody>
-                </a:tc>
-                <a:tc>
-                  <a:txBody>
-                    <a:bodyPr/>
-                    <a:lstStyle/>
-                    <a:p>
-                      <a:pPr lvl="0" indent="0" marL="0">
-                        <a:buNone/>
-                      </a:pPr>
-                      <a:r>
-                        <a:rPr/>
-                        <a:t>exactly equal</a:t>
-                      </a:r>
-                    </a:p>
-                  </a:txBody>
-                </a:tc>
-              </a:tr>
-              <a:tr h="0">
-                <a:tc>
-                  <a:txBody>
-                    <a:bodyPr/>
-                    <a:lstStyle/>
-                    <a:p>
-                      <a:pPr lvl="0" indent="0" marL="0">
-                        <a:buNone/>
-                      </a:pPr>
-                      <a:r>
-                        <a:rPr>
-                          <a:latin typeface="Courier"/>
-                        </a:rPr>
-                        <a:t>!=</a:t>
-                      </a:r>
-                    </a:p>
-                  </a:txBody>
-                </a:tc>
-                <a:tc>
-                  <a:txBody>
-                    <a:bodyPr/>
-                    <a:lstStyle/>
-                    <a:p>
-                      <a:pPr lvl="0" indent="0" marL="0">
-                        <a:buNone/>
-                      </a:pPr>
-                      <a:r>
-                        <a:rPr/>
-                        <a:t>not equal</a:t>
-                      </a:r>
-                    </a:p>
-                  </a:txBody>
-                </a:tc>
-              </a:tr>
-              <a:tr h="0">
-                <a:tc>
-                  <a:txBody>
-                    <a:bodyPr/>
-                    <a:lstStyle/>
-                    <a:p>
-                      <a:pPr lvl="0" indent="0" marL="0">
-                        <a:buNone/>
-                      </a:pPr>
-                      <a:r>
-                        <a:rPr>
-                          <a:latin typeface="Courier"/>
-                        </a:rPr>
-                        <a:t>&gt;</a:t>
-                      </a:r>
-                      <a:r>
-                        <a:rPr/>
-                        <a:t> </a:t>
-                      </a:r>
-                      <a:r>
-                        <a:rPr>
-                          <a:latin typeface="Courier"/>
-                        </a:rPr>
-                        <a:t>&lt;</a:t>
-                      </a:r>
-                    </a:p>
-                  </a:txBody>
-                </a:tc>
-                <a:tc>
-                  <a:txBody>
-                    <a:bodyPr/>
-                    <a:lstStyle/>
-                    <a:p>
-                      <a:pPr lvl="0" indent="0" marL="0">
-                        <a:buNone/>
-                      </a:pPr>
-                      <a:r>
-                        <a:rPr/>
-                        <a:t>greater / less than</a:t>
-                      </a:r>
-                    </a:p>
-                  </a:txBody>
-                </a:tc>
-              </a:tr>
-              <a:tr h="0">
-                <a:tc>
-                  <a:txBody>
-                    <a:bodyPr/>
-                    <a:lstStyle/>
-                    <a:p>
-                      <a:pPr lvl="0" indent="0" marL="0">
-                        <a:buNone/>
-                      </a:pPr>
-                      <a:r>
-                        <a:rPr>
-                          <a:latin typeface="Courier"/>
-                        </a:rPr>
-                        <a:t>&gt;=</a:t>
-                      </a:r>
-                      <a:r>
-                        <a:rPr/>
-                        <a:t> </a:t>
-                      </a:r>
-                      <a:r>
-                        <a:rPr>
-                          <a:latin typeface="Courier"/>
-                        </a:rPr>
-                        <a:t>&lt;=</a:t>
-                      </a:r>
-                    </a:p>
-                  </a:txBody>
-                </a:tc>
-                <a:tc>
-                  <a:txBody>
-                    <a:bodyPr/>
-                    <a:lstStyle/>
-                    <a:p>
-                      <a:pPr lvl="0" indent="0" marL="0">
-                        <a:buNone/>
-                      </a:pPr>
-                      <a:r>
-                        <a:rPr/>
-                        <a:t>greater / less than or equal</a:t>
-                      </a:r>
-                    </a:p>
-                  </a:txBody>
-                </a:tc>
-              </a:tr>
-              <a:tr h="0">
-                <a:tc>
-                  <a:txBody>
-                    <a:bodyPr/>
-                    <a:lstStyle/>
-                    <a:p>
-                      <a:pPr lvl="0" indent="0" marL="0">
-                        <a:buNone/>
-                      </a:pPr>
-                      <a:r>
-                        <a:rPr/>
-                        <a:t>is.na</a:t>
-                      </a:r>
-                    </a:p>
-                  </a:txBody>
-                </a:tc>
-                <a:tc>
-                  <a:txBody>
-                    <a:bodyPr/>
-                    <a:lstStyle/>
-                    <a:p>
-                      <a:pPr lvl="0" indent="0" marL="0">
-                        <a:buNone/>
-                      </a:pPr>
-                      <a:r>
-                        <a:rPr/>
-                        <a:t>return all NA rows</a:t>
-                      </a:r>
-                    </a:p>
-                  </a:txBody>
-                </a:tc>
-              </a:tr>
-              <a:tr h="0">
-                <a:tc>
-                  <a:txBody>
-                    <a:bodyPr/>
-                    <a:lstStyle/>
-                    <a:p>
-                      <a:pPr lvl="0" indent="0" marL="0">
-                        <a:buNone/>
-                      </a:pPr>
-                      <a:r>
-                        <a:rPr/>
-                        <a:t>!is.na</a:t>
-                      </a:r>
-                    </a:p>
-                  </a:txBody>
-                </a:tc>
-                <a:tc>
-                  <a:txBody>
-                    <a:bodyPr/>
-                    <a:lstStyle/>
-                    <a:p>
-                      <a:pPr lvl="0" indent="0" marL="0">
-                        <a:buNone/>
-                      </a:pPr>
-                      <a:r>
-                        <a:rPr/>
-                        <a:t>return all rows that are </a:t>
-                      </a:r>
-                      <a:r>
-                        <a:rPr b="1"/>
-                        <a:t>NOT NA</a:t>
-                      </a:r>
-                    </a:p>
-                  </a:txBody>
-                </a:tc>
-              </a:tr>
-            </a:tbl>
-          </a:graphicData>
-        </a:graphic>
-      </p:graphicFrame>
-      <p:sp>
-        <p:nvSpPr>
-          <p:cNvPr id="6" name="Content Placeholder 5"/>
-          <p:cNvSpPr>
-            <a:spLocks noGrp="1"/>
-          </p:cNvSpPr>
-          <p:nvPr>
-            <p:ph idx="4" sz="quarter"/>
-          </p:nvPr>
-        </p:nvSpPr>
-        <p:spPr/>
-        <p:txBody>
-          <a:bodyPr/>
-          <a:lstStyle/>
-          <a:p>
-            <a:pPr lvl="0" indent="0" marL="1270000">
-              <a:buNone/>
-            </a:pPr>
-            <a:r>
-              <a:rPr sz="2000" b="1"/>
-              <a:t>Warning</a:t>
-            </a:r>
-          </a:p>
-          <a:p>
-            <a:pPr lvl="0" indent="0" marL="1270000">
-              <a:buNone/>
-            </a:pPr>
-            <a:r>
-              <a:rPr sz="2000" b="1"/>
-              <a:t>⚠️ Watch out!</a:t>
-            </a:r>
-          </a:p>
-          <a:p>
-            <a:pPr lvl="0"/>
-            <a:r>
-              <a:rPr sz="2000">
-                <a:latin typeface="Courier"/>
-              </a:rPr>
-              <a:t>=</a:t>
-            </a:r>
-            <a:r>
-              <a:rPr sz="2000"/>
-              <a:t> assigns a value.</a:t>
-            </a:r>
-          </a:p>
-          <a:p>
-            <a:pPr lvl="0"/>
-            <a:r>
-              <a:rPr sz="2000">
-                <a:latin typeface="Courier"/>
-              </a:rPr>
-              <a:t>==</a:t>
-            </a:r>
-            <a:r>
-              <a:rPr sz="2000"/>
-              <a:t> tests equality.</a:t>
-            </a:r>
-          </a:p>
-          <a:p>
-            <a:pPr lvl="0"/>
-            <a:r>
-              <a:rPr sz="2000">
-                <a:latin typeface="Courier"/>
-              </a:rPr>
-              <a:t>filter(side = "sunny")</a:t>
-            </a:r>
-            <a:r>
-              <a:rPr sz="2000"/>
-              <a:t> → error.</a:t>
-            </a:r>
-          </a:p>
-          <a:p>
-            <a:pPr lvl="0"/>
-            <a:r>
-              <a:rPr sz="2000">
-                <a:latin typeface="Courier"/>
-              </a:rPr>
-              <a:t>filter(side == "sunny")</a:t>
-            </a:r>
-            <a:r>
-              <a:rPr sz="2000"/>
-              <a:t> → correct.</a:t>
-            </a:r>
-          </a:p>
-        </p:txBody>
-      </p:sp>
-    </p:spTree>
-  </p:cSld>
-</p:sld>
-</file>
-
-<file path=ppt/slides/slide8.xml><?xml version="1.0" encoding="utf-8"?>
-<p:sld xmlns:a="http://schemas.openxmlformats.org/drawingml/2006/main" xmlns:r="http://schemas.openxmlformats.org/officeDocument/2006/relationships" xmlns:p="http://schemas.openxmlformats.org/presentationml/2006/main">
-  <p:cSld>
-    <p:spTree>
-      <p:nvGrpSpPr>
-        <p:cNvPr id="1" name=""/>
-        <p:cNvGrpSpPr/>
-        <p:nvPr/>
-      </p:nvGrpSpPr>
-      <p:grpSpPr>
-        <a:xfrm>
-          <a:off x="0" y="0"/>
-          <a:ext cx="0" cy="0"/>
-          <a:chOff x="0" y="0"/>
-          <a:chExt cx="0" cy="0"/>
-        </a:xfrm>
-      </p:grpSpPr>
-      <p:sp>
-        <p:nvSpPr>
-          <p:cNvPr id="2" name="Title 1"/>
-          <p:cNvSpPr>
-            <a:spLocks noGrp="1"/>
-          </p:cNvSpPr>
-          <p:nvPr>
-            <p:ph type="title"/>
-          </p:nvPr>
-        </p:nvSpPr>
-        <p:spPr>
-          <a:xfrm>
-            <a:off x="0" y="0"/>
-            <a:ext cx="9144000" cy="602780"/>
-          </a:xfrm>
-          <a:solidFill>
-            <a:srgbClr val="1A1A2E"/>
-          </a:solidFill>
-        </p:spPr>
-        <p:txBody>
-          <a:bodyPr/>
-          <a:lstStyle/>
-          <a:p>
-            <a:pPr lvl="0" indent="0" marL="0">
-              <a:buNone/>
-            </a:pPr>
-            <a:r>
-              <a:rPr>
-                <a:latin typeface="Courier"/>
-              </a:rPr>
-              <a:t>select()</a:t>
-            </a:r>
-            <a:r>
-              <a:rPr/>
-              <a:t> — Picking Columns</a:t>
-            </a:r>
-          </a:p>
-        </p:txBody>
-      </p:sp>
-      <p:sp>
-        <p:nvSpPr>
-          <p:cNvPr id="3" name="Content Placeholder 2"/>
-          <p:cNvSpPr>
-            <a:spLocks noGrp="1"/>
-          </p:cNvSpPr>
-          <p:nvPr>
-            <p:ph idx="1" sz="half"/>
-          </p:nvPr>
-        </p:nvSpPr>
-        <p:spPr/>
-        <p:txBody>
-          <a:bodyPr/>
-          <a:lstStyle/>
-          <a:p>
-            <a:pPr lvl="0" indent="0">
-              <a:buNone/>
-            </a:pPr>
-            <a:r>
-              <a:rPr>
-                <a:solidFill>
-                  <a:srgbClr val="5E5E5E"/>
-                </a:solidFill>
-                <a:latin typeface="Courier"/>
-              </a:rPr>
-              <a:t># select() keeps the columns you name ------------------</a:t>
-            </a:r>
-            <a:br/>
-            <a:br/>
-            <a:r>
-              <a:rPr>
-                <a:solidFill>
-                  <a:srgbClr val="5E5E5E"/>
-                </a:solidFill>
-                <a:latin typeface="Courier"/>
-              </a:rPr>
-              <a:t># Keep only side and weight</a:t>
-            </a:r>
-            <a:br/>
-            <a:r>
-              <a:rPr>
-                <a:solidFill>
-                  <a:srgbClr val="003B4F"/>
-                </a:solidFill>
-                <a:latin typeface="Courier"/>
-              </a:rPr>
-              <a:t>tree_df </a:t>
-            </a:r>
-            <a:r>
-              <a:rPr>
-                <a:solidFill>
-                  <a:srgbClr val="5E5E5E"/>
-                </a:solidFill>
-                <a:latin typeface="Courier"/>
-              </a:rPr>
-              <a:t>%&gt;%</a:t>
-            </a:r>
-            <a:r>
-              <a:rPr>
-                <a:solidFill>
-                  <a:srgbClr val="003B4F"/>
-                </a:solidFill>
-                <a:latin typeface="Courier"/>
-              </a:rPr>
-              <a:t> </a:t>
-            </a:r>
-            <a:r>
-              <a:rPr>
-                <a:solidFill>
-                  <a:srgbClr val="4758AB"/>
-                </a:solidFill>
-                <a:latin typeface="Courier"/>
-              </a:rPr>
-              <a:t>select</a:t>
-            </a:r>
-            <a:r>
-              <a:rPr>
-                <a:solidFill>
-                  <a:srgbClr val="003B4F"/>
-                </a:solidFill>
-                <a:latin typeface="Courier"/>
-              </a:rPr>
-              <a:t>(side, weight_g) </a:t>
-            </a:r>
-            <a:r>
-              <a:rPr>
-                <a:solidFill>
-                  <a:srgbClr val="5E5E5E"/>
-                </a:solidFill>
-                <a:latin typeface="Courier"/>
-              </a:rPr>
-              <a:t>%&gt;%</a:t>
-            </a:r>
-            <a:r>
-              <a:rPr>
-                <a:solidFill>
-                  <a:srgbClr val="003B4F"/>
-                </a:solidFill>
-                <a:latin typeface="Courier"/>
-              </a:rPr>
-              <a:t> </a:t>
-            </a:r>
-            <a:r>
-              <a:rPr>
-                <a:solidFill>
-                  <a:srgbClr val="4758AB"/>
-                </a:solidFill>
-                <a:latin typeface="Courier"/>
-              </a:rPr>
-              <a:t>head</a:t>
-            </a:r>
-            <a:r>
-              <a:rPr>
-                <a:solidFill>
-                  <a:srgbClr val="003B4F"/>
-                </a:solidFill>
-                <a:latin typeface="Courier"/>
-              </a:rPr>
-              <a:t>()</a:t>
-            </a:r>
-          </a:p>
-          <a:p>
-            <a:pPr lvl="0" indent="0">
-              <a:buNone/>
-            </a:pPr>
-            <a:r>
-              <a:rPr>
-                <a:latin typeface="Courier"/>
-              </a:rPr>
-              <a:t># A tibble: 6 × 2
-  side  weight_g
-  &lt;chr&gt;    &lt;dbl&gt;
-1 sunny        4
-2 sunny        3
-3 sunny        5
-4 sunny        3
-5 sunny        4
-6 sunny        3</a:t>
-            </a:r>
-          </a:p>
-          <a:p>
-            <a:pPr lvl="0" indent="0">
-              <a:buNone/>
-            </a:pPr>
-            <a:r>
-              <a:rPr>
-                <a:solidFill>
-                  <a:srgbClr val="5E5E5E"/>
-                </a:solidFill>
-                <a:latin typeface="Courier"/>
-              </a:rPr>
-              <a:t># Drop the index column (use minus sign)</a:t>
-            </a:r>
-            <a:br/>
-            <a:r>
-              <a:rPr>
-                <a:solidFill>
-                  <a:srgbClr val="003B4F"/>
-                </a:solidFill>
-                <a:latin typeface="Courier"/>
-              </a:rPr>
-              <a:t>tree_df </a:t>
-            </a:r>
-            <a:r>
-              <a:rPr>
-                <a:solidFill>
-                  <a:srgbClr val="5E5E5E"/>
-                </a:solidFill>
-                <a:latin typeface="Courier"/>
-              </a:rPr>
-              <a:t>%&gt;%</a:t>
-            </a:r>
-            <a:r>
-              <a:rPr>
-                <a:solidFill>
-                  <a:srgbClr val="003B4F"/>
-                </a:solidFill>
-                <a:latin typeface="Courier"/>
-              </a:rPr>
-              <a:t> </a:t>
-            </a:r>
-            <a:r>
-              <a:rPr>
-                <a:solidFill>
-                  <a:srgbClr val="4758AB"/>
-                </a:solidFill>
-                <a:latin typeface="Courier"/>
-              </a:rPr>
-              <a:t>select</a:t>
-            </a:r>
-            <a:r>
-              <a:rPr>
-                <a:solidFill>
-                  <a:srgbClr val="003B4F"/>
-                </a:solidFill>
-                <a:latin typeface="Courier"/>
-              </a:rPr>
-              <a:t>(</a:t>
-            </a:r>
-            <a:r>
-              <a:rPr>
-                <a:solidFill>
-                  <a:srgbClr val="5E5E5E"/>
-                </a:solidFill>
-                <a:latin typeface="Courier"/>
-              </a:rPr>
-              <a:t>-</a:t>
-            </a:r>
-            <a:r>
-              <a:rPr>
-                <a:solidFill>
-                  <a:srgbClr val="003B4F"/>
-                </a:solidFill>
-                <a:latin typeface="Courier"/>
-              </a:rPr>
-              <a:t>index) </a:t>
-            </a:r>
-            <a:r>
-              <a:rPr>
-                <a:solidFill>
-                  <a:srgbClr val="5E5E5E"/>
-                </a:solidFill>
-                <a:latin typeface="Courier"/>
-              </a:rPr>
-              <a:t>%&gt;%</a:t>
-            </a:r>
-            <a:r>
-              <a:rPr>
-                <a:solidFill>
-                  <a:srgbClr val="003B4F"/>
-                </a:solidFill>
-                <a:latin typeface="Courier"/>
-              </a:rPr>
-              <a:t> </a:t>
-            </a:r>
-            <a:r>
-              <a:rPr>
-                <a:solidFill>
-                  <a:srgbClr val="4758AB"/>
-                </a:solidFill>
-                <a:latin typeface="Courier"/>
-              </a:rPr>
-              <a:t>head</a:t>
-            </a:r>
-            <a:r>
-              <a:rPr>
-                <a:solidFill>
-                  <a:srgbClr val="003B4F"/>
-                </a:solidFill>
-                <a:latin typeface="Courier"/>
-              </a:rPr>
-              <a:t>()</a:t>
-            </a:r>
-          </a:p>
-          <a:p>
-            <a:pPr lvl="0" indent="0">
-              <a:buNone/>
-            </a:pPr>
-            <a:r>
-              <a:rPr>
-                <a:latin typeface="Courier"/>
-              </a:rPr>
-              <a:t># A tibble: 6 × 4
-  side  weight_g width_cm height_cm
-  &lt;chr&gt;    &lt;dbl&gt;    &lt;dbl&gt;     &lt;dbl&gt;
-1 sunny        4       12        21
-2 sunny        3       14        22
-3 sunny        5       12        21
-4 sunny        3       13        23
-5 sunny        4       15        22
-6 sunny        3       13        23</a:t>
-            </a:r>
-          </a:p>
-          <a:p>
-            <a:pPr lvl="0" indent="0">
-              <a:buNone/>
-            </a:pPr>
-            <a:r>
-              <a:rPr>
-                <a:solidFill>
-                  <a:srgbClr val="5E5E5E"/>
-                </a:solidFill>
-                <a:latin typeface="Courier"/>
-              </a:rPr>
-              <a:t># Keep columns that start with a word</a:t>
-            </a:r>
-            <a:br/>
-            <a:r>
-              <a:rPr>
-                <a:solidFill>
-                  <a:srgbClr val="003B4F"/>
-                </a:solidFill>
-                <a:latin typeface="Courier"/>
-              </a:rPr>
-              <a:t>tree_df </a:t>
-            </a:r>
-            <a:r>
-              <a:rPr>
-                <a:solidFill>
-                  <a:srgbClr val="5E5E5E"/>
-                </a:solidFill>
-                <a:latin typeface="Courier"/>
-              </a:rPr>
-              <a:t>%&gt;%</a:t>
-            </a:r>
-            <a:r>
-              <a:rPr>
-                <a:solidFill>
-                  <a:srgbClr val="003B4F"/>
-                </a:solidFill>
-                <a:latin typeface="Courier"/>
-              </a:rPr>
-              <a:t> </a:t>
-            </a:r>
-            <a:r>
-              <a:rPr>
-                <a:solidFill>
-                  <a:srgbClr val="4758AB"/>
-                </a:solidFill>
-                <a:latin typeface="Courier"/>
-              </a:rPr>
-              <a:t>select</a:t>
-            </a:r>
-            <a:r>
-              <a:rPr>
-                <a:solidFill>
-                  <a:srgbClr val="003B4F"/>
-                </a:solidFill>
-                <a:latin typeface="Courier"/>
-              </a:rPr>
-              <a:t>(</a:t>
-            </a:r>
-            <a:r>
-              <a:rPr>
-                <a:solidFill>
-                  <a:srgbClr val="4758AB"/>
-                </a:solidFill>
-                <a:latin typeface="Courier"/>
-              </a:rPr>
-              <a:t>starts_with</a:t>
-            </a:r>
-            <a:r>
-              <a:rPr>
-                <a:solidFill>
-                  <a:srgbClr val="003B4F"/>
-                </a:solidFill>
-                <a:latin typeface="Courier"/>
-              </a:rPr>
-              <a:t>(</a:t>
-            </a:r>
-            <a:r>
-              <a:rPr>
-                <a:solidFill>
-                  <a:srgbClr val="20794D"/>
-                </a:solidFill>
-                <a:latin typeface="Courier"/>
-              </a:rPr>
-              <a:t>"weight"</a:t>
-            </a:r>
-            <a:r>
-              <a:rPr>
-                <a:solidFill>
-                  <a:srgbClr val="003B4F"/>
-                </a:solidFill>
-                <a:latin typeface="Courier"/>
-              </a:rPr>
-              <a:t>)) </a:t>
-            </a:r>
-            <a:r>
-              <a:rPr>
-                <a:solidFill>
-                  <a:srgbClr val="5E5E5E"/>
-                </a:solidFill>
-                <a:latin typeface="Courier"/>
-              </a:rPr>
-              <a:t>%&gt;%</a:t>
-            </a:r>
-            <a:r>
-              <a:rPr>
-                <a:solidFill>
-                  <a:srgbClr val="003B4F"/>
-                </a:solidFill>
-                <a:latin typeface="Courier"/>
-              </a:rPr>
-              <a:t> </a:t>
-            </a:r>
-            <a:r>
-              <a:rPr>
-                <a:solidFill>
-                  <a:srgbClr val="4758AB"/>
-                </a:solidFill>
-                <a:latin typeface="Courier"/>
-              </a:rPr>
-              <a:t>head</a:t>
-            </a:r>
-            <a:r>
-              <a:rPr>
-                <a:solidFill>
-                  <a:srgbClr val="003B4F"/>
-                </a:solidFill>
-                <a:latin typeface="Courier"/>
-              </a:rPr>
-              <a:t>()</a:t>
-            </a:r>
-          </a:p>
-          <a:p>
-            <a:pPr lvl="0" indent="0">
-              <a:buNone/>
-            </a:pPr>
-            <a:r>
-              <a:rPr>
-                <a:latin typeface="Courier"/>
-              </a:rPr>
-              <a:t># A tibble: 6 × 1
-  weight_g
-     &lt;dbl&gt;
-1        4
-2        3
-3        5
-4        3
-5        4
-6        3</a:t>
-            </a:r>
-          </a:p>
-        </p:txBody>
-      </p:sp>
-      <p:sp>
-        <p:nvSpPr>
-          <p:cNvPr id="4" name="Content Placeholder 3"/>
-          <p:cNvSpPr>
-            <a:spLocks noGrp="1"/>
-          </p:cNvSpPr>
-          <p:nvPr>
-            <p:ph idx="2" sz="half"/>
-          </p:nvPr>
-        </p:nvSpPr>
-        <p:spPr/>
-        <p:txBody>
-          <a:bodyPr/>
-          <a:lstStyle/>
-          <a:p>
-            <a:pPr lvl="0"/>
-            <a:r>
-              <a:rPr b="1"/>
-              <a:t>Why </a:t>
-            </a:r>
-            <a:r>
-              <a:rPr b="1">
-                <a:latin typeface="Courier"/>
-              </a:rPr>
-              <a:t>select()</a:t>
-            </a:r>
-            <a:r>
-              <a:rPr b="1"/>
-              <a:t> matters:</a:t>
-            </a:r>
-          </a:p>
-          <a:p>
-            <a:pPr lvl="1"/>
-            <a:r>
-              <a:rPr/>
-              <a:t>Real datasets often have 50–100+ columns</a:t>
-            </a:r>
-          </a:p>
-          <a:p>
-            <a:pPr lvl="1"/>
-            <a:r>
-              <a:rPr/>
-              <a:t>You rarely need all of them</a:t>
-            </a:r>
-          </a:p>
-          <a:p>
-            <a:pPr lvl="1"/>
-            <a:r>
-              <a:rPr>
-                <a:latin typeface="Courier"/>
-              </a:rPr>
-              <a:t>select()</a:t>
-            </a:r>
-            <a:r>
-              <a:rPr/>
-              <a:t> keeps your workspace clean</a:t>
-            </a:r>
-          </a:p>
-          <a:p>
-            <a:pPr lvl="0"/>
-            <a:r>
-              <a:rPr b="1"/>
-              <a:t>Useful helpers:</a:t>
-            </a:r>
-          </a:p>
-          <a:p>
-            <a:pPr lvl="1"/>
-            <a:r>
-              <a:rPr>
-                <a:latin typeface="Courier"/>
-              </a:rPr>
-              <a:t>starts_with("x")</a:t>
-            </a:r>
-            <a:r>
-              <a:rPr/>
-              <a:t> — columns starting with “x”</a:t>
-            </a:r>
-          </a:p>
-          <a:p>
-            <a:pPr lvl="1"/>
-            <a:r>
-              <a:rPr>
-                <a:latin typeface="Courier"/>
-              </a:rPr>
-              <a:t>ends_with("_g")</a:t>
-            </a:r>
-            <a:r>
-              <a:rPr/>
-              <a:t> — columns ending with “_g”</a:t>
-            </a:r>
-          </a:p>
-          <a:p>
-            <a:pPr lvl="1"/>
-            <a:r>
-              <a:rPr>
-                <a:latin typeface="Courier"/>
-              </a:rPr>
-              <a:t>contains("cm")</a:t>
-            </a:r>
-            <a:r>
-              <a:rPr/>
-              <a:t> — columns containing “cm”</a:t>
-            </a:r>
-          </a:p>
-          <a:p>
-            <a:pPr lvl="0" indent="0" marL="0">
-              <a:buNone/>
-            </a:pPr>
-            <a:r>
-              <a:rPr/>
-              <a:t>📖 </a:t>
-            </a:r>
-            <a:r>
-              <a:rPr>
-                <a:hlinkClick r:id="rId2"/>
-              </a:rPr>
-              <a:t>R4DS §3.3</a:t>
-            </a:r>
-          </a:p>
-        </p:txBody>
-      </p:sp>
-    </p:spTree>
-  </p:cSld>
-</p:sld>
-</file>
-
 <file path=ppt/slides/slide9.xml><?xml version="1.0" encoding="utf-8"?>
 <p:sld xmlns:a="http://schemas.openxmlformats.org/drawingml/2006/main" xmlns:r="http://schemas.openxmlformats.org/officeDocument/2006/relationships" xmlns:p="http://schemas.openxmlformats.org/presentationml/2006/main">
   <p:cSld>
@@ -22694,11 +25037,8 @@
         <p:spPr>
           <a:xfrm>
             <a:off x="0" y="0"/>
-            <a:ext cx="9144000" cy="602780"/>
+            <a:ext cx="9144000" cy="582780"/>
           </a:xfrm>
-          <a:solidFill>
-            <a:srgbClr val="1A1A2E"/>
-          </a:solidFill>
         </p:spPr>
         <p:txBody>
           <a:bodyPr/>
@@ -22711,11 +25051,11 @@
               <a:rPr>
                 <a:latin typeface="Courier"/>
               </a:rPr>
-              <a:t>mutate()</a:t>
+              <a:t>filter()</a:t>
             </a:r>
             <a:r>
               <a:rPr/>
-              <a:t> — Creating New Columns</a:t>
+              <a:t> — Picking Rows</a:t>
             </a:r>
           </a:p>
         </p:txBody>
@@ -22727,7 +25067,7 @@
             <a:spLocks noGrp="1"/>
           </p:cNvSpPr>
           <p:nvPr>
-            <p:ph idx="1" sz="half"/>
+            <p:ph idx="1"/>
           </p:nvPr>
         </p:nvSpPr>
         <p:spPr/>
@@ -22735,713 +25075,6 @@
           <a:bodyPr/>
           <a:lstStyle/>
           <a:p>
-            <a:pPr lvl="0" indent="0">
-              <a:buNone/>
-            </a:pPr>
-            <a:r>
-              <a:rPr>
-                <a:solidFill>
-                  <a:srgbClr val="5E5E5E"/>
-                </a:solidFill>
-                <a:latin typeface="Courier"/>
-              </a:rPr>
-              <a:t># mutate() adds a new column to the data frame ---------</a:t>
-            </a:r>
-            <a:br/>
-            <a:br/>
-            <a:r>
-              <a:rPr>
-                <a:solidFill>
-                  <a:srgbClr val="5E5E5E"/>
-                </a:solidFill>
-                <a:latin typeface="Courier"/>
-              </a:rPr>
-              <a:t># Convert grams to milligrams</a:t>
-            </a:r>
-            <a:br/>
-            <a:r>
-              <a:rPr>
-                <a:solidFill>
-                  <a:srgbClr val="003B4F"/>
-                </a:solidFill>
-                <a:latin typeface="Courier"/>
-              </a:rPr>
-              <a:t>tree_df </a:t>
-            </a:r>
-            <a:r>
-              <a:rPr>
-                <a:solidFill>
-                  <a:srgbClr val="5E5E5E"/>
-                </a:solidFill>
-                <a:latin typeface="Courier"/>
-              </a:rPr>
-              <a:t>%&gt;%</a:t>
-            </a:r>
-            <a:br/>
-            <a:r>
-              <a:rPr>
-                <a:solidFill>
-                  <a:srgbClr val="003B4F"/>
-                </a:solidFill>
-                <a:latin typeface="Courier"/>
-              </a:rPr>
-              <a:t>  </a:t>
-            </a:r>
-            <a:r>
-              <a:rPr>
-                <a:solidFill>
-                  <a:srgbClr val="4758AB"/>
-                </a:solidFill>
-                <a:latin typeface="Courier"/>
-              </a:rPr>
-              <a:t>mutate</a:t>
-            </a:r>
-            <a:r>
-              <a:rPr>
-                <a:solidFill>
-                  <a:srgbClr val="003B4F"/>
-                </a:solidFill>
-                <a:latin typeface="Courier"/>
-              </a:rPr>
-              <a:t>(</a:t>
-            </a:r>
-            <a:r>
-              <a:rPr>
-                <a:solidFill>
-                  <a:srgbClr val="657422"/>
-                </a:solidFill>
-                <a:latin typeface="Courier"/>
-              </a:rPr>
-              <a:t>weight_mg =</a:t>
-            </a:r>
-            <a:r>
-              <a:rPr>
-                <a:solidFill>
-                  <a:srgbClr val="003B4F"/>
-                </a:solidFill>
-                <a:latin typeface="Courier"/>
-              </a:rPr>
-              <a:t> weight_g </a:t>
-            </a:r>
-            <a:r>
-              <a:rPr>
-                <a:solidFill>
-                  <a:srgbClr val="5E5E5E"/>
-                </a:solidFill>
-                <a:latin typeface="Courier"/>
-              </a:rPr>
-              <a:t>*</a:t>
-            </a:r>
-            <a:r>
-              <a:rPr>
-                <a:solidFill>
-                  <a:srgbClr val="003B4F"/>
-                </a:solidFill>
-                <a:latin typeface="Courier"/>
-              </a:rPr>
-              <a:t> </a:t>
-            </a:r>
-            <a:r>
-              <a:rPr>
-                <a:solidFill>
-                  <a:srgbClr val="AD0000"/>
-                </a:solidFill>
-                <a:latin typeface="Courier"/>
-              </a:rPr>
-              <a:t>1000</a:t>
-            </a:r>
-            <a:r>
-              <a:rPr>
-                <a:solidFill>
-                  <a:srgbClr val="003B4F"/>
-                </a:solidFill>
-                <a:latin typeface="Courier"/>
-              </a:rPr>
-              <a:t>) </a:t>
-            </a:r>
-            <a:r>
-              <a:rPr>
-                <a:solidFill>
-                  <a:srgbClr val="5E5E5E"/>
-                </a:solidFill>
-                <a:latin typeface="Courier"/>
-              </a:rPr>
-              <a:t>%&gt;%</a:t>
-            </a:r>
-            <a:br/>
-            <a:r>
-              <a:rPr>
-                <a:solidFill>
-                  <a:srgbClr val="003B4F"/>
-                </a:solidFill>
-                <a:latin typeface="Courier"/>
-              </a:rPr>
-              <a:t>  </a:t>
-            </a:r>
-            <a:r>
-              <a:rPr>
-                <a:solidFill>
-                  <a:srgbClr val="4758AB"/>
-                </a:solidFill>
-                <a:latin typeface="Courier"/>
-              </a:rPr>
-              <a:t>head</a:t>
-            </a:r>
-            <a:r>
-              <a:rPr>
-                <a:solidFill>
-                  <a:srgbClr val="003B4F"/>
-                </a:solidFill>
-                <a:latin typeface="Courier"/>
-              </a:rPr>
-              <a:t>()</a:t>
-            </a:r>
-          </a:p>
-          <a:p>
-            <a:pPr lvl="0" indent="0">
-              <a:buNone/>
-            </a:pPr>
-            <a:r>
-              <a:rPr>
-                <a:latin typeface="Courier"/>
-              </a:rPr>
-              <a:t># A tibble: 6 × 6
-  index side  weight_g width_cm height_cm weight_mg
-  &lt;dbl&gt; &lt;chr&gt;    &lt;dbl&gt;    &lt;dbl&gt;     &lt;dbl&gt;     &lt;dbl&gt;
-1     1 sunny        4       12        21      4000
-2     2 sunny        3       14        22      3000
-3     3 sunny        5       12        21      5000
-4     4 sunny        3       13        23      3000
-5     5 sunny        4       15        22      4000
-6     6 sunny        3       13        23      3000</a:t>
-            </a:r>
-          </a:p>
-          <a:p>
-            <a:pPr lvl="0" indent="0">
-              <a:buNone/>
-            </a:pPr>
-            <a:r>
-              <a:rPr>
-                <a:solidFill>
-                  <a:srgbClr val="5E5E5E"/>
-                </a:solidFill>
-                <a:latin typeface="Courier"/>
-              </a:rPr>
-              <a:t># Add a size category based on weight</a:t>
-            </a:r>
-            <a:br/>
-            <a:r>
-              <a:rPr>
-                <a:solidFill>
-                  <a:srgbClr val="003B4F"/>
-                </a:solidFill>
-                <a:latin typeface="Courier"/>
-              </a:rPr>
-              <a:t>tree_df </a:t>
-            </a:r>
-            <a:r>
-              <a:rPr>
-                <a:solidFill>
-                  <a:srgbClr val="5E5E5E"/>
-                </a:solidFill>
-                <a:latin typeface="Courier"/>
-              </a:rPr>
-              <a:t>%&gt;%</a:t>
-            </a:r>
-            <a:br/>
-            <a:r>
-              <a:rPr>
-                <a:solidFill>
-                  <a:srgbClr val="003B4F"/>
-                </a:solidFill>
-                <a:latin typeface="Courier"/>
-              </a:rPr>
-              <a:t>  </a:t>
-            </a:r>
-            <a:r>
-              <a:rPr>
-                <a:solidFill>
-                  <a:srgbClr val="4758AB"/>
-                </a:solidFill>
-                <a:latin typeface="Courier"/>
-              </a:rPr>
-              <a:t>mutate</a:t>
-            </a:r>
-            <a:r>
-              <a:rPr>
-                <a:solidFill>
-                  <a:srgbClr val="003B4F"/>
-                </a:solidFill>
-                <a:latin typeface="Courier"/>
-              </a:rPr>
-              <a:t>(</a:t>
-            </a:r>
-            <a:r>
-              <a:rPr>
-                <a:solidFill>
-                  <a:srgbClr val="657422"/>
-                </a:solidFill>
-                <a:latin typeface="Courier"/>
-              </a:rPr>
-              <a:t>size_class =</a:t>
-            </a:r>
-            <a:r>
-              <a:rPr>
-                <a:solidFill>
-                  <a:srgbClr val="003B4F"/>
-                </a:solidFill>
-                <a:latin typeface="Courier"/>
-              </a:rPr>
-              <a:t> </a:t>
-            </a:r>
-            <a:r>
-              <a:rPr>
-                <a:solidFill>
-                  <a:srgbClr val="4758AB"/>
-                </a:solidFill>
-                <a:latin typeface="Courier"/>
-              </a:rPr>
-              <a:t>if_else</a:t>
-            </a:r>
-            <a:r>
-              <a:rPr>
-                <a:solidFill>
-                  <a:srgbClr val="003B4F"/>
-                </a:solidFill>
-                <a:latin typeface="Courier"/>
-              </a:rPr>
-              <a:t>(weight_g </a:t>
-            </a:r>
-            <a:r>
-              <a:rPr>
-                <a:solidFill>
-                  <a:srgbClr val="5E5E5E"/>
-                </a:solidFill>
-                <a:latin typeface="Courier"/>
-              </a:rPr>
-              <a:t>&gt;</a:t>
-            </a:r>
-            <a:r>
-              <a:rPr>
-                <a:solidFill>
-                  <a:srgbClr val="003B4F"/>
-                </a:solidFill>
-                <a:latin typeface="Courier"/>
-              </a:rPr>
-              <a:t> </a:t>
-            </a:r>
-            <a:r>
-              <a:rPr>
-                <a:solidFill>
-                  <a:srgbClr val="AD0000"/>
-                </a:solidFill>
-                <a:latin typeface="Courier"/>
-              </a:rPr>
-              <a:t>5</a:t>
-            </a:r>
-            <a:r>
-              <a:rPr>
-                <a:solidFill>
-                  <a:srgbClr val="003B4F"/>
-                </a:solidFill>
-                <a:latin typeface="Courier"/>
-              </a:rPr>
-              <a:t>, </a:t>
-            </a:r>
-            <a:r>
-              <a:rPr>
-                <a:solidFill>
-                  <a:srgbClr val="20794D"/>
-                </a:solidFill>
-                <a:latin typeface="Courier"/>
-              </a:rPr>
-              <a:t>"large"</a:t>
-            </a:r>
-            <a:r>
-              <a:rPr>
-                <a:solidFill>
-                  <a:srgbClr val="003B4F"/>
-                </a:solidFill>
-                <a:latin typeface="Courier"/>
-              </a:rPr>
-              <a:t>, </a:t>
-            </a:r>
-            <a:r>
-              <a:rPr>
-                <a:solidFill>
-                  <a:srgbClr val="20794D"/>
-                </a:solidFill>
-                <a:latin typeface="Courier"/>
-              </a:rPr>
-              <a:t>"small"</a:t>
-            </a:r>
-            <a:r>
-              <a:rPr>
-                <a:solidFill>
-                  <a:srgbClr val="003B4F"/>
-                </a:solidFill>
-                <a:latin typeface="Courier"/>
-              </a:rPr>
-              <a:t>)) </a:t>
-            </a:r>
-            <a:r>
-              <a:rPr>
-                <a:solidFill>
-                  <a:srgbClr val="5E5E5E"/>
-                </a:solidFill>
-                <a:latin typeface="Courier"/>
-              </a:rPr>
-              <a:t>%&gt;%</a:t>
-            </a:r>
-            <a:br/>
-            <a:r>
-              <a:rPr>
-                <a:solidFill>
-                  <a:srgbClr val="003B4F"/>
-                </a:solidFill>
-                <a:latin typeface="Courier"/>
-              </a:rPr>
-              <a:t>  </a:t>
-            </a:r>
-            <a:r>
-              <a:rPr>
-                <a:solidFill>
-                  <a:srgbClr val="4758AB"/>
-                </a:solidFill>
-                <a:latin typeface="Courier"/>
-              </a:rPr>
-              <a:t>head</a:t>
-            </a:r>
-            <a:r>
-              <a:rPr>
-                <a:solidFill>
-                  <a:srgbClr val="003B4F"/>
-                </a:solidFill>
-                <a:latin typeface="Courier"/>
-              </a:rPr>
-              <a:t>()</a:t>
-            </a:r>
-          </a:p>
-          <a:p>
-            <a:pPr lvl="0" indent="0">
-              <a:buNone/>
-            </a:pPr>
-            <a:r>
-              <a:rPr>
-                <a:latin typeface="Courier"/>
-              </a:rPr>
-              <a:t># A tibble: 6 × 6
-  index side  weight_g width_cm height_cm size_class
-  &lt;dbl&gt; &lt;chr&gt;    &lt;dbl&gt;    &lt;dbl&gt;     &lt;dbl&gt; &lt;chr&gt;     
-1     1 sunny        4       12        21 small     
-2     2 sunny        3       14        22 small     
-3     3 sunny        5       12        21 small     
-4     4 sunny        3       13        23 small     
-5     5 sunny        4       15        22 small     
-6     6 sunny        3       13        23 small     </a:t>
-            </a:r>
-          </a:p>
-          <a:p>
-            <a:pPr lvl="0" indent="0">
-              <a:buNone/>
-            </a:pPr>
-            <a:r>
-              <a:rPr>
-                <a:solidFill>
-                  <a:srgbClr val="5E5E5E"/>
-                </a:solidFill>
-                <a:latin typeface="Courier"/>
-              </a:rPr>
-              <a:t># mutate() can reference multiple existing columns</a:t>
-            </a:r>
-            <a:br/>
-            <a:r>
-              <a:rPr>
-                <a:solidFill>
-                  <a:srgbClr val="003B4F"/>
-                </a:solidFill>
-                <a:latin typeface="Courier"/>
-              </a:rPr>
-              <a:t>tree_df </a:t>
-            </a:r>
-            <a:r>
-              <a:rPr>
-                <a:solidFill>
-                  <a:srgbClr val="5E5E5E"/>
-                </a:solidFill>
-                <a:latin typeface="Courier"/>
-              </a:rPr>
-              <a:t>%&gt;%</a:t>
-            </a:r>
-            <a:br/>
-            <a:r>
-              <a:rPr>
-                <a:solidFill>
-                  <a:srgbClr val="003B4F"/>
-                </a:solidFill>
-                <a:latin typeface="Courier"/>
-              </a:rPr>
-              <a:t>  </a:t>
-            </a:r>
-            <a:r>
-              <a:rPr>
-                <a:solidFill>
-                  <a:srgbClr val="4758AB"/>
-                </a:solidFill>
-                <a:latin typeface="Courier"/>
-              </a:rPr>
-              <a:t>mutate</a:t>
-            </a:r>
-            <a:r>
-              <a:rPr>
-                <a:solidFill>
-                  <a:srgbClr val="003B4F"/>
-                </a:solidFill>
-                <a:latin typeface="Courier"/>
-              </a:rPr>
-              <a:t>(</a:t>
-            </a:r>
-            <a:br/>
-            <a:r>
-              <a:rPr>
-                <a:solidFill>
-                  <a:srgbClr val="003B4F"/>
-                </a:solidFill>
-                <a:latin typeface="Courier"/>
-              </a:rPr>
-              <a:t>    </a:t>
-            </a:r>
-            <a:r>
-              <a:rPr>
-                <a:solidFill>
-                  <a:srgbClr val="657422"/>
-                </a:solidFill>
-                <a:latin typeface="Courier"/>
-              </a:rPr>
-              <a:t>weight_mg =</a:t>
-            </a:r>
-            <a:r>
-              <a:rPr>
-                <a:solidFill>
-                  <a:srgbClr val="003B4F"/>
-                </a:solidFill>
-                <a:latin typeface="Courier"/>
-              </a:rPr>
-              <a:t> weight_g </a:t>
-            </a:r>
-            <a:r>
-              <a:rPr>
-                <a:solidFill>
-                  <a:srgbClr val="5E5E5E"/>
-                </a:solidFill>
-                <a:latin typeface="Courier"/>
-              </a:rPr>
-              <a:t>*</a:t>
-            </a:r>
-            <a:r>
-              <a:rPr>
-                <a:solidFill>
-                  <a:srgbClr val="003B4F"/>
-                </a:solidFill>
-                <a:latin typeface="Courier"/>
-              </a:rPr>
-              <a:t> </a:t>
-            </a:r>
-            <a:r>
-              <a:rPr>
-                <a:solidFill>
-                  <a:srgbClr val="AD0000"/>
-                </a:solidFill>
-                <a:latin typeface="Courier"/>
-              </a:rPr>
-              <a:t>1000</a:t>
-            </a:r>
-            <a:r>
-              <a:rPr>
-                <a:solidFill>
-                  <a:srgbClr val="003B4F"/>
-                </a:solidFill>
-                <a:latin typeface="Courier"/>
-              </a:rPr>
-              <a:t>,</a:t>
-            </a:r>
-            <a:br/>
-            <a:r>
-              <a:rPr>
-                <a:solidFill>
-                  <a:srgbClr val="003B4F"/>
-                </a:solidFill>
-                <a:latin typeface="Courier"/>
-              </a:rPr>
-              <a:t>    </a:t>
-            </a:r>
-            <a:r>
-              <a:rPr>
-                <a:solidFill>
-                  <a:srgbClr val="657422"/>
-                </a:solidFill>
-                <a:latin typeface="Courier"/>
-              </a:rPr>
-              <a:t>area_approx =</a:t>
-            </a:r>
-            <a:r>
-              <a:rPr>
-                <a:solidFill>
-                  <a:srgbClr val="003B4F"/>
-                </a:solidFill>
-                <a:latin typeface="Courier"/>
-              </a:rPr>
-              <a:t> width_cm </a:t>
-            </a:r>
-            <a:r>
-              <a:rPr>
-                <a:solidFill>
-                  <a:srgbClr val="5E5E5E"/>
-                </a:solidFill>
-                <a:latin typeface="Courier"/>
-              </a:rPr>
-              <a:t>*</a:t>
-            </a:r>
-            <a:r>
-              <a:rPr>
-                <a:solidFill>
-                  <a:srgbClr val="003B4F"/>
-                </a:solidFill>
-                <a:latin typeface="Courier"/>
-              </a:rPr>
-              <a:t> height_cm </a:t>
-            </a:r>
-            <a:r>
-              <a:rPr>
-                <a:solidFill>
-                  <a:srgbClr val="5E5E5E"/>
-                </a:solidFill>
-                <a:latin typeface="Courier"/>
-              </a:rPr>
-              <a:t># rough area estimate</a:t>
-            </a:r>
-            <a:br/>
-            <a:r>
-              <a:rPr>
-                <a:solidFill>
-                  <a:srgbClr val="003B4F"/>
-                </a:solidFill>
-                <a:latin typeface="Courier"/>
-              </a:rPr>
-              <a:t>  ) </a:t>
-            </a:r>
-            <a:r>
-              <a:rPr>
-                <a:solidFill>
-                  <a:srgbClr val="5E5E5E"/>
-                </a:solidFill>
-                <a:latin typeface="Courier"/>
-              </a:rPr>
-              <a:t>%&gt;%</a:t>
-            </a:r>
-            <a:br/>
-            <a:r>
-              <a:rPr>
-                <a:solidFill>
-                  <a:srgbClr val="003B4F"/>
-                </a:solidFill>
-                <a:latin typeface="Courier"/>
-              </a:rPr>
-              <a:t>  </a:t>
-            </a:r>
-            <a:r>
-              <a:rPr>
-                <a:solidFill>
-                  <a:srgbClr val="4758AB"/>
-                </a:solidFill>
-                <a:latin typeface="Courier"/>
-              </a:rPr>
-              <a:t>head</a:t>
-            </a:r>
-            <a:r>
-              <a:rPr>
-                <a:solidFill>
-                  <a:srgbClr val="003B4F"/>
-                </a:solidFill>
-                <a:latin typeface="Courier"/>
-              </a:rPr>
-              <a:t>()</a:t>
-            </a:r>
-          </a:p>
-          <a:p>
-            <a:pPr lvl="0" indent="0">
-              <a:buNone/>
-            </a:pPr>
-            <a:r>
-              <a:rPr>
-                <a:latin typeface="Courier"/>
-              </a:rPr>
-              <a:t># A tibble: 6 × 7
-  index side  weight_g width_cm height_cm weight_mg area_approx
-  &lt;dbl&gt; &lt;chr&gt;    &lt;dbl&gt;    &lt;dbl&gt;     &lt;dbl&gt;     &lt;dbl&gt;       &lt;dbl&gt;
-1     1 sunny        4       12        21      4000         252
-2     2 sunny        3       14        22      3000         308
-3     3 sunny        5       12        21      5000         252
-4     4 sunny        3       13        23      3000         299
-5     5 sunny        4       15        22      4000         330
-6     6 sunny        3       13        23      3000         299</a:t>
-            </a:r>
-          </a:p>
-        </p:txBody>
-      </p:sp>
-      <p:sp>
-        <p:nvSpPr>
-          <p:cNvPr id="4" name="Content Placeholder 3"/>
-          <p:cNvSpPr>
-            <a:spLocks noGrp="1"/>
-          </p:cNvSpPr>
-          <p:nvPr>
-            <p:ph idx="2" sz="half"/>
-          </p:nvPr>
-        </p:nvSpPr>
-        <p:spPr/>
-        <p:txBody>
-          <a:bodyPr/>
-          <a:lstStyle/>
-          <a:p>
-            <a:pPr lvl="0"/>
-            <a:r>
-              <a:rPr>
-                <a:latin typeface="Courier"/>
-              </a:rPr>
-              <a:t>mutate()</a:t>
-            </a:r>
-            <a:r>
-              <a:rPr/>
-              <a:t> keeps </a:t>
-            </a:r>
-            <a:r>
-              <a:rPr b="1"/>
-              <a:t>all existing columns</a:t>
-            </a:r>
-            <a:r>
-              <a:rPr/>
-              <a:t> and adds new ones</a:t>
-            </a:r>
-          </a:p>
-          <a:p>
-            <a:pPr lvl="0"/>
-            <a:r>
-              <a:rPr b="1"/>
-              <a:t>Use </a:t>
-            </a:r>
-            <a:r>
-              <a:rPr b="1">
-                <a:latin typeface="Courier"/>
-              </a:rPr>
-              <a:t>if_else(condition, value_if_true, value_if_false)</a:t>
-            </a:r>
-            <a:r>
-              <a:rPr b="1"/>
-              <a:t> to create categories</a:t>
-            </a:r>
-          </a:p>
-          <a:p>
             <a:pPr lvl="0" indent="0" marL="1270000">
               <a:buNone/>
             </a:pPr>
@@ -23456,52 +25089,21 @@
             </a:pPr>
             <a:r>
               <a:rPr sz="2000" b="1"/>
-              <a:t>✅ Key idea</a:t>
-            </a:r>
-          </a:p>
-          <a:p>
-            <a:pPr lvl="0" indent="0" marL="1270000">
-              <a:buNone/>
-            </a:pPr>
+              <a:t>🔮 Predict first:</a:t>
+            </a:r>
+            <a:r>
+              <a:rPr sz="2000"/>
+              <a:t> We have 20 leaves. Before you run it, guess how many rows </a:t>
+            </a:r>
             <a:r>
               <a:rPr sz="2000">
                 <a:latin typeface="Courier"/>
               </a:rPr>
-              <a:t>mutate()</a:t>
+              <a:t>filter(side == "sunny")</a:t>
             </a:r>
             <a:r>
               <a:rPr sz="2000"/>
-              <a:t> never removes columns — it adds to the right of your data frame.</a:t>
-            </a:r>
-          </a:p>
-          <a:p>
-            <a:pPr lvl="0" indent="0" marL="1270000">
-              <a:buNone/>
-            </a:pPr>
-            <a:r>
-              <a:rPr sz="2000"/>
-              <a:t>To overwrite a column, just use the same name on the left: </a:t>
-            </a:r>
-            <a:r>
-              <a:rPr sz="2000">
-                <a:latin typeface="Courier"/>
-              </a:rPr>
-              <a:t>mutate(weight_g = round(weight_g, 1))</a:t>
-            </a:r>
-          </a:p>
-          <a:p>
-            <a:pPr lvl="0" indent="0" marL="0">
-              <a:buNone/>
-            </a:pPr>
-            <a:r>
-              <a:rPr/>
-              <a:t>📖 </a:t>
-            </a:r>
-            <a:r>
-              <a:rPr>
-                <a:hlinkClick r:id="rId2"/>
-              </a:rPr>
-              <a:t>R4DS §3.3</a:t>
+              <a:t> returns. Write your number down, then run it and check.</a:t>
             </a:r>
           </a:p>
         </p:txBody>
